--- a/ゲーム科2年/00_前期/ゲーム開発Ⅰ/Blender/08_アニメーション.pptx
+++ b/ゲーム科2年/00_前期/ゲーム開発Ⅰ/Blender/08_アニメーション.pptx
@@ -6,6 +6,35 @@
   </p:sldMasterIdLst>
   <p:sldIdLst>
     <p:sldId id="258" r:id="rId2"/>
+    <p:sldId id="259" r:id="rId3"/>
+    <p:sldId id="260" r:id="rId4"/>
+    <p:sldId id="261" r:id="rId5"/>
+    <p:sldId id="262" r:id="rId6"/>
+    <p:sldId id="263" r:id="rId7"/>
+    <p:sldId id="264" r:id="rId8"/>
+    <p:sldId id="265" r:id="rId9"/>
+    <p:sldId id="266" r:id="rId10"/>
+    <p:sldId id="267" r:id="rId11"/>
+    <p:sldId id="268" r:id="rId12"/>
+    <p:sldId id="269" r:id="rId13"/>
+    <p:sldId id="271" r:id="rId14"/>
+    <p:sldId id="272" r:id="rId15"/>
+    <p:sldId id="270" r:id="rId16"/>
+    <p:sldId id="273" r:id="rId17"/>
+    <p:sldId id="274" r:id="rId18"/>
+    <p:sldId id="275" r:id="rId19"/>
+    <p:sldId id="276" r:id="rId20"/>
+    <p:sldId id="277" r:id="rId21"/>
+    <p:sldId id="278" r:id="rId22"/>
+    <p:sldId id="279" r:id="rId23"/>
+    <p:sldId id="280" r:id="rId24"/>
+    <p:sldId id="281" r:id="rId25"/>
+    <p:sldId id="282" r:id="rId26"/>
+    <p:sldId id="283" r:id="rId27"/>
+    <p:sldId id="284" r:id="rId28"/>
+    <p:sldId id="285" r:id="rId29"/>
+    <p:sldId id="286" r:id="rId30"/>
+    <p:sldId id="287" r:id="rId31"/>
   </p:sldIdLst>
   <p:sldSz cx="12192000" cy="6858000"/>
   <p:notesSz cx="6858000" cy="9144000"/>
@@ -259,7 +288,7 @@
           <a:p>
             <a:fld id="{E9CC885B-4903-4D54-9A93-00025F12DED9}" type="datetimeFigureOut">
               <a:rPr kumimoji="1" lang="ja-JP" altLang="en-US" smtClean="0"/>
-              <a:t>2025/2/5</a:t>
+              <a:t>2025/3/14</a:t>
             </a:fld>
             <a:endParaRPr kumimoji="1" lang="ja-JP" altLang="en-US"/>
           </a:p>
@@ -489,7 +518,7 @@
           <a:p>
             <a:fld id="{E9CC885B-4903-4D54-9A93-00025F12DED9}" type="datetimeFigureOut">
               <a:rPr kumimoji="1" lang="ja-JP" altLang="en-US" smtClean="0"/>
-              <a:t>2025/2/5</a:t>
+              <a:t>2025/3/14</a:t>
             </a:fld>
             <a:endParaRPr kumimoji="1" lang="ja-JP" altLang="en-US"/>
           </a:p>
@@ -729,7 +758,7 @@
           <a:p>
             <a:fld id="{E9CC885B-4903-4D54-9A93-00025F12DED9}" type="datetimeFigureOut">
               <a:rPr kumimoji="1" lang="ja-JP" altLang="en-US" smtClean="0"/>
-              <a:t>2025/2/5</a:t>
+              <a:t>2025/3/14</a:t>
             </a:fld>
             <a:endParaRPr kumimoji="1" lang="ja-JP" altLang="en-US"/>
           </a:p>
@@ -959,7 +988,7 @@
           <a:p>
             <a:fld id="{E9CC885B-4903-4D54-9A93-00025F12DED9}" type="datetimeFigureOut">
               <a:rPr kumimoji="1" lang="ja-JP" altLang="en-US" smtClean="0"/>
-              <a:t>2025/2/5</a:t>
+              <a:t>2025/3/14</a:t>
             </a:fld>
             <a:endParaRPr kumimoji="1" lang="ja-JP" altLang="en-US"/>
           </a:p>
@@ -1234,7 +1263,7 @@
           <a:p>
             <a:fld id="{E9CC885B-4903-4D54-9A93-00025F12DED9}" type="datetimeFigureOut">
               <a:rPr kumimoji="1" lang="ja-JP" altLang="en-US" smtClean="0"/>
-              <a:t>2025/2/5</a:t>
+              <a:t>2025/3/14</a:t>
             </a:fld>
             <a:endParaRPr kumimoji="1" lang="ja-JP" altLang="en-US"/>
           </a:p>
@@ -1563,7 +1592,7 @@
           <a:p>
             <a:fld id="{E9CC885B-4903-4D54-9A93-00025F12DED9}" type="datetimeFigureOut">
               <a:rPr kumimoji="1" lang="ja-JP" altLang="en-US" smtClean="0"/>
-              <a:t>2025/2/5</a:t>
+              <a:t>2025/3/14</a:t>
             </a:fld>
             <a:endParaRPr kumimoji="1" lang="ja-JP" altLang="en-US"/>
           </a:p>
@@ -2039,7 +2068,7 @@
           <a:p>
             <a:fld id="{E9CC885B-4903-4D54-9A93-00025F12DED9}" type="datetimeFigureOut">
               <a:rPr kumimoji="1" lang="ja-JP" altLang="en-US" smtClean="0"/>
-              <a:t>2025/2/5</a:t>
+              <a:t>2025/3/14</a:t>
             </a:fld>
             <a:endParaRPr kumimoji="1" lang="ja-JP" altLang="en-US"/>
           </a:p>
@@ -2180,7 +2209,7 @@
           <a:p>
             <a:fld id="{E9CC885B-4903-4D54-9A93-00025F12DED9}" type="datetimeFigureOut">
               <a:rPr kumimoji="1" lang="ja-JP" altLang="en-US" smtClean="0"/>
-              <a:t>2025/2/5</a:t>
+              <a:t>2025/3/14</a:t>
             </a:fld>
             <a:endParaRPr kumimoji="1" lang="ja-JP" altLang="en-US"/>
           </a:p>
@@ -2293,7 +2322,7 @@
           <a:p>
             <a:fld id="{E9CC885B-4903-4D54-9A93-00025F12DED9}" type="datetimeFigureOut">
               <a:rPr kumimoji="1" lang="ja-JP" altLang="en-US" smtClean="0"/>
-              <a:t>2025/2/5</a:t>
+              <a:t>2025/3/14</a:t>
             </a:fld>
             <a:endParaRPr kumimoji="1" lang="ja-JP" altLang="en-US"/>
           </a:p>
@@ -2636,7 +2665,7 @@
           <a:p>
             <a:fld id="{E9CC885B-4903-4D54-9A93-00025F12DED9}" type="datetimeFigureOut">
               <a:rPr kumimoji="1" lang="ja-JP" altLang="en-US" smtClean="0"/>
-              <a:t>2025/2/5</a:t>
+              <a:t>2025/3/14</a:t>
             </a:fld>
             <a:endParaRPr kumimoji="1" lang="ja-JP" altLang="en-US"/>
           </a:p>
@@ -2924,7 +2953,7 @@
           <a:p>
             <a:fld id="{E9CC885B-4903-4D54-9A93-00025F12DED9}" type="datetimeFigureOut">
               <a:rPr kumimoji="1" lang="ja-JP" altLang="en-US" smtClean="0"/>
-              <a:t>2025/2/5</a:t>
+              <a:t>2025/3/14</a:t>
             </a:fld>
             <a:endParaRPr kumimoji="1" lang="ja-JP" altLang="en-US"/>
           </a:p>
@@ -3197,7 +3226,7 @@
           <a:p>
             <a:fld id="{E9CC885B-4903-4D54-9A93-00025F12DED9}" type="datetimeFigureOut">
               <a:rPr kumimoji="1" lang="ja-JP" altLang="en-US" smtClean="0"/>
-              <a:t>2025/2/5</a:t>
+              <a:t>2025/3/14</a:t>
             </a:fld>
             <a:endParaRPr kumimoji="1" lang="ja-JP" altLang="en-US"/>
           </a:p>
@@ -3643,8 +3672,8 @@
           <a:lstStyle/>
           <a:p>
             <a:r>
-              <a:rPr lang="ja-JP" altLang="en-US" sz="3200" b="1" u="sng" dirty="0"/>
-              <a:t>モデリング課題</a:t>
+              <a:rPr kumimoji="1" lang="ja-JP" altLang="en-US" sz="3200" b="1" u="sng" dirty="0"/>
+              <a:t>アニメーション</a:t>
             </a:r>
             <a:endParaRPr kumimoji="1" lang="en-US" altLang="ja-JP" sz="3200" b="1" u="sng" dirty="0"/>
           </a:p>
@@ -3665,7 +3694,7 @@
         <p:spPr>
           <a:xfrm>
             <a:off x="567542" y="1216429"/>
-            <a:ext cx="9725739" cy="830997"/>
+            <a:ext cx="4493538" cy="461665"/>
           </a:xfrm>
           <a:prstGeom prst="rect">
             <a:avLst/>
@@ -3679,32 +3708,5175 @@
           <a:lstStyle/>
           <a:p>
             <a:r>
+              <a:rPr kumimoji="1" lang="ja-JP" altLang="en-US" sz="2400" dirty="0"/>
+              <a:t>アニメーション</a:t>
+            </a:r>
+            <a:r>
               <a:rPr lang="ja-JP" altLang="en-US" sz="2400" dirty="0"/>
-              <a:t>これまで学習したことを生かしてオリジナルモデルを作りましょう。</a:t>
-            </a:r>
-            <a:endParaRPr lang="en-US" altLang="ja-JP" sz="2400" dirty="0"/>
-          </a:p>
-          <a:p>
-            <a:r>
-              <a:rPr kumimoji="1" lang="ja-JP" altLang="en-US" sz="2400" dirty="0"/>
-              <a:t>キャラクターでも良いですし、無機物なものでも</a:t>
-            </a:r>
-            <a:r>
-              <a:rPr kumimoji="1" lang="en-US" altLang="ja-JP" sz="2400" dirty="0"/>
-              <a:t>OK</a:t>
-            </a:r>
-            <a:r>
-              <a:rPr kumimoji="1" lang="ja-JP" altLang="en-US" sz="2400" dirty="0"/>
-              <a:t>です。</a:t>
+              <a:t>を作成します。</a:t>
             </a:r>
             <a:endParaRPr kumimoji="1" lang="en-US" altLang="ja-JP" sz="2400" dirty="0"/>
           </a:p>
         </p:txBody>
       </p:sp>
+      <p:pic>
+        <p:nvPicPr>
+          <p:cNvPr id="3" name="図 2">
+            <a:extLst>
+              <a:ext uri="{FF2B5EF4-FFF2-40B4-BE49-F238E27FC236}">
+                <a16:creationId xmlns:a16="http://schemas.microsoft.com/office/drawing/2014/main" id="{C51F4A9D-2EC0-4E66-BBAD-303062E40636}"/>
+              </a:ext>
+            </a:extLst>
+          </p:cNvPr>
+          <p:cNvPicPr>
+            <a:picLocks noChangeAspect="1"/>
+          </p:cNvPicPr>
+          <p:nvPr/>
+        </p:nvPicPr>
+        <p:blipFill>
+          <a:blip r:embed="rId2"/>
+          <a:stretch>
+            <a:fillRect/>
+          </a:stretch>
+        </p:blipFill>
+        <p:spPr>
+          <a:xfrm>
+            <a:off x="567542" y="1817794"/>
+            <a:ext cx="4801270" cy="4706007"/>
+          </a:xfrm>
+          <a:prstGeom prst="rect">
+            <a:avLst/>
+          </a:prstGeom>
+        </p:spPr>
+      </p:pic>
     </p:spTree>
     <p:extLst>
       <p:ext uri="{BB962C8B-B14F-4D97-AF65-F5344CB8AC3E}">
         <p14:creationId xmlns:p14="http://schemas.microsoft.com/office/powerpoint/2010/main" val="1983551291"/>
+      </p:ext>
+    </p:extLst>
+  </p:cSld>
+  <p:clrMapOvr>
+    <a:masterClrMapping/>
+  </p:clrMapOvr>
+</p:sld>
+</file>
+
+<file path=ppt/slides/slide10.xml><?xml version="1.0" encoding="utf-8"?>
+<p:sld xmlns:a="http://schemas.openxmlformats.org/drawingml/2006/main" xmlns:r="http://schemas.openxmlformats.org/officeDocument/2006/relationships" xmlns:p="http://schemas.openxmlformats.org/presentationml/2006/main">
+  <p:cSld>
+    <p:spTree>
+      <p:nvGrpSpPr>
+        <p:cNvPr id="1" name=""/>
+        <p:cNvGrpSpPr/>
+        <p:nvPr/>
+      </p:nvGrpSpPr>
+      <p:grpSpPr>
+        <a:xfrm>
+          <a:off x="0" y="0"/>
+          <a:ext cx="0" cy="0"/>
+          <a:chOff x="0" y="0"/>
+          <a:chExt cx="0" cy="0"/>
+        </a:xfrm>
+      </p:grpSpPr>
+      <p:sp>
+        <p:nvSpPr>
+          <p:cNvPr id="4" name="テキスト ボックス 3">
+            <a:extLst>
+              <a:ext uri="{FF2B5EF4-FFF2-40B4-BE49-F238E27FC236}">
+                <a16:creationId xmlns:a16="http://schemas.microsoft.com/office/drawing/2014/main" id="{5A13BF46-B8C5-48AA-8308-C9ECFF431A18}"/>
+              </a:ext>
+            </a:extLst>
+          </p:cNvPr>
+          <p:cNvSpPr txBox="1"/>
+          <p:nvPr/>
+        </p:nvSpPr>
+        <p:spPr>
+          <a:xfrm>
+            <a:off x="567542" y="491954"/>
+            <a:ext cx="3057247" cy="584775"/>
+          </a:xfrm>
+          <a:prstGeom prst="rect">
+            <a:avLst/>
+          </a:prstGeom>
+          <a:noFill/>
+        </p:spPr>
+        <p:txBody>
+          <a:bodyPr wrap="none" rtlCol="0">
+            <a:spAutoFit/>
+          </a:bodyPr>
+          <a:lstStyle/>
+          <a:p>
+            <a:r>
+              <a:rPr kumimoji="1" lang="ja-JP" altLang="en-US" sz="3200" b="1" u="sng" dirty="0"/>
+              <a:t>アニメーション</a:t>
+            </a:r>
+            <a:endParaRPr kumimoji="1" lang="en-US" altLang="ja-JP" sz="3200" b="1" u="sng" dirty="0"/>
+          </a:p>
+        </p:txBody>
+      </p:sp>
+      <p:sp>
+        <p:nvSpPr>
+          <p:cNvPr id="6" name="テキスト ボックス 5">
+            <a:extLst>
+              <a:ext uri="{FF2B5EF4-FFF2-40B4-BE49-F238E27FC236}">
+                <a16:creationId xmlns:a16="http://schemas.microsoft.com/office/drawing/2014/main" id="{55830AD6-028B-4C4E-80BF-B70DFC1C3A46}"/>
+              </a:ext>
+            </a:extLst>
+          </p:cNvPr>
+          <p:cNvSpPr txBox="1"/>
+          <p:nvPr/>
+        </p:nvSpPr>
+        <p:spPr>
+          <a:xfrm>
+            <a:off x="567542" y="1216429"/>
+            <a:ext cx="6647974" cy="830997"/>
+          </a:xfrm>
+          <a:prstGeom prst="rect">
+            <a:avLst/>
+          </a:prstGeom>
+          <a:noFill/>
+        </p:spPr>
+        <p:txBody>
+          <a:bodyPr wrap="none" rtlCol="0">
+            <a:spAutoFit/>
+          </a:bodyPr>
+          <a:lstStyle/>
+          <a:p>
+            <a:r>
+              <a:rPr kumimoji="1" lang="ja-JP" altLang="en-US" sz="2400" dirty="0"/>
+              <a:t>腕のボーンは新たに追加します。</a:t>
+            </a:r>
+            <a:endParaRPr kumimoji="1" lang="en-US" altLang="ja-JP" sz="2400" dirty="0"/>
+          </a:p>
+          <a:p>
+            <a:r>
+              <a:rPr lang="ja-JP" altLang="en-US" sz="2400" dirty="0"/>
+              <a:t>「</a:t>
+            </a:r>
+            <a:r>
+              <a:rPr lang="ja-JP" altLang="en-US" sz="2400" b="1" dirty="0">
+                <a:solidFill>
+                  <a:srgbClr val="FF0000"/>
+                </a:solidFill>
+              </a:rPr>
+              <a:t>追加　＞　単一ボーン</a:t>
+            </a:r>
+            <a:r>
+              <a:rPr lang="ja-JP" altLang="en-US" sz="2400" dirty="0"/>
+              <a:t>」から追加できます。</a:t>
+            </a:r>
+            <a:endParaRPr kumimoji="1" lang="en-US" altLang="ja-JP" sz="2400" dirty="0"/>
+          </a:p>
+        </p:txBody>
+      </p:sp>
+      <p:pic>
+        <p:nvPicPr>
+          <p:cNvPr id="5" name="図 4">
+            <a:extLst>
+              <a:ext uri="{FF2B5EF4-FFF2-40B4-BE49-F238E27FC236}">
+                <a16:creationId xmlns:a16="http://schemas.microsoft.com/office/drawing/2014/main" id="{210FE58E-7B5D-451E-8133-E75F53C33C8D}"/>
+              </a:ext>
+            </a:extLst>
+          </p:cNvPr>
+          <p:cNvPicPr>
+            <a:picLocks noChangeAspect="1"/>
+          </p:cNvPicPr>
+          <p:nvPr/>
+        </p:nvPicPr>
+        <p:blipFill>
+          <a:blip r:embed="rId2"/>
+          <a:stretch>
+            <a:fillRect/>
+          </a:stretch>
+        </p:blipFill>
+        <p:spPr>
+          <a:xfrm>
+            <a:off x="567542" y="2279459"/>
+            <a:ext cx="7874261" cy="2673524"/>
+          </a:xfrm>
+          <a:prstGeom prst="rect">
+            <a:avLst/>
+          </a:prstGeom>
+        </p:spPr>
+      </p:pic>
+    </p:spTree>
+    <p:extLst>
+      <p:ext uri="{BB962C8B-B14F-4D97-AF65-F5344CB8AC3E}">
+        <p14:creationId xmlns:p14="http://schemas.microsoft.com/office/powerpoint/2010/main" val="4208995098"/>
+      </p:ext>
+    </p:extLst>
+  </p:cSld>
+  <p:clrMapOvr>
+    <a:masterClrMapping/>
+  </p:clrMapOvr>
+</p:sld>
+</file>
+
+<file path=ppt/slides/slide11.xml><?xml version="1.0" encoding="utf-8"?>
+<p:sld xmlns:a="http://schemas.openxmlformats.org/drawingml/2006/main" xmlns:r="http://schemas.openxmlformats.org/officeDocument/2006/relationships" xmlns:p="http://schemas.openxmlformats.org/presentationml/2006/main">
+  <p:cSld>
+    <p:spTree>
+      <p:nvGrpSpPr>
+        <p:cNvPr id="1" name=""/>
+        <p:cNvGrpSpPr/>
+        <p:nvPr/>
+      </p:nvGrpSpPr>
+      <p:grpSpPr>
+        <a:xfrm>
+          <a:off x="0" y="0"/>
+          <a:ext cx="0" cy="0"/>
+          <a:chOff x="0" y="0"/>
+          <a:chExt cx="0" cy="0"/>
+        </a:xfrm>
+      </p:grpSpPr>
+      <p:sp>
+        <p:nvSpPr>
+          <p:cNvPr id="4" name="テキスト ボックス 3">
+            <a:extLst>
+              <a:ext uri="{FF2B5EF4-FFF2-40B4-BE49-F238E27FC236}">
+                <a16:creationId xmlns:a16="http://schemas.microsoft.com/office/drawing/2014/main" id="{5A13BF46-B8C5-48AA-8308-C9ECFF431A18}"/>
+              </a:ext>
+            </a:extLst>
+          </p:cNvPr>
+          <p:cNvSpPr txBox="1"/>
+          <p:nvPr/>
+        </p:nvSpPr>
+        <p:spPr>
+          <a:xfrm>
+            <a:off x="567542" y="491954"/>
+            <a:ext cx="3057247" cy="584775"/>
+          </a:xfrm>
+          <a:prstGeom prst="rect">
+            <a:avLst/>
+          </a:prstGeom>
+          <a:noFill/>
+        </p:spPr>
+        <p:txBody>
+          <a:bodyPr wrap="none" rtlCol="0">
+            <a:spAutoFit/>
+          </a:bodyPr>
+          <a:lstStyle/>
+          <a:p>
+            <a:r>
+              <a:rPr kumimoji="1" lang="ja-JP" altLang="en-US" sz="3200" b="1" u="sng" dirty="0"/>
+              <a:t>アニメーション</a:t>
+            </a:r>
+            <a:endParaRPr kumimoji="1" lang="en-US" altLang="ja-JP" sz="3200" b="1" u="sng" dirty="0"/>
+          </a:p>
+        </p:txBody>
+      </p:sp>
+      <p:sp>
+        <p:nvSpPr>
+          <p:cNvPr id="6" name="テキスト ボックス 5">
+            <a:extLst>
+              <a:ext uri="{FF2B5EF4-FFF2-40B4-BE49-F238E27FC236}">
+                <a16:creationId xmlns:a16="http://schemas.microsoft.com/office/drawing/2014/main" id="{55830AD6-028B-4C4E-80BF-B70DFC1C3A46}"/>
+              </a:ext>
+            </a:extLst>
+          </p:cNvPr>
+          <p:cNvSpPr txBox="1"/>
+          <p:nvPr/>
+        </p:nvSpPr>
+        <p:spPr>
+          <a:xfrm>
+            <a:off x="567542" y="1216429"/>
+            <a:ext cx="7879080" cy="461665"/>
+          </a:xfrm>
+          <a:prstGeom prst="rect">
+            <a:avLst/>
+          </a:prstGeom>
+          <a:noFill/>
+        </p:spPr>
+        <p:txBody>
+          <a:bodyPr wrap="none" rtlCol="0">
+            <a:spAutoFit/>
+          </a:bodyPr>
+          <a:lstStyle/>
+          <a:p>
+            <a:r>
+              <a:rPr kumimoji="1" lang="ja-JP" altLang="en-US" sz="2400" dirty="0"/>
+              <a:t>移動や押し出しを使って左腕のボーンを作りましょう。</a:t>
+            </a:r>
+            <a:endParaRPr kumimoji="1" lang="en-US" altLang="ja-JP" sz="2400" dirty="0"/>
+          </a:p>
+        </p:txBody>
+      </p:sp>
+      <p:pic>
+        <p:nvPicPr>
+          <p:cNvPr id="3" name="図 2">
+            <a:extLst>
+              <a:ext uri="{FF2B5EF4-FFF2-40B4-BE49-F238E27FC236}">
+                <a16:creationId xmlns:a16="http://schemas.microsoft.com/office/drawing/2014/main" id="{1A7260F7-6629-4BD4-BE1B-EBE46F5B5873}"/>
+              </a:ext>
+            </a:extLst>
+          </p:cNvPr>
+          <p:cNvPicPr>
+            <a:picLocks noChangeAspect="1"/>
+          </p:cNvPicPr>
+          <p:nvPr/>
+        </p:nvPicPr>
+        <p:blipFill>
+          <a:blip r:embed="rId2"/>
+          <a:stretch>
+            <a:fillRect/>
+          </a:stretch>
+        </p:blipFill>
+        <p:spPr>
+          <a:xfrm>
+            <a:off x="567542" y="1817794"/>
+            <a:ext cx="4220158" cy="4627830"/>
+          </a:xfrm>
+          <a:prstGeom prst="rect">
+            <a:avLst/>
+          </a:prstGeom>
+        </p:spPr>
+      </p:pic>
+    </p:spTree>
+    <p:extLst>
+      <p:ext uri="{BB962C8B-B14F-4D97-AF65-F5344CB8AC3E}">
+        <p14:creationId xmlns:p14="http://schemas.microsoft.com/office/powerpoint/2010/main" val="3871703550"/>
+      </p:ext>
+    </p:extLst>
+  </p:cSld>
+  <p:clrMapOvr>
+    <a:masterClrMapping/>
+  </p:clrMapOvr>
+</p:sld>
+</file>
+
+<file path=ppt/slides/slide12.xml><?xml version="1.0" encoding="utf-8"?>
+<p:sld xmlns:a="http://schemas.openxmlformats.org/drawingml/2006/main" xmlns:r="http://schemas.openxmlformats.org/officeDocument/2006/relationships" xmlns:p="http://schemas.openxmlformats.org/presentationml/2006/main">
+  <p:cSld>
+    <p:spTree>
+      <p:nvGrpSpPr>
+        <p:cNvPr id="1" name=""/>
+        <p:cNvGrpSpPr/>
+        <p:nvPr/>
+      </p:nvGrpSpPr>
+      <p:grpSpPr>
+        <a:xfrm>
+          <a:off x="0" y="0"/>
+          <a:ext cx="0" cy="0"/>
+          <a:chOff x="0" y="0"/>
+          <a:chExt cx="0" cy="0"/>
+        </a:xfrm>
+      </p:grpSpPr>
+      <p:sp>
+        <p:nvSpPr>
+          <p:cNvPr id="4" name="テキスト ボックス 3">
+            <a:extLst>
+              <a:ext uri="{FF2B5EF4-FFF2-40B4-BE49-F238E27FC236}">
+                <a16:creationId xmlns:a16="http://schemas.microsoft.com/office/drawing/2014/main" id="{5A13BF46-B8C5-48AA-8308-C9ECFF431A18}"/>
+              </a:ext>
+            </a:extLst>
+          </p:cNvPr>
+          <p:cNvSpPr txBox="1"/>
+          <p:nvPr/>
+        </p:nvSpPr>
+        <p:spPr>
+          <a:xfrm>
+            <a:off x="567542" y="491954"/>
+            <a:ext cx="3057247" cy="584775"/>
+          </a:xfrm>
+          <a:prstGeom prst="rect">
+            <a:avLst/>
+          </a:prstGeom>
+          <a:noFill/>
+        </p:spPr>
+        <p:txBody>
+          <a:bodyPr wrap="none" rtlCol="0">
+            <a:spAutoFit/>
+          </a:bodyPr>
+          <a:lstStyle/>
+          <a:p>
+            <a:r>
+              <a:rPr kumimoji="1" lang="ja-JP" altLang="en-US" sz="3200" b="1" u="sng" dirty="0"/>
+              <a:t>アニメーション</a:t>
+            </a:r>
+            <a:endParaRPr kumimoji="1" lang="en-US" altLang="ja-JP" sz="3200" b="1" u="sng" dirty="0"/>
+          </a:p>
+        </p:txBody>
+      </p:sp>
+      <p:sp>
+        <p:nvSpPr>
+          <p:cNvPr id="6" name="テキスト ボックス 5">
+            <a:extLst>
+              <a:ext uri="{FF2B5EF4-FFF2-40B4-BE49-F238E27FC236}">
+                <a16:creationId xmlns:a16="http://schemas.microsoft.com/office/drawing/2014/main" id="{55830AD6-028B-4C4E-80BF-B70DFC1C3A46}"/>
+              </a:ext>
+            </a:extLst>
+          </p:cNvPr>
+          <p:cNvSpPr txBox="1"/>
+          <p:nvPr/>
+        </p:nvSpPr>
+        <p:spPr>
+          <a:xfrm>
+            <a:off x="567542" y="1216429"/>
+            <a:ext cx="5109091" cy="461665"/>
+          </a:xfrm>
+          <a:prstGeom prst="rect">
+            <a:avLst/>
+          </a:prstGeom>
+          <a:noFill/>
+        </p:spPr>
+        <p:txBody>
+          <a:bodyPr wrap="none" rtlCol="0">
+            <a:spAutoFit/>
+          </a:bodyPr>
+          <a:lstStyle/>
+          <a:p>
+            <a:r>
+              <a:rPr kumimoji="1" lang="ja-JP" altLang="en-US" sz="2400" dirty="0"/>
+              <a:t>左腕のボーンをすべて選択します。</a:t>
+            </a:r>
+            <a:endParaRPr kumimoji="1" lang="en-US" altLang="ja-JP" sz="2400" dirty="0"/>
+          </a:p>
+        </p:txBody>
+      </p:sp>
+      <p:pic>
+        <p:nvPicPr>
+          <p:cNvPr id="5" name="図 4">
+            <a:extLst>
+              <a:ext uri="{FF2B5EF4-FFF2-40B4-BE49-F238E27FC236}">
+                <a16:creationId xmlns:a16="http://schemas.microsoft.com/office/drawing/2014/main" id="{4599063C-7FA2-4303-8E9A-FD0F2D890625}"/>
+              </a:ext>
+            </a:extLst>
+          </p:cNvPr>
+          <p:cNvPicPr>
+            <a:picLocks noChangeAspect="1"/>
+          </p:cNvPicPr>
+          <p:nvPr/>
+        </p:nvPicPr>
+        <p:blipFill>
+          <a:blip r:embed="rId2"/>
+          <a:stretch>
+            <a:fillRect/>
+          </a:stretch>
+        </p:blipFill>
+        <p:spPr>
+          <a:xfrm>
+            <a:off x="567543" y="1817794"/>
+            <a:ext cx="3311974" cy="4475430"/>
+          </a:xfrm>
+          <a:prstGeom prst="rect">
+            <a:avLst/>
+          </a:prstGeom>
+        </p:spPr>
+      </p:pic>
+    </p:spTree>
+    <p:extLst>
+      <p:ext uri="{BB962C8B-B14F-4D97-AF65-F5344CB8AC3E}">
+        <p14:creationId xmlns:p14="http://schemas.microsoft.com/office/powerpoint/2010/main" val="1991985174"/>
+      </p:ext>
+    </p:extLst>
+  </p:cSld>
+  <p:clrMapOvr>
+    <a:masterClrMapping/>
+  </p:clrMapOvr>
+</p:sld>
+</file>
+
+<file path=ppt/slides/slide13.xml><?xml version="1.0" encoding="utf-8"?>
+<p:sld xmlns:a="http://schemas.openxmlformats.org/drawingml/2006/main" xmlns:r="http://schemas.openxmlformats.org/officeDocument/2006/relationships" xmlns:p="http://schemas.openxmlformats.org/presentationml/2006/main">
+  <p:cSld>
+    <p:spTree>
+      <p:nvGrpSpPr>
+        <p:cNvPr id="1" name=""/>
+        <p:cNvGrpSpPr/>
+        <p:nvPr/>
+      </p:nvGrpSpPr>
+      <p:grpSpPr>
+        <a:xfrm>
+          <a:off x="0" y="0"/>
+          <a:ext cx="0" cy="0"/>
+          <a:chOff x="0" y="0"/>
+          <a:chExt cx="0" cy="0"/>
+        </a:xfrm>
+      </p:grpSpPr>
+      <p:sp>
+        <p:nvSpPr>
+          <p:cNvPr id="4" name="テキスト ボックス 3">
+            <a:extLst>
+              <a:ext uri="{FF2B5EF4-FFF2-40B4-BE49-F238E27FC236}">
+                <a16:creationId xmlns:a16="http://schemas.microsoft.com/office/drawing/2014/main" id="{5A13BF46-B8C5-48AA-8308-C9ECFF431A18}"/>
+              </a:ext>
+            </a:extLst>
+          </p:cNvPr>
+          <p:cNvSpPr txBox="1"/>
+          <p:nvPr/>
+        </p:nvSpPr>
+        <p:spPr>
+          <a:xfrm>
+            <a:off x="567542" y="491954"/>
+            <a:ext cx="3057247" cy="584775"/>
+          </a:xfrm>
+          <a:prstGeom prst="rect">
+            <a:avLst/>
+          </a:prstGeom>
+          <a:noFill/>
+        </p:spPr>
+        <p:txBody>
+          <a:bodyPr wrap="none" rtlCol="0">
+            <a:spAutoFit/>
+          </a:bodyPr>
+          <a:lstStyle/>
+          <a:p>
+            <a:r>
+              <a:rPr kumimoji="1" lang="ja-JP" altLang="en-US" sz="3200" b="1" u="sng" dirty="0"/>
+              <a:t>アニメーション</a:t>
+            </a:r>
+            <a:endParaRPr kumimoji="1" lang="en-US" altLang="ja-JP" sz="3200" b="1" u="sng" dirty="0"/>
+          </a:p>
+        </p:txBody>
+      </p:sp>
+      <p:sp>
+        <p:nvSpPr>
+          <p:cNvPr id="6" name="テキスト ボックス 5">
+            <a:extLst>
+              <a:ext uri="{FF2B5EF4-FFF2-40B4-BE49-F238E27FC236}">
+                <a16:creationId xmlns:a16="http://schemas.microsoft.com/office/drawing/2014/main" id="{55830AD6-028B-4C4E-80BF-B70DFC1C3A46}"/>
+              </a:ext>
+            </a:extLst>
+          </p:cNvPr>
+          <p:cNvSpPr txBox="1"/>
+          <p:nvPr/>
+        </p:nvSpPr>
+        <p:spPr>
+          <a:xfrm>
+            <a:off x="567542" y="1216429"/>
+            <a:ext cx="10033516" cy="461665"/>
+          </a:xfrm>
+          <a:prstGeom prst="rect">
+            <a:avLst/>
+          </a:prstGeom>
+          <a:noFill/>
+        </p:spPr>
+        <p:txBody>
+          <a:bodyPr wrap="none" rtlCol="0">
+            <a:spAutoFit/>
+          </a:bodyPr>
+          <a:lstStyle/>
+          <a:p>
+            <a:r>
+              <a:rPr kumimoji="1" lang="ja-JP" altLang="en-US" sz="2400" dirty="0"/>
+              <a:t>「</a:t>
+            </a:r>
+            <a:r>
+              <a:rPr kumimoji="1" lang="ja-JP" altLang="en-US" sz="2400" b="1" dirty="0">
+                <a:solidFill>
+                  <a:srgbClr val="FF0000"/>
+                </a:solidFill>
+              </a:rPr>
+              <a:t>アーマチュア　＞　名前　＞　自動ネーム（左右）</a:t>
+            </a:r>
+            <a:r>
+              <a:rPr kumimoji="1" lang="ja-JP" altLang="en-US" sz="2400" dirty="0"/>
+              <a:t>」を選択します。</a:t>
+            </a:r>
+            <a:endParaRPr kumimoji="1" lang="en-US" altLang="ja-JP" sz="2400" dirty="0"/>
+          </a:p>
+        </p:txBody>
+      </p:sp>
+      <p:pic>
+        <p:nvPicPr>
+          <p:cNvPr id="3" name="図 2">
+            <a:extLst>
+              <a:ext uri="{FF2B5EF4-FFF2-40B4-BE49-F238E27FC236}">
+                <a16:creationId xmlns:a16="http://schemas.microsoft.com/office/drawing/2014/main" id="{E3057C8D-6E62-4235-BEA6-75302AEBBC22}"/>
+              </a:ext>
+            </a:extLst>
+          </p:cNvPr>
+          <p:cNvPicPr>
+            <a:picLocks noChangeAspect="1"/>
+          </p:cNvPicPr>
+          <p:nvPr/>
+        </p:nvPicPr>
+        <p:blipFill>
+          <a:blip r:embed="rId2"/>
+          <a:stretch>
+            <a:fillRect/>
+          </a:stretch>
+        </p:blipFill>
+        <p:spPr>
+          <a:xfrm>
+            <a:off x="567542" y="1817794"/>
+            <a:ext cx="8211694" cy="4563111"/>
+          </a:xfrm>
+          <a:prstGeom prst="rect">
+            <a:avLst/>
+          </a:prstGeom>
+        </p:spPr>
+      </p:pic>
+    </p:spTree>
+    <p:extLst>
+      <p:ext uri="{BB962C8B-B14F-4D97-AF65-F5344CB8AC3E}">
+        <p14:creationId xmlns:p14="http://schemas.microsoft.com/office/powerpoint/2010/main" val="3806095849"/>
+      </p:ext>
+    </p:extLst>
+  </p:cSld>
+  <p:clrMapOvr>
+    <a:masterClrMapping/>
+  </p:clrMapOvr>
+</p:sld>
+</file>
+
+<file path=ppt/slides/slide14.xml><?xml version="1.0" encoding="utf-8"?>
+<p:sld xmlns:a="http://schemas.openxmlformats.org/drawingml/2006/main" xmlns:r="http://schemas.openxmlformats.org/officeDocument/2006/relationships" xmlns:p="http://schemas.openxmlformats.org/presentationml/2006/main">
+  <p:cSld>
+    <p:spTree>
+      <p:nvGrpSpPr>
+        <p:cNvPr id="1" name=""/>
+        <p:cNvGrpSpPr/>
+        <p:nvPr/>
+      </p:nvGrpSpPr>
+      <p:grpSpPr>
+        <a:xfrm>
+          <a:off x="0" y="0"/>
+          <a:ext cx="0" cy="0"/>
+          <a:chOff x="0" y="0"/>
+          <a:chExt cx="0" cy="0"/>
+        </a:xfrm>
+      </p:grpSpPr>
+      <p:sp>
+        <p:nvSpPr>
+          <p:cNvPr id="4" name="テキスト ボックス 3">
+            <a:extLst>
+              <a:ext uri="{FF2B5EF4-FFF2-40B4-BE49-F238E27FC236}">
+                <a16:creationId xmlns:a16="http://schemas.microsoft.com/office/drawing/2014/main" id="{5A13BF46-B8C5-48AA-8308-C9ECFF431A18}"/>
+              </a:ext>
+            </a:extLst>
+          </p:cNvPr>
+          <p:cNvSpPr txBox="1"/>
+          <p:nvPr/>
+        </p:nvSpPr>
+        <p:spPr>
+          <a:xfrm>
+            <a:off x="567542" y="491954"/>
+            <a:ext cx="3057247" cy="584775"/>
+          </a:xfrm>
+          <a:prstGeom prst="rect">
+            <a:avLst/>
+          </a:prstGeom>
+          <a:noFill/>
+        </p:spPr>
+        <p:txBody>
+          <a:bodyPr wrap="none" rtlCol="0">
+            <a:spAutoFit/>
+          </a:bodyPr>
+          <a:lstStyle/>
+          <a:p>
+            <a:r>
+              <a:rPr kumimoji="1" lang="ja-JP" altLang="en-US" sz="3200" b="1" u="sng" dirty="0"/>
+              <a:t>アニメーション</a:t>
+            </a:r>
+            <a:endParaRPr kumimoji="1" lang="en-US" altLang="ja-JP" sz="3200" b="1" u="sng" dirty="0"/>
+          </a:p>
+        </p:txBody>
+      </p:sp>
+      <p:sp>
+        <p:nvSpPr>
+          <p:cNvPr id="6" name="テキスト ボックス 5">
+            <a:extLst>
+              <a:ext uri="{FF2B5EF4-FFF2-40B4-BE49-F238E27FC236}">
+                <a16:creationId xmlns:a16="http://schemas.microsoft.com/office/drawing/2014/main" id="{55830AD6-028B-4C4E-80BF-B70DFC1C3A46}"/>
+              </a:ext>
+            </a:extLst>
+          </p:cNvPr>
+          <p:cNvSpPr txBox="1"/>
+          <p:nvPr/>
+        </p:nvSpPr>
+        <p:spPr>
+          <a:xfrm>
+            <a:off x="567542" y="1216429"/>
+            <a:ext cx="9374682" cy="830997"/>
+          </a:xfrm>
+          <a:prstGeom prst="rect">
+            <a:avLst/>
+          </a:prstGeom>
+          <a:noFill/>
+        </p:spPr>
+        <p:txBody>
+          <a:bodyPr wrap="none" rtlCol="0">
+            <a:spAutoFit/>
+          </a:bodyPr>
+          <a:lstStyle/>
+          <a:p>
+            <a:r>
+              <a:rPr kumimoji="1" lang="ja-JP" altLang="en-US" sz="2400" dirty="0"/>
+              <a:t>ボーンの名前に「</a:t>
+            </a:r>
+            <a:r>
+              <a:rPr kumimoji="1" lang="en-US" altLang="ja-JP" sz="2400" dirty="0"/>
+              <a:t>.R</a:t>
+            </a:r>
+            <a:r>
+              <a:rPr kumimoji="1" lang="ja-JP" altLang="en-US" sz="2400" dirty="0"/>
+              <a:t>」が追加されます。</a:t>
+            </a:r>
+            <a:endParaRPr lang="en-US" altLang="ja-JP" sz="2400" dirty="0"/>
+          </a:p>
+          <a:p>
+            <a:r>
+              <a:rPr kumimoji="1" lang="ja-JP" altLang="en-US" sz="2400" dirty="0"/>
+              <a:t>今回は左腕なのでボーン名を反転させ、「</a:t>
+            </a:r>
+            <a:r>
+              <a:rPr kumimoji="1" lang="en-US" altLang="ja-JP" sz="2400" dirty="0"/>
+              <a:t>.L</a:t>
+            </a:r>
+            <a:r>
+              <a:rPr kumimoji="1" lang="ja-JP" altLang="en-US" sz="2400" dirty="0"/>
+              <a:t>」に反転しましょう。</a:t>
+            </a:r>
+            <a:endParaRPr kumimoji="1" lang="en-US" altLang="ja-JP" sz="2400" dirty="0"/>
+          </a:p>
+        </p:txBody>
+      </p:sp>
+      <p:pic>
+        <p:nvPicPr>
+          <p:cNvPr id="5" name="図 4">
+            <a:extLst>
+              <a:ext uri="{FF2B5EF4-FFF2-40B4-BE49-F238E27FC236}">
+                <a16:creationId xmlns:a16="http://schemas.microsoft.com/office/drawing/2014/main" id="{67CC557D-6CB0-4D98-988F-AB53615F7323}"/>
+              </a:ext>
+            </a:extLst>
+          </p:cNvPr>
+          <p:cNvPicPr>
+            <a:picLocks noChangeAspect="1"/>
+          </p:cNvPicPr>
+          <p:nvPr/>
+        </p:nvPicPr>
+        <p:blipFill>
+          <a:blip r:embed="rId2"/>
+          <a:stretch>
+            <a:fillRect/>
+          </a:stretch>
+        </p:blipFill>
+        <p:spPr>
+          <a:xfrm>
+            <a:off x="567542" y="2187126"/>
+            <a:ext cx="2794223" cy="2736355"/>
+          </a:xfrm>
+          <a:prstGeom prst="rect">
+            <a:avLst/>
+          </a:prstGeom>
+        </p:spPr>
+      </p:pic>
+      <p:pic>
+        <p:nvPicPr>
+          <p:cNvPr id="8" name="図 7">
+            <a:extLst>
+              <a:ext uri="{FF2B5EF4-FFF2-40B4-BE49-F238E27FC236}">
+                <a16:creationId xmlns:a16="http://schemas.microsoft.com/office/drawing/2014/main" id="{98C8FC85-631D-4AA6-B942-4B9C49FFB715}"/>
+              </a:ext>
+            </a:extLst>
+          </p:cNvPr>
+          <p:cNvPicPr>
+            <a:picLocks noChangeAspect="1"/>
+          </p:cNvPicPr>
+          <p:nvPr/>
+        </p:nvPicPr>
+        <p:blipFill>
+          <a:blip r:embed="rId3"/>
+          <a:stretch>
+            <a:fillRect/>
+          </a:stretch>
+        </p:blipFill>
+        <p:spPr>
+          <a:xfrm>
+            <a:off x="3624789" y="2187126"/>
+            <a:ext cx="3971268" cy="1241874"/>
+          </a:xfrm>
+          <a:prstGeom prst="rect">
+            <a:avLst/>
+          </a:prstGeom>
+        </p:spPr>
+      </p:pic>
+      <p:pic>
+        <p:nvPicPr>
+          <p:cNvPr id="10" name="図 9">
+            <a:extLst>
+              <a:ext uri="{FF2B5EF4-FFF2-40B4-BE49-F238E27FC236}">
+                <a16:creationId xmlns:a16="http://schemas.microsoft.com/office/drawing/2014/main" id="{6748A34B-2BCE-4549-87C8-F47244E81DAE}"/>
+              </a:ext>
+            </a:extLst>
+          </p:cNvPr>
+          <p:cNvPicPr>
+            <a:picLocks noChangeAspect="1"/>
+          </p:cNvPicPr>
+          <p:nvPr/>
+        </p:nvPicPr>
+        <p:blipFill>
+          <a:blip r:embed="rId4"/>
+          <a:stretch>
+            <a:fillRect/>
+          </a:stretch>
+        </p:blipFill>
+        <p:spPr>
+          <a:xfrm>
+            <a:off x="7859082" y="2187126"/>
+            <a:ext cx="2728260" cy="2736355"/>
+          </a:xfrm>
+          <a:prstGeom prst="rect">
+            <a:avLst/>
+          </a:prstGeom>
+        </p:spPr>
+      </p:pic>
+    </p:spTree>
+    <p:extLst>
+      <p:ext uri="{BB962C8B-B14F-4D97-AF65-F5344CB8AC3E}">
+        <p14:creationId xmlns:p14="http://schemas.microsoft.com/office/powerpoint/2010/main" val="1041635523"/>
+      </p:ext>
+    </p:extLst>
+  </p:cSld>
+  <p:clrMapOvr>
+    <a:masterClrMapping/>
+  </p:clrMapOvr>
+</p:sld>
+</file>
+
+<file path=ppt/slides/slide15.xml><?xml version="1.0" encoding="utf-8"?>
+<p:sld xmlns:a="http://schemas.openxmlformats.org/drawingml/2006/main" xmlns:r="http://schemas.openxmlformats.org/officeDocument/2006/relationships" xmlns:p="http://schemas.openxmlformats.org/presentationml/2006/main">
+  <p:cSld>
+    <p:spTree>
+      <p:nvGrpSpPr>
+        <p:cNvPr id="1" name=""/>
+        <p:cNvGrpSpPr/>
+        <p:nvPr/>
+      </p:nvGrpSpPr>
+      <p:grpSpPr>
+        <a:xfrm>
+          <a:off x="0" y="0"/>
+          <a:ext cx="0" cy="0"/>
+          <a:chOff x="0" y="0"/>
+          <a:chExt cx="0" cy="0"/>
+        </a:xfrm>
+      </p:grpSpPr>
+      <p:sp>
+        <p:nvSpPr>
+          <p:cNvPr id="4" name="テキスト ボックス 3">
+            <a:extLst>
+              <a:ext uri="{FF2B5EF4-FFF2-40B4-BE49-F238E27FC236}">
+                <a16:creationId xmlns:a16="http://schemas.microsoft.com/office/drawing/2014/main" id="{5A13BF46-B8C5-48AA-8308-C9ECFF431A18}"/>
+              </a:ext>
+            </a:extLst>
+          </p:cNvPr>
+          <p:cNvSpPr txBox="1"/>
+          <p:nvPr/>
+        </p:nvSpPr>
+        <p:spPr>
+          <a:xfrm>
+            <a:off x="567542" y="491954"/>
+            <a:ext cx="3057247" cy="584775"/>
+          </a:xfrm>
+          <a:prstGeom prst="rect">
+            <a:avLst/>
+          </a:prstGeom>
+          <a:noFill/>
+        </p:spPr>
+        <p:txBody>
+          <a:bodyPr wrap="none" rtlCol="0">
+            <a:spAutoFit/>
+          </a:bodyPr>
+          <a:lstStyle/>
+          <a:p>
+            <a:r>
+              <a:rPr kumimoji="1" lang="ja-JP" altLang="en-US" sz="3200" b="1" u="sng" dirty="0"/>
+              <a:t>アニメーション</a:t>
+            </a:r>
+            <a:endParaRPr kumimoji="1" lang="en-US" altLang="ja-JP" sz="3200" b="1" u="sng" dirty="0"/>
+          </a:p>
+        </p:txBody>
+      </p:sp>
+      <p:sp>
+        <p:nvSpPr>
+          <p:cNvPr id="6" name="テキスト ボックス 5">
+            <a:extLst>
+              <a:ext uri="{FF2B5EF4-FFF2-40B4-BE49-F238E27FC236}">
+                <a16:creationId xmlns:a16="http://schemas.microsoft.com/office/drawing/2014/main" id="{55830AD6-028B-4C4E-80BF-B70DFC1C3A46}"/>
+              </a:ext>
+            </a:extLst>
+          </p:cNvPr>
+          <p:cNvSpPr txBox="1"/>
+          <p:nvPr/>
+        </p:nvSpPr>
+        <p:spPr>
+          <a:xfrm>
+            <a:off x="567542" y="1216429"/>
+            <a:ext cx="8186857" cy="830997"/>
+          </a:xfrm>
+          <a:prstGeom prst="rect">
+            <a:avLst/>
+          </a:prstGeom>
+          <a:noFill/>
+        </p:spPr>
+        <p:txBody>
+          <a:bodyPr wrap="none" rtlCol="0">
+            <a:spAutoFit/>
+          </a:bodyPr>
+          <a:lstStyle/>
+          <a:p>
+            <a:r>
+              <a:rPr kumimoji="1" lang="ja-JP" altLang="en-US" sz="2400" dirty="0"/>
+              <a:t>この状態で「</a:t>
+            </a:r>
+            <a:r>
+              <a:rPr kumimoji="1" lang="ja-JP" altLang="en-US" sz="2400" b="1" dirty="0">
+                <a:solidFill>
+                  <a:srgbClr val="FF0000"/>
+                </a:solidFill>
+              </a:rPr>
+              <a:t>アーマチュア　＞　対称化</a:t>
+            </a:r>
+            <a:r>
+              <a:rPr kumimoji="1" lang="ja-JP" altLang="en-US" sz="2400" dirty="0"/>
+              <a:t>」を選択すると、</a:t>
+            </a:r>
+            <a:endParaRPr kumimoji="1" lang="en-US" altLang="ja-JP" sz="2400" dirty="0"/>
+          </a:p>
+          <a:p>
+            <a:r>
+              <a:rPr lang="ja-JP" altLang="en-US" sz="2400" dirty="0"/>
+              <a:t>左右対称のボーンが即座に作られます。</a:t>
+            </a:r>
+            <a:endParaRPr kumimoji="1" lang="en-US" altLang="ja-JP" sz="2400" dirty="0"/>
+          </a:p>
+        </p:txBody>
+      </p:sp>
+      <p:pic>
+        <p:nvPicPr>
+          <p:cNvPr id="3" name="図 2">
+            <a:extLst>
+              <a:ext uri="{FF2B5EF4-FFF2-40B4-BE49-F238E27FC236}">
+                <a16:creationId xmlns:a16="http://schemas.microsoft.com/office/drawing/2014/main" id="{C3FDD913-C5FB-4647-A12B-C4C5DB3FCE8A}"/>
+              </a:ext>
+            </a:extLst>
+          </p:cNvPr>
+          <p:cNvPicPr>
+            <a:picLocks noChangeAspect="1"/>
+          </p:cNvPicPr>
+          <p:nvPr/>
+        </p:nvPicPr>
+        <p:blipFill>
+          <a:blip r:embed="rId2"/>
+          <a:stretch>
+            <a:fillRect/>
+          </a:stretch>
+        </p:blipFill>
+        <p:spPr>
+          <a:xfrm>
+            <a:off x="567542" y="2187126"/>
+            <a:ext cx="4939857" cy="4276427"/>
+          </a:xfrm>
+          <a:prstGeom prst="rect">
+            <a:avLst/>
+          </a:prstGeom>
+        </p:spPr>
+      </p:pic>
+      <p:pic>
+        <p:nvPicPr>
+          <p:cNvPr id="8" name="図 7">
+            <a:extLst>
+              <a:ext uri="{FF2B5EF4-FFF2-40B4-BE49-F238E27FC236}">
+                <a16:creationId xmlns:a16="http://schemas.microsoft.com/office/drawing/2014/main" id="{2ACC9192-14DE-4F79-9CB8-CACFCF6EC0A5}"/>
+              </a:ext>
+            </a:extLst>
+          </p:cNvPr>
+          <p:cNvPicPr>
+            <a:picLocks noChangeAspect="1"/>
+          </p:cNvPicPr>
+          <p:nvPr/>
+        </p:nvPicPr>
+        <p:blipFill>
+          <a:blip r:embed="rId3"/>
+          <a:stretch>
+            <a:fillRect/>
+          </a:stretch>
+        </p:blipFill>
+        <p:spPr>
+          <a:xfrm>
+            <a:off x="5838783" y="2187127"/>
+            <a:ext cx="3072135" cy="4281986"/>
+          </a:xfrm>
+          <a:prstGeom prst="rect">
+            <a:avLst/>
+          </a:prstGeom>
+        </p:spPr>
+      </p:pic>
+    </p:spTree>
+    <p:extLst>
+      <p:ext uri="{BB962C8B-B14F-4D97-AF65-F5344CB8AC3E}">
+        <p14:creationId xmlns:p14="http://schemas.microsoft.com/office/powerpoint/2010/main" val="3334706172"/>
+      </p:ext>
+    </p:extLst>
+  </p:cSld>
+  <p:clrMapOvr>
+    <a:masterClrMapping/>
+  </p:clrMapOvr>
+</p:sld>
+</file>
+
+<file path=ppt/slides/slide16.xml><?xml version="1.0" encoding="utf-8"?>
+<p:sld xmlns:a="http://schemas.openxmlformats.org/drawingml/2006/main" xmlns:r="http://schemas.openxmlformats.org/officeDocument/2006/relationships" xmlns:p="http://schemas.openxmlformats.org/presentationml/2006/main">
+  <p:cSld>
+    <p:spTree>
+      <p:nvGrpSpPr>
+        <p:cNvPr id="1" name=""/>
+        <p:cNvGrpSpPr/>
+        <p:nvPr/>
+      </p:nvGrpSpPr>
+      <p:grpSpPr>
+        <a:xfrm>
+          <a:off x="0" y="0"/>
+          <a:ext cx="0" cy="0"/>
+          <a:chOff x="0" y="0"/>
+          <a:chExt cx="0" cy="0"/>
+        </a:xfrm>
+      </p:grpSpPr>
+      <p:sp>
+        <p:nvSpPr>
+          <p:cNvPr id="4" name="テキスト ボックス 3">
+            <a:extLst>
+              <a:ext uri="{FF2B5EF4-FFF2-40B4-BE49-F238E27FC236}">
+                <a16:creationId xmlns:a16="http://schemas.microsoft.com/office/drawing/2014/main" id="{5A13BF46-B8C5-48AA-8308-C9ECFF431A18}"/>
+              </a:ext>
+            </a:extLst>
+          </p:cNvPr>
+          <p:cNvSpPr txBox="1"/>
+          <p:nvPr/>
+        </p:nvSpPr>
+        <p:spPr>
+          <a:xfrm>
+            <a:off x="567542" y="491954"/>
+            <a:ext cx="3057247" cy="584775"/>
+          </a:xfrm>
+          <a:prstGeom prst="rect">
+            <a:avLst/>
+          </a:prstGeom>
+          <a:noFill/>
+        </p:spPr>
+        <p:txBody>
+          <a:bodyPr wrap="none" rtlCol="0">
+            <a:spAutoFit/>
+          </a:bodyPr>
+          <a:lstStyle/>
+          <a:p>
+            <a:r>
+              <a:rPr kumimoji="1" lang="ja-JP" altLang="en-US" sz="3200" b="1" u="sng" dirty="0"/>
+              <a:t>アニメーション</a:t>
+            </a:r>
+            <a:endParaRPr kumimoji="1" lang="en-US" altLang="ja-JP" sz="3200" b="1" u="sng" dirty="0"/>
+          </a:p>
+        </p:txBody>
+      </p:sp>
+      <p:sp>
+        <p:nvSpPr>
+          <p:cNvPr id="6" name="テキスト ボックス 5">
+            <a:extLst>
+              <a:ext uri="{FF2B5EF4-FFF2-40B4-BE49-F238E27FC236}">
+                <a16:creationId xmlns:a16="http://schemas.microsoft.com/office/drawing/2014/main" id="{55830AD6-028B-4C4E-80BF-B70DFC1C3A46}"/>
+              </a:ext>
+            </a:extLst>
+          </p:cNvPr>
+          <p:cNvSpPr txBox="1"/>
+          <p:nvPr/>
+        </p:nvSpPr>
+        <p:spPr>
+          <a:xfrm>
+            <a:off x="567542" y="1216429"/>
+            <a:ext cx="7571303" cy="461665"/>
+          </a:xfrm>
+          <a:prstGeom prst="rect">
+            <a:avLst/>
+          </a:prstGeom>
+          <a:noFill/>
+        </p:spPr>
+        <p:txBody>
+          <a:bodyPr wrap="none" rtlCol="0">
+            <a:spAutoFit/>
+          </a:bodyPr>
+          <a:lstStyle/>
+          <a:p>
+            <a:r>
+              <a:rPr kumimoji="1" lang="ja-JP" altLang="en-US" sz="2400" dirty="0"/>
+              <a:t>以上を踏まえて以下のようにボーンを入れましょう。</a:t>
+            </a:r>
+            <a:endParaRPr kumimoji="1" lang="en-US" altLang="ja-JP" sz="2400" dirty="0"/>
+          </a:p>
+        </p:txBody>
+      </p:sp>
+      <p:pic>
+        <p:nvPicPr>
+          <p:cNvPr id="9" name="図 8">
+            <a:extLst>
+              <a:ext uri="{FF2B5EF4-FFF2-40B4-BE49-F238E27FC236}">
+                <a16:creationId xmlns:a16="http://schemas.microsoft.com/office/drawing/2014/main" id="{9B7F62E4-14AB-443D-9447-E8EC824167B2}"/>
+              </a:ext>
+            </a:extLst>
+          </p:cNvPr>
+          <p:cNvPicPr>
+            <a:picLocks noChangeAspect="1"/>
+          </p:cNvPicPr>
+          <p:nvPr/>
+        </p:nvPicPr>
+        <p:blipFill>
+          <a:blip r:embed="rId2"/>
+          <a:stretch>
+            <a:fillRect/>
+          </a:stretch>
+        </p:blipFill>
+        <p:spPr>
+          <a:xfrm>
+            <a:off x="567542" y="1817795"/>
+            <a:ext cx="3403823" cy="4438174"/>
+          </a:xfrm>
+          <a:prstGeom prst="rect">
+            <a:avLst/>
+          </a:prstGeom>
+        </p:spPr>
+      </p:pic>
+    </p:spTree>
+    <p:extLst>
+      <p:ext uri="{BB962C8B-B14F-4D97-AF65-F5344CB8AC3E}">
+        <p14:creationId xmlns:p14="http://schemas.microsoft.com/office/powerpoint/2010/main" val="3961356186"/>
+      </p:ext>
+    </p:extLst>
+  </p:cSld>
+  <p:clrMapOvr>
+    <a:masterClrMapping/>
+  </p:clrMapOvr>
+</p:sld>
+</file>
+
+<file path=ppt/slides/slide17.xml><?xml version="1.0" encoding="utf-8"?>
+<p:sld xmlns:a="http://schemas.openxmlformats.org/drawingml/2006/main" xmlns:r="http://schemas.openxmlformats.org/officeDocument/2006/relationships" xmlns:p="http://schemas.openxmlformats.org/presentationml/2006/main">
+  <p:cSld>
+    <p:spTree>
+      <p:nvGrpSpPr>
+        <p:cNvPr id="1" name=""/>
+        <p:cNvGrpSpPr/>
+        <p:nvPr/>
+      </p:nvGrpSpPr>
+      <p:grpSpPr>
+        <a:xfrm>
+          <a:off x="0" y="0"/>
+          <a:ext cx="0" cy="0"/>
+          <a:chOff x="0" y="0"/>
+          <a:chExt cx="0" cy="0"/>
+        </a:xfrm>
+      </p:grpSpPr>
+      <p:sp>
+        <p:nvSpPr>
+          <p:cNvPr id="4" name="テキスト ボックス 3">
+            <a:extLst>
+              <a:ext uri="{FF2B5EF4-FFF2-40B4-BE49-F238E27FC236}">
+                <a16:creationId xmlns:a16="http://schemas.microsoft.com/office/drawing/2014/main" id="{5A13BF46-B8C5-48AA-8308-C9ECFF431A18}"/>
+              </a:ext>
+            </a:extLst>
+          </p:cNvPr>
+          <p:cNvSpPr txBox="1"/>
+          <p:nvPr/>
+        </p:nvSpPr>
+        <p:spPr>
+          <a:xfrm>
+            <a:off x="567542" y="491954"/>
+            <a:ext cx="3057247" cy="584775"/>
+          </a:xfrm>
+          <a:prstGeom prst="rect">
+            <a:avLst/>
+          </a:prstGeom>
+          <a:noFill/>
+        </p:spPr>
+        <p:txBody>
+          <a:bodyPr wrap="none" rtlCol="0">
+            <a:spAutoFit/>
+          </a:bodyPr>
+          <a:lstStyle/>
+          <a:p>
+            <a:r>
+              <a:rPr kumimoji="1" lang="ja-JP" altLang="en-US" sz="3200" b="1" u="sng" dirty="0"/>
+              <a:t>アニメーション</a:t>
+            </a:r>
+            <a:endParaRPr kumimoji="1" lang="en-US" altLang="ja-JP" sz="3200" b="1" u="sng" dirty="0"/>
+          </a:p>
+        </p:txBody>
+      </p:sp>
+      <p:sp>
+        <p:nvSpPr>
+          <p:cNvPr id="6" name="テキスト ボックス 5">
+            <a:extLst>
+              <a:ext uri="{FF2B5EF4-FFF2-40B4-BE49-F238E27FC236}">
+                <a16:creationId xmlns:a16="http://schemas.microsoft.com/office/drawing/2014/main" id="{55830AD6-028B-4C4E-80BF-B70DFC1C3A46}"/>
+              </a:ext>
+            </a:extLst>
+          </p:cNvPr>
+          <p:cNvSpPr txBox="1"/>
+          <p:nvPr/>
+        </p:nvSpPr>
+        <p:spPr>
+          <a:xfrm>
+            <a:off x="567542" y="1216429"/>
+            <a:ext cx="9110186" cy="461665"/>
+          </a:xfrm>
+          <a:prstGeom prst="rect">
+            <a:avLst/>
+          </a:prstGeom>
+          <a:noFill/>
+        </p:spPr>
+        <p:txBody>
+          <a:bodyPr wrap="none" rtlCol="0">
+            <a:spAutoFit/>
+          </a:bodyPr>
+          <a:lstStyle/>
+          <a:p>
+            <a:r>
+              <a:rPr kumimoji="1" lang="ja-JP" altLang="en-US" sz="2400" dirty="0"/>
+              <a:t>オブジェクトモードに切り替えて、オブジェクトを選択します。</a:t>
+            </a:r>
+            <a:endParaRPr kumimoji="1" lang="en-US" altLang="ja-JP" sz="2400" dirty="0"/>
+          </a:p>
+        </p:txBody>
+      </p:sp>
+      <p:pic>
+        <p:nvPicPr>
+          <p:cNvPr id="3" name="図 2">
+            <a:extLst>
+              <a:ext uri="{FF2B5EF4-FFF2-40B4-BE49-F238E27FC236}">
+                <a16:creationId xmlns:a16="http://schemas.microsoft.com/office/drawing/2014/main" id="{A5BED88F-6C83-4849-ACE4-4266FF5B6D21}"/>
+              </a:ext>
+            </a:extLst>
+          </p:cNvPr>
+          <p:cNvPicPr>
+            <a:picLocks noChangeAspect="1"/>
+          </p:cNvPicPr>
+          <p:nvPr/>
+        </p:nvPicPr>
+        <p:blipFill>
+          <a:blip r:embed="rId2"/>
+          <a:stretch>
+            <a:fillRect/>
+          </a:stretch>
+        </p:blipFill>
+        <p:spPr>
+          <a:xfrm>
+            <a:off x="567543" y="1817794"/>
+            <a:ext cx="6076918" cy="4548252"/>
+          </a:xfrm>
+          <a:prstGeom prst="rect">
+            <a:avLst/>
+          </a:prstGeom>
+        </p:spPr>
+      </p:pic>
+      <p:sp>
+        <p:nvSpPr>
+          <p:cNvPr id="7" name="矢印: 右 6">
+            <a:extLst>
+              <a:ext uri="{FF2B5EF4-FFF2-40B4-BE49-F238E27FC236}">
+                <a16:creationId xmlns:a16="http://schemas.microsoft.com/office/drawing/2014/main" id="{4DCCB6BB-6886-4636-955C-A7EBB6F6B1B1}"/>
+              </a:ext>
+            </a:extLst>
+          </p:cNvPr>
+          <p:cNvSpPr/>
+          <p:nvPr/>
+        </p:nvSpPr>
+        <p:spPr>
+          <a:xfrm rot="13638340">
+            <a:off x="1350330" y="2129109"/>
+            <a:ext cx="502023" cy="349624"/>
+          </a:xfrm>
+          <a:prstGeom prst="rightArrow">
+            <a:avLst/>
+          </a:prstGeom>
+          <a:solidFill>
+            <a:srgbClr val="FF0000"/>
+          </a:solidFill>
+          <a:ln>
+            <a:solidFill>
+              <a:schemeClr val="tx1"/>
+            </a:solidFill>
+          </a:ln>
+        </p:spPr>
+        <p:style>
+          <a:lnRef idx="2">
+            <a:schemeClr val="accent1">
+              <a:shade val="50000"/>
+            </a:schemeClr>
+          </a:lnRef>
+          <a:fillRef idx="1">
+            <a:schemeClr val="accent1"/>
+          </a:fillRef>
+          <a:effectRef idx="0">
+            <a:schemeClr val="accent1"/>
+          </a:effectRef>
+          <a:fontRef idx="minor">
+            <a:schemeClr val="lt1"/>
+          </a:fontRef>
+        </p:style>
+        <p:txBody>
+          <a:bodyPr rtlCol="0" anchor="ctr"/>
+          <a:lstStyle/>
+          <a:p>
+            <a:pPr algn="ctr"/>
+            <a:endParaRPr kumimoji="1" lang="ja-JP" altLang="en-US"/>
+          </a:p>
+        </p:txBody>
+      </p:sp>
+    </p:spTree>
+    <p:extLst>
+      <p:ext uri="{BB962C8B-B14F-4D97-AF65-F5344CB8AC3E}">
+        <p14:creationId xmlns:p14="http://schemas.microsoft.com/office/powerpoint/2010/main" val="1647488701"/>
+      </p:ext>
+    </p:extLst>
+  </p:cSld>
+  <p:clrMapOvr>
+    <a:masterClrMapping/>
+  </p:clrMapOvr>
+</p:sld>
+</file>
+
+<file path=ppt/slides/slide18.xml><?xml version="1.0" encoding="utf-8"?>
+<p:sld xmlns:a="http://schemas.openxmlformats.org/drawingml/2006/main" xmlns:r="http://schemas.openxmlformats.org/officeDocument/2006/relationships" xmlns:p="http://schemas.openxmlformats.org/presentationml/2006/main">
+  <p:cSld>
+    <p:spTree>
+      <p:nvGrpSpPr>
+        <p:cNvPr id="1" name=""/>
+        <p:cNvGrpSpPr/>
+        <p:nvPr/>
+      </p:nvGrpSpPr>
+      <p:grpSpPr>
+        <a:xfrm>
+          <a:off x="0" y="0"/>
+          <a:ext cx="0" cy="0"/>
+          <a:chOff x="0" y="0"/>
+          <a:chExt cx="0" cy="0"/>
+        </a:xfrm>
+      </p:grpSpPr>
+      <p:sp>
+        <p:nvSpPr>
+          <p:cNvPr id="4" name="テキスト ボックス 3">
+            <a:extLst>
+              <a:ext uri="{FF2B5EF4-FFF2-40B4-BE49-F238E27FC236}">
+                <a16:creationId xmlns:a16="http://schemas.microsoft.com/office/drawing/2014/main" id="{5A13BF46-B8C5-48AA-8308-C9ECFF431A18}"/>
+              </a:ext>
+            </a:extLst>
+          </p:cNvPr>
+          <p:cNvSpPr txBox="1"/>
+          <p:nvPr/>
+        </p:nvSpPr>
+        <p:spPr>
+          <a:xfrm>
+            <a:off x="567542" y="491954"/>
+            <a:ext cx="3057247" cy="584775"/>
+          </a:xfrm>
+          <a:prstGeom prst="rect">
+            <a:avLst/>
+          </a:prstGeom>
+          <a:noFill/>
+        </p:spPr>
+        <p:txBody>
+          <a:bodyPr wrap="none" rtlCol="0">
+            <a:spAutoFit/>
+          </a:bodyPr>
+          <a:lstStyle/>
+          <a:p>
+            <a:r>
+              <a:rPr kumimoji="1" lang="ja-JP" altLang="en-US" sz="3200" b="1" u="sng" dirty="0"/>
+              <a:t>アニメーション</a:t>
+            </a:r>
+            <a:endParaRPr kumimoji="1" lang="en-US" altLang="ja-JP" sz="3200" b="1" u="sng" dirty="0"/>
+          </a:p>
+        </p:txBody>
+      </p:sp>
+      <p:sp>
+        <p:nvSpPr>
+          <p:cNvPr id="6" name="テキスト ボックス 5">
+            <a:extLst>
+              <a:ext uri="{FF2B5EF4-FFF2-40B4-BE49-F238E27FC236}">
+                <a16:creationId xmlns:a16="http://schemas.microsoft.com/office/drawing/2014/main" id="{55830AD6-028B-4C4E-80BF-B70DFC1C3A46}"/>
+              </a:ext>
+            </a:extLst>
+          </p:cNvPr>
+          <p:cNvSpPr txBox="1"/>
+          <p:nvPr/>
+        </p:nvSpPr>
+        <p:spPr>
+          <a:xfrm>
+            <a:off x="567542" y="1216429"/>
+            <a:ext cx="8691803" cy="461665"/>
+          </a:xfrm>
+          <a:prstGeom prst="rect">
+            <a:avLst/>
+          </a:prstGeom>
+          <a:noFill/>
+        </p:spPr>
+        <p:txBody>
+          <a:bodyPr wrap="none" rtlCol="0">
+            <a:spAutoFit/>
+          </a:bodyPr>
+          <a:lstStyle/>
+          <a:p>
+            <a:r>
+              <a:rPr kumimoji="1" lang="ja-JP" altLang="en-US" sz="2400" dirty="0"/>
+              <a:t>続いて </a:t>
+            </a:r>
+            <a:r>
+              <a:rPr kumimoji="1" lang="en-US" altLang="ja-JP" sz="2400" b="1" dirty="0">
+                <a:solidFill>
+                  <a:srgbClr val="FF0000"/>
+                </a:solidFill>
+              </a:rPr>
+              <a:t>Shift+</a:t>
+            </a:r>
+            <a:r>
+              <a:rPr kumimoji="1" lang="ja-JP" altLang="en-US" sz="2400" b="1" dirty="0">
+                <a:solidFill>
+                  <a:srgbClr val="FF0000"/>
+                </a:solidFill>
+              </a:rPr>
+              <a:t>クリック</a:t>
+            </a:r>
+            <a:r>
+              <a:rPr kumimoji="1" lang="ja-JP" altLang="en-US" sz="2400" dirty="0"/>
+              <a:t> でアーマチュアを同時選択します。</a:t>
+            </a:r>
+            <a:endParaRPr kumimoji="1" lang="en-US" altLang="ja-JP" sz="2400" dirty="0"/>
+          </a:p>
+        </p:txBody>
+      </p:sp>
+      <p:pic>
+        <p:nvPicPr>
+          <p:cNvPr id="5" name="図 4">
+            <a:extLst>
+              <a:ext uri="{FF2B5EF4-FFF2-40B4-BE49-F238E27FC236}">
+                <a16:creationId xmlns:a16="http://schemas.microsoft.com/office/drawing/2014/main" id="{9393E1DB-0BEB-4701-84D5-D4B927651F3E}"/>
+              </a:ext>
+            </a:extLst>
+          </p:cNvPr>
+          <p:cNvPicPr>
+            <a:picLocks noChangeAspect="1"/>
+          </p:cNvPicPr>
+          <p:nvPr/>
+        </p:nvPicPr>
+        <p:blipFill>
+          <a:blip r:embed="rId2"/>
+          <a:stretch>
+            <a:fillRect/>
+          </a:stretch>
+        </p:blipFill>
+        <p:spPr>
+          <a:xfrm>
+            <a:off x="567542" y="1817795"/>
+            <a:ext cx="3202571" cy="4548252"/>
+          </a:xfrm>
+          <a:prstGeom prst="rect">
+            <a:avLst/>
+          </a:prstGeom>
+        </p:spPr>
+      </p:pic>
+      <p:sp>
+        <p:nvSpPr>
+          <p:cNvPr id="8" name="テキスト ボックス 7">
+            <a:extLst>
+              <a:ext uri="{FF2B5EF4-FFF2-40B4-BE49-F238E27FC236}">
+                <a16:creationId xmlns:a16="http://schemas.microsoft.com/office/drawing/2014/main" id="{49205C25-CC07-48C4-B0C5-5E3147F14741}"/>
+              </a:ext>
+            </a:extLst>
+          </p:cNvPr>
+          <p:cNvSpPr txBox="1"/>
+          <p:nvPr/>
+        </p:nvSpPr>
+        <p:spPr>
+          <a:xfrm>
+            <a:off x="4021125" y="5535050"/>
+            <a:ext cx="7263527" cy="830997"/>
+          </a:xfrm>
+          <a:prstGeom prst="rect">
+            <a:avLst/>
+          </a:prstGeom>
+          <a:noFill/>
+        </p:spPr>
+        <p:txBody>
+          <a:bodyPr wrap="none" rtlCol="0">
+            <a:spAutoFit/>
+          </a:bodyPr>
+          <a:lstStyle/>
+          <a:p>
+            <a:r>
+              <a:rPr kumimoji="1" lang="en-US" altLang="ja-JP" sz="2400" b="1" dirty="0">
+                <a:solidFill>
+                  <a:srgbClr val="00B050"/>
+                </a:solidFill>
+              </a:rPr>
+              <a:t>MEMO</a:t>
+            </a:r>
+          </a:p>
+          <a:p>
+            <a:r>
+              <a:rPr lang="ja-JP" altLang="en-US" sz="2400" dirty="0"/>
+              <a:t>必ずオブジェクト→アーマチュアの順番であること</a:t>
+            </a:r>
+            <a:endParaRPr kumimoji="1" lang="en-US" altLang="ja-JP" sz="2400" dirty="0"/>
+          </a:p>
+        </p:txBody>
+      </p:sp>
+    </p:spTree>
+    <p:extLst>
+      <p:ext uri="{BB962C8B-B14F-4D97-AF65-F5344CB8AC3E}">
+        <p14:creationId xmlns:p14="http://schemas.microsoft.com/office/powerpoint/2010/main" val="2627419146"/>
+      </p:ext>
+    </p:extLst>
+  </p:cSld>
+  <p:clrMapOvr>
+    <a:masterClrMapping/>
+  </p:clrMapOvr>
+</p:sld>
+</file>
+
+<file path=ppt/slides/slide19.xml><?xml version="1.0" encoding="utf-8"?>
+<p:sld xmlns:a="http://schemas.openxmlformats.org/drawingml/2006/main" xmlns:r="http://schemas.openxmlformats.org/officeDocument/2006/relationships" xmlns:p="http://schemas.openxmlformats.org/presentationml/2006/main">
+  <p:cSld>
+    <p:spTree>
+      <p:nvGrpSpPr>
+        <p:cNvPr id="1" name=""/>
+        <p:cNvGrpSpPr/>
+        <p:nvPr/>
+      </p:nvGrpSpPr>
+      <p:grpSpPr>
+        <a:xfrm>
+          <a:off x="0" y="0"/>
+          <a:ext cx="0" cy="0"/>
+          <a:chOff x="0" y="0"/>
+          <a:chExt cx="0" cy="0"/>
+        </a:xfrm>
+      </p:grpSpPr>
+      <p:sp>
+        <p:nvSpPr>
+          <p:cNvPr id="4" name="テキスト ボックス 3">
+            <a:extLst>
+              <a:ext uri="{FF2B5EF4-FFF2-40B4-BE49-F238E27FC236}">
+                <a16:creationId xmlns:a16="http://schemas.microsoft.com/office/drawing/2014/main" id="{5A13BF46-B8C5-48AA-8308-C9ECFF431A18}"/>
+              </a:ext>
+            </a:extLst>
+          </p:cNvPr>
+          <p:cNvSpPr txBox="1"/>
+          <p:nvPr/>
+        </p:nvSpPr>
+        <p:spPr>
+          <a:xfrm>
+            <a:off x="567542" y="491954"/>
+            <a:ext cx="3057247" cy="584775"/>
+          </a:xfrm>
+          <a:prstGeom prst="rect">
+            <a:avLst/>
+          </a:prstGeom>
+          <a:noFill/>
+        </p:spPr>
+        <p:txBody>
+          <a:bodyPr wrap="none" rtlCol="0">
+            <a:spAutoFit/>
+          </a:bodyPr>
+          <a:lstStyle/>
+          <a:p>
+            <a:r>
+              <a:rPr kumimoji="1" lang="ja-JP" altLang="en-US" sz="3200" b="1" u="sng" dirty="0"/>
+              <a:t>アニメーション</a:t>
+            </a:r>
+            <a:endParaRPr kumimoji="1" lang="en-US" altLang="ja-JP" sz="3200" b="1" u="sng" dirty="0"/>
+          </a:p>
+        </p:txBody>
+      </p:sp>
+      <p:sp>
+        <p:nvSpPr>
+          <p:cNvPr id="6" name="テキスト ボックス 5">
+            <a:extLst>
+              <a:ext uri="{FF2B5EF4-FFF2-40B4-BE49-F238E27FC236}">
+                <a16:creationId xmlns:a16="http://schemas.microsoft.com/office/drawing/2014/main" id="{55830AD6-028B-4C4E-80BF-B70DFC1C3A46}"/>
+              </a:ext>
+            </a:extLst>
+          </p:cNvPr>
+          <p:cNvSpPr txBox="1"/>
+          <p:nvPr/>
+        </p:nvSpPr>
+        <p:spPr>
+          <a:xfrm>
+            <a:off x="567542" y="1216429"/>
+            <a:ext cx="10341293" cy="830997"/>
+          </a:xfrm>
+          <a:prstGeom prst="rect">
+            <a:avLst/>
+          </a:prstGeom>
+          <a:noFill/>
+        </p:spPr>
+        <p:txBody>
+          <a:bodyPr wrap="none" rtlCol="0">
+            <a:spAutoFit/>
+          </a:bodyPr>
+          <a:lstStyle/>
+          <a:p>
+            <a:r>
+              <a:rPr kumimoji="1" lang="ja-JP" altLang="en-US" sz="2400" dirty="0"/>
+              <a:t>「</a:t>
+            </a:r>
+            <a:r>
+              <a:rPr kumimoji="1" lang="ja-JP" altLang="en-US" sz="2400" b="1" dirty="0">
+                <a:solidFill>
+                  <a:srgbClr val="FF0000"/>
+                </a:solidFill>
+              </a:rPr>
+              <a:t>オブジェクト　＞　ペアレント　＞　自動ウェイトで</a:t>
+            </a:r>
+            <a:r>
+              <a:rPr kumimoji="1" lang="ja-JP" altLang="en-US" sz="2400" dirty="0"/>
+              <a:t>」を選択します。</a:t>
+            </a:r>
+            <a:endParaRPr kumimoji="1" lang="en-US" altLang="ja-JP" sz="2400" dirty="0"/>
+          </a:p>
+          <a:p>
+            <a:r>
+              <a:rPr lang="ja-JP" altLang="en-US" sz="2400" dirty="0"/>
+              <a:t>これで</a:t>
+            </a:r>
+            <a:r>
+              <a:rPr lang="ja-JP" altLang="en-US" sz="2400" b="1" dirty="0">
+                <a:solidFill>
+                  <a:srgbClr val="FF0000"/>
+                </a:solidFill>
+              </a:rPr>
+              <a:t>オブジェクトがボーンに合わせてついてくる</a:t>
+            </a:r>
+            <a:r>
+              <a:rPr lang="ja-JP" altLang="en-US" sz="2400" dirty="0"/>
+              <a:t>ようになります。</a:t>
+            </a:r>
+            <a:endParaRPr kumimoji="1" lang="en-US" altLang="ja-JP" sz="2400" dirty="0"/>
+          </a:p>
+        </p:txBody>
+      </p:sp>
+      <p:pic>
+        <p:nvPicPr>
+          <p:cNvPr id="3" name="図 2">
+            <a:extLst>
+              <a:ext uri="{FF2B5EF4-FFF2-40B4-BE49-F238E27FC236}">
+                <a16:creationId xmlns:a16="http://schemas.microsoft.com/office/drawing/2014/main" id="{CBE9AC08-BA55-4D11-A383-D84598D1A6B6}"/>
+              </a:ext>
+            </a:extLst>
+          </p:cNvPr>
+          <p:cNvPicPr>
+            <a:picLocks noChangeAspect="1"/>
+          </p:cNvPicPr>
+          <p:nvPr/>
+        </p:nvPicPr>
+        <p:blipFill>
+          <a:blip r:embed="rId2"/>
+          <a:stretch>
+            <a:fillRect/>
+          </a:stretch>
+        </p:blipFill>
+        <p:spPr>
+          <a:xfrm>
+            <a:off x="567542" y="2187126"/>
+            <a:ext cx="5772956" cy="4372585"/>
+          </a:xfrm>
+          <a:prstGeom prst="rect">
+            <a:avLst/>
+          </a:prstGeom>
+        </p:spPr>
+      </p:pic>
+    </p:spTree>
+    <p:extLst>
+      <p:ext uri="{BB962C8B-B14F-4D97-AF65-F5344CB8AC3E}">
+        <p14:creationId xmlns:p14="http://schemas.microsoft.com/office/powerpoint/2010/main" val="2275294198"/>
+      </p:ext>
+    </p:extLst>
+  </p:cSld>
+  <p:clrMapOvr>
+    <a:masterClrMapping/>
+  </p:clrMapOvr>
+</p:sld>
+</file>
+
+<file path=ppt/slides/slide2.xml><?xml version="1.0" encoding="utf-8"?>
+<p:sld xmlns:a="http://schemas.openxmlformats.org/drawingml/2006/main" xmlns:r="http://schemas.openxmlformats.org/officeDocument/2006/relationships" xmlns:p="http://schemas.openxmlformats.org/presentationml/2006/main">
+  <p:cSld>
+    <p:spTree>
+      <p:nvGrpSpPr>
+        <p:cNvPr id="1" name=""/>
+        <p:cNvGrpSpPr/>
+        <p:nvPr/>
+      </p:nvGrpSpPr>
+      <p:grpSpPr>
+        <a:xfrm>
+          <a:off x="0" y="0"/>
+          <a:ext cx="0" cy="0"/>
+          <a:chOff x="0" y="0"/>
+          <a:chExt cx="0" cy="0"/>
+        </a:xfrm>
+      </p:grpSpPr>
+      <p:sp>
+        <p:nvSpPr>
+          <p:cNvPr id="4" name="テキスト ボックス 3">
+            <a:extLst>
+              <a:ext uri="{FF2B5EF4-FFF2-40B4-BE49-F238E27FC236}">
+                <a16:creationId xmlns:a16="http://schemas.microsoft.com/office/drawing/2014/main" id="{5A13BF46-B8C5-48AA-8308-C9ECFF431A18}"/>
+              </a:ext>
+            </a:extLst>
+          </p:cNvPr>
+          <p:cNvSpPr txBox="1"/>
+          <p:nvPr/>
+        </p:nvSpPr>
+        <p:spPr>
+          <a:xfrm>
+            <a:off x="567542" y="491954"/>
+            <a:ext cx="3057247" cy="584775"/>
+          </a:xfrm>
+          <a:prstGeom prst="rect">
+            <a:avLst/>
+          </a:prstGeom>
+          <a:noFill/>
+        </p:spPr>
+        <p:txBody>
+          <a:bodyPr wrap="none" rtlCol="0">
+            <a:spAutoFit/>
+          </a:bodyPr>
+          <a:lstStyle/>
+          <a:p>
+            <a:r>
+              <a:rPr kumimoji="1" lang="ja-JP" altLang="en-US" sz="3200" b="1" u="sng" dirty="0"/>
+              <a:t>アニメーション</a:t>
+            </a:r>
+            <a:endParaRPr kumimoji="1" lang="en-US" altLang="ja-JP" sz="3200" b="1" u="sng" dirty="0"/>
+          </a:p>
+        </p:txBody>
+      </p:sp>
+      <p:sp>
+        <p:nvSpPr>
+          <p:cNvPr id="6" name="テキスト ボックス 5">
+            <a:extLst>
+              <a:ext uri="{FF2B5EF4-FFF2-40B4-BE49-F238E27FC236}">
+                <a16:creationId xmlns:a16="http://schemas.microsoft.com/office/drawing/2014/main" id="{55830AD6-028B-4C4E-80BF-B70DFC1C3A46}"/>
+              </a:ext>
+            </a:extLst>
+          </p:cNvPr>
+          <p:cNvSpPr txBox="1"/>
+          <p:nvPr/>
+        </p:nvSpPr>
+        <p:spPr>
+          <a:xfrm>
+            <a:off x="567542" y="1216429"/>
+            <a:ext cx="10649069" cy="461665"/>
+          </a:xfrm>
+          <a:prstGeom prst="rect">
+            <a:avLst/>
+          </a:prstGeom>
+          <a:noFill/>
+        </p:spPr>
+        <p:txBody>
+          <a:bodyPr wrap="none" rtlCol="0">
+            <a:spAutoFit/>
+          </a:bodyPr>
+          <a:lstStyle/>
+          <a:p>
+            <a:r>
+              <a:rPr kumimoji="1" lang="ja-JP" altLang="en-US" sz="2400" dirty="0"/>
+              <a:t>モデルにアニメーションさせるには</a:t>
+            </a:r>
+            <a:r>
+              <a:rPr kumimoji="1" lang="ja-JP" altLang="en-US" sz="2400" b="1" dirty="0">
+                <a:solidFill>
+                  <a:srgbClr val="FF0000"/>
+                </a:solidFill>
+              </a:rPr>
+              <a:t>ボーン（骨）</a:t>
+            </a:r>
+            <a:r>
+              <a:rPr kumimoji="1" lang="ja-JP" altLang="en-US" sz="2400" dirty="0"/>
+              <a:t>を入れる必要があります。</a:t>
+            </a:r>
+            <a:endParaRPr kumimoji="1" lang="en-US" altLang="ja-JP" sz="2400" dirty="0"/>
+          </a:p>
+        </p:txBody>
+      </p:sp>
+      <p:pic>
+        <p:nvPicPr>
+          <p:cNvPr id="5" name="図 4">
+            <a:extLst>
+              <a:ext uri="{FF2B5EF4-FFF2-40B4-BE49-F238E27FC236}">
+                <a16:creationId xmlns:a16="http://schemas.microsoft.com/office/drawing/2014/main" id="{5A25CBD8-0B62-4F5D-BFC1-8120C9459469}"/>
+              </a:ext>
+            </a:extLst>
+          </p:cNvPr>
+          <p:cNvPicPr>
+            <a:picLocks noChangeAspect="1"/>
+          </p:cNvPicPr>
+          <p:nvPr/>
+        </p:nvPicPr>
+        <p:blipFill>
+          <a:blip r:embed="rId2"/>
+          <a:stretch>
+            <a:fillRect/>
+          </a:stretch>
+        </p:blipFill>
+        <p:spPr>
+          <a:xfrm>
+            <a:off x="567543" y="1817794"/>
+            <a:ext cx="3660788" cy="4548252"/>
+          </a:xfrm>
+          <a:prstGeom prst="rect">
+            <a:avLst/>
+          </a:prstGeom>
+        </p:spPr>
+      </p:pic>
+    </p:spTree>
+    <p:extLst>
+      <p:ext uri="{BB962C8B-B14F-4D97-AF65-F5344CB8AC3E}">
+        <p14:creationId xmlns:p14="http://schemas.microsoft.com/office/powerpoint/2010/main" val="1207915861"/>
+      </p:ext>
+    </p:extLst>
+  </p:cSld>
+  <p:clrMapOvr>
+    <a:masterClrMapping/>
+  </p:clrMapOvr>
+</p:sld>
+</file>
+
+<file path=ppt/slides/slide20.xml><?xml version="1.0" encoding="utf-8"?>
+<p:sld xmlns:a="http://schemas.openxmlformats.org/drawingml/2006/main" xmlns:r="http://schemas.openxmlformats.org/officeDocument/2006/relationships" xmlns:p="http://schemas.openxmlformats.org/presentationml/2006/main">
+  <p:cSld>
+    <p:spTree>
+      <p:nvGrpSpPr>
+        <p:cNvPr id="1" name=""/>
+        <p:cNvGrpSpPr/>
+        <p:nvPr/>
+      </p:nvGrpSpPr>
+      <p:grpSpPr>
+        <a:xfrm>
+          <a:off x="0" y="0"/>
+          <a:ext cx="0" cy="0"/>
+          <a:chOff x="0" y="0"/>
+          <a:chExt cx="0" cy="0"/>
+        </a:xfrm>
+      </p:grpSpPr>
+      <p:sp>
+        <p:nvSpPr>
+          <p:cNvPr id="4" name="テキスト ボックス 3">
+            <a:extLst>
+              <a:ext uri="{FF2B5EF4-FFF2-40B4-BE49-F238E27FC236}">
+                <a16:creationId xmlns:a16="http://schemas.microsoft.com/office/drawing/2014/main" id="{5A13BF46-B8C5-48AA-8308-C9ECFF431A18}"/>
+              </a:ext>
+            </a:extLst>
+          </p:cNvPr>
+          <p:cNvSpPr txBox="1"/>
+          <p:nvPr/>
+        </p:nvSpPr>
+        <p:spPr>
+          <a:xfrm>
+            <a:off x="567542" y="491954"/>
+            <a:ext cx="3057247" cy="584775"/>
+          </a:xfrm>
+          <a:prstGeom prst="rect">
+            <a:avLst/>
+          </a:prstGeom>
+          <a:noFill/>
+        </p:spPr>
+        <p:txBody>
+          <a:bodyPr wrap="none" rtlCol="0">
+            <a:spAutoFit/>
+          </a:bodyPr>
+          <a:lstStyle/>
+          <a:p>
+            <a:r>
+              <a:rPr kumimoji="1" lang="ja-JP" altLang="en-US" sz="3200" b="1" u="sng" dirty="0"/>
+              <a:t>アニメーション</a:t>
+            </a:r>
+            <a:endParaRPr kumimoji="1" lang="en-US" altLang="ja-JP" sz="3200" b="1" u="sng" dirty="0"/>
+          </a:p>
+        </p:txBody>
+      </p:sp>
+      <p:sp>
+        <p:nvSpPr>
+          <p:cNvPr id="6" name="テキスト ボックス 5">
+            <a:extLst>
+              <a:ext uri="{FF2B5EF4-FFF2-40B4-BE49-F238E27FC236}">
+                <a16:creationId xmlns:a16="http://schemas.microsoft.com/office/drawing/2014/main" id="{55830AD6-028B-4C4E-80BF-B70DFC1C3A46}"/>
+              </a:ext>
+            </a:extLst>
+          </p:cNvPr>
+          <p:cNvSpPr txBox="1"/>
+          <p:nvPr/>
+        </p:nvSpPr>
+        <p:spPr>
+          <a:xfrm>
+            <a:off x="567542" y="1216429"/>
+            <a:ext cx="7879080" cy="461665"/>
+          </a:xfrm>
+          <a:prstGeom prst="rect">
+            <a:avLst/>
+          </a:prstGeom>
+          <a:noFill/>
+        </p:spPr>
+        <p:txBody>
+          <a:bodyPr wrap="none" rtlCol="0">
+            <a:spAutoFit/>
+          </a:bodyPr>
+          <a:lstStyle/>
+          <a:p>
+            <a:r>
+              <a:rPr kumimoji="1" lang="ja-JP" altLang="en-US" sz="2400" dirty="0"/>
+              <a:t>アーマチュアを選択してポーズモードに切り替えます。</a:t>
+            </a:r>
+            <a:endParaRPr kumimoji="1" lang="en-US" altLang="ja-JP" sz="2400" dirty="0"/>
+          </a:p>
+        </p:txBody>
+      </p:sp>
+      <p:pic>
+        <p:nvPicPr>
+          <p:cNvPr id="5" name="図 4">
+            <a:extLst>
+              <a:ext uri="{FF2B5EF4-FFF2-40B4-BE49-F238E27FC236}">
+                <a16:creationId xmlns:a16="http://schemas.microsoft.com/office/drawing/2014/main" id="{43EE2FEF-3A1A-4BEE-B208-10CEAFADD2D8}"/>
+              </a:ext>
+            </a:extLst>
+          </p:cNvPr>
+          <p:cNvPicPr>
+            <a:picLocks noChangeAspect="1"/>
+          </p:cNvPicPr>
+          <p:nvPr/>
+        </p:nvPicPr>
+        <p:blipFill>
+          <a:blip r:embed="rId2"/>
+          <a:stretch>
+            <a:fillRect/>
+          </a:stretch>
+        </p:blipFill>
+        <p:spPr>
+          <a:xfrm>
+            <a:off x="567543" y="1817794"/>
+            <a:ext cx="4786116" cy="4548252"/>
+          </a:xfrm>
+          <a:prstGeom prst="rect">
+            <a:avLst/>
+          </a:prstGeom>
+        </p:spPr>
+      </p:pic>
+      <p:sp>
+        <p:nvSpPr>
+          <p:cNvPr id="7" name="矢印: 右 6">
+            <a:extLst>
+              <a:ext uri="{FF2B5EF4-FFF2-40B4-BE49-F238E27FC236}">
+                <a16:creationId xmlns:a16="http://schemas.microsoft.com/office/drawing/2014/main" id="{AEA03B3D-E4C6-4F62-B807-40D529841BAB}"/>
+              </a:ext>
+            </a:extLst>
+          </p:cNvPr>
+          <p:cNvSpPr/>
+          <p:nvPr/>
+        </p:nvSpPr>
+        <p:spPr>
+          <a:xfrm rot="13638340">
+            <a:off x="1296542" y="2191862"/>
+            <a:ext cx="502023" cy="349624"/>
+          </a:xfrm>
+          <a:prstGeom prst="rightArrow">
+            <a:avLst/>
+          </a:prstGeom>
+          <a:solidFill>
+            <a:srgbClr val="FF0000"/>
+          </a:solidFill>
+          <a:ln>
+            <a:solidFill>
+              <a:schemeClr val="tx1"/>
+            </a:solidFill>
+          </a:ln>
+        </p:spPr>
+        <p:style>
+          <a:lnRef idx="2">
+            <a:schemeClr val="accent1">
+              <a:shade val="50000"/>
+            </a:schemeClr>
+          </a:lnRef>
+          <a:fillRef idx="1">
+            <a:schemeClr val="accent1"/>
+          </a:fillRef>
+          <a:effectRef idx="0">
+            <a:schemeClr val="accent1"/>
+          </a:effectRef>
+          <a:fontRef idx="minor">
+            <a:schemeClr val="lt1"/>
+          </a:fontRef>
+        </p:style>
+        <p:txBody>
+          <a:bodyPr rtlCol="0" anchor="ctr"/>
+          <a:lstStyle/>
+          <a:p>
+            <a:pPr algn="ctr"/>
+            <a:endParaRPr kumimoji="1" lang="ja-JP" altLang="en-US"/>
+          </a:p>
+        </p:txBody>
+      </p:sp>
+    </p:spTree>
+    <p:extLst>
+      <p:ext uri="{BB962C8B-B14F-4D97-AF65-F5344CB8AC3E}">
+        <p14:creationId xmlns:p14="http://schemas.microsoft.com/office/powerpoint/2010/main" val="4283191284"/>
+      </p:ext>
+    </p:extLst>
+  </p:cSld>
+  <p:clrMapOvr>
+    <a:masterClrMapping/>
+  </p:clrMapOvr>
+</p:sld>
+</file>
+
+<file path=ppt/slides/slide21.xml><?xml version="1.0" encoding="utf-8"?>
+<p:sld xmlns:a="http://schemas.openxmlformats.org/drawingml/2006/main" xmlns:r="http://schemas.openxmlformats.org/officeDocument/2006/relationships" xmlns:p="http://schemas.openxmlformats.org/presentationml/2006/main">
+  <p:cSld>
+    <p:spTree>
+      <p:nvGrpSpPr>
+        <p:cNvPr id="1" name=""/>
+        <p:cNvGrpSpPr/>
+        <p:nvPr/>
+      </p:nvGrpSpPr>
+      <p:grpSpPr>
+        <a:xfrm>
+          <a:off x="0" y="0"/>
+          <a:ext cx="0" cy="0"/>
+          <a:chOff x="0" y="0"/>
+          <a:chExt cx="0" cy="0"/>
+        </a:xfrm>
+      </p:grpSpPr>
+      <p:sp>
+        <p:nvSpPr>
+          <p:cNvPr id="4" name="テキスト ボックス 3">
+            <a:extLst>
+              <a:ext uri="{FF2B5EF4-FFF2-40B4-BE49-F238E27FC236}">
+                <a16:creationId xmlns:a16="http://schemas.microsoft.com/office/drawing/2014/main" id="{5A13BF46-B8C5-48AA-8308-C9ECFF431A18}"/>
+              </a:ext>
+            </a:extLst>
+          </p:cNvPr>
+          <p:cNvSpPr txBox="1"/>
+          <p:nvPr/>
+        </p:nvSpPr>
+        <p:spPr>
+          <a:xfrm>
+            <a:off x="567542" y="491954"/>
+            <a:ext cx="3057247" cy="584775"/>
+          </a:xfrm>
+          <a:prstGeom prst="rect">
+            <a:avLst/>
+          </a:prstGeom>
+          <a:noFill/>
+        </p:spPr>
+        <p:txBody>
+          <a:bodyPr wrap="none" rtlCol="0">
+            <a:spAutoFit/>
+          </a:bodyPr>
+          <a:lstStyle/>
+          <a:p>
+            <a:r>
+              <a:rPr kumimoji="1" lang="ja-JP" altLang="en-US" sz="3200" b="1" u="sng" dirty="0"/>
+              <a:t>アニメーション</a:t>
+            </a:r>
+            <a:endParaRPr kumimoji="1" lang="en-US" altLang="ja-JP" sz="3200" b="1" u="sng" dirty="0"/>
+          </a:p>
+        </p:txBody>
+      </p:sp>
+      <p:sp>
+        <p:nvSpPr>
+          <p:cNvPr id="6" name="テキスト ボックス 5">
+            <a:extLst>
+              <a:ext uri="{FF2B5EF4-FFF2-40B4-BE49-F238E27FC236}">
+                <a16:creationId xmlns:a16="http://schemas.microsoft.com/office/drawing/2014/main" id="{55830AD6-028B-4C4E-80BF-B70DFC1C3A46}"/>
+              </a:ext>
+            </a:extLst>
+          </p:cNvPr>
+          <p:cNvSpPr txBox="1"/>
+          <p:nvPr/>
+        </p:nvSpPr>
+        <p:spPr>
+          <a:xfrm>
+            <a:off x="567542" y="1216429"/>
+            <a:ext cx="6848350" cy="461665"/>
+          </a:xfrm>
+          <a:prstGeom prst="rect">
+            <a:avLst/>
+          </a:prstGeom>
+          <a:noFill/>
+        </p:spPr>
+        <p:txBody>
+          <a:bodyPr wrap="none" rtlCol="0">
+            <a:spAutoFit/>
+          </a:bodyPr>
+          <a:lstStyle/>
+          <a:p>
+            <a:r>
+              <a:rPr kumimoji="1" lang="en-US" altLang="ja-JP" sz="2400" b="1" dirty="0">
+                <a:solidFill>
+                  <a:srgbClr val="FF0000"/>
+                </a:solidFill>
+              </a:rPr>
+              <a:t>A</a:t>
+            </a:r>
+            <a:r>
+              <a:rPr kumimoji="1" lang="ja-JP" altLang="en-US" sz="2400" b="1" dirty="0">
+                <a:solidFill>
+                  <a:srgbClr val="FF0000"/>
+                </a:solidFill>
+              </a:rPr>
+              <a:t>キー</a:t>
+            </a:r>
+            <a:r>
+              <a:rPr kumimoji="1" lang="ja-JP" altLang="en-US" sz="2400" dirty="0"/>
+              <a:t>を入力してすべてのボーンを選択します。</a:t>
+            </a:r>
+            <a:endParaRPr kumimoji="1" lang="en-US" altLang="ja-JP" sz="2400" dirty="0"/>
+          </a:p>
+        </p:txBody>
+      </p:sp>
+      <p:pic>
+        <p:nvPicPr>
+          <p:cNvPr id="3" name="図 2">
+            <a:extLst>
+              <a:ext uri="{FF2B5EF4-FFF2-40B4-BE49-F238E27FC236}">
+                <a16:creationId xmlns:a16="http://schemas.microsoft.com/office/drawing/2014/main" id="{E6ADFAEC-D790-4C81-AF45-A7D4BA6E6FBA}"/>
+              </a:ext>
+            </a:extLst>
+          </p:cNvPr>
+          <p:cNvPicPr>
+            <a:picLocks noChangeAspect="1"/>
+          </p:cNvPicPr>
+          <p:nvPr/>
+        </p:nvPicPr>
+        <p:blipFill>
+          <a:blip r:embed="rId2"/>
+          <a:stretch>
+            <a:fillRect/>
+          </a:stretch>
+        </p:blipFill>
+        <p:spPr>
+          <a:xfrm>
+            <a:off x="567542" y="1817794"/>
+            <a:ext cx="3457611" cy="4405421"/>
+          </a:xfrm>
+          <a:prstGeom prst="rect">
+            <a:avLst/>
+          </a:prstGeom>
+        </p:spPr>
+      </p:pic>
+    </p:spTree>
+    <p:extLst>
+      <p:ext uri="{BB962C8B-B14F-4D97-AF65-F5344CB8AC3E}">
+        <p14:creationId xmlns:p14="http://schemas.microsoft.com/office/powerpoint/2010/main" val="4181326689"/>
+      </p:ext>
+    </p:extLst>
+  </p:cSld>
+  <p:clrMapOvr>
+    <a:masterClrMapping/>
+  </p:clrMapOvr>
+</p:sld>
+</file>
+
+<file path=ppt/slides/slide22.xml><?xml version="1.0" encoding="utf-8"?>
+<p:sld xmlns:a="http://schemas.openxmlformats.org/drawingml/2006/main" xmlns:r="http://schemas.openxmlformats.org/officeDocument/2006/relationships" xmlns:p="http://schemas.openxmlformats.org/presentationml/2006/main">
+  <p:cSld>
+    <p:spTree>
+      <p:nvGrpSpPr>
+        <p:cNvPr id="1" name=""/>
+        <p:cNvGrpSpPr/>
+        <p:nvPr/>
+      </p:nvGrpSpPr>
+      <p:grpSpPr>
+        <a:xfrm>
+          <a:off x="0" y="0"/>
+          <a:ext cx="0" cy="0"/>
+          <a:chOff x="0" y="0"/>
+          <a:chExt cx="0" cy="0"/>
+        </a:xfrm>
+      </p:grpSpPr>
+      <p:sp>
+        <p:nvSpPr>
+          <p:cNvPr id="4" name="テキスト ボックス 3">
+            <a:extLst>
+              <a:ext uri="{FF2B5EF4-FFF2-40B4-BE49-F238E27FC236}">
+                <a16:creationId xmlns:a16="http://schemas.microsoft.com/office/drawing/2014/main" id="{5A13BF46-B8C5-48AA-8308-C9ECFF431A18}"/>
+              </a:ext>
+            </a:extLst>
+          </p:cNvPr>
+          <p:cNvSpPr txBox="1"/>
+          <p:nvPr/>
+        </p:nvSpPr>
+        <p:spPr>
+          <a:xfrm>
+            <a:off x="567542" y="491954"/>
+            <a:ext cx="3057247" cy="584775"/>
+          </a:xfrm>
+          <a:prstGeom prst="rect">
+            <a:avLst/>
+          </a:prstGeom>
+          <a:noFill/>
+        </p:spPr>
+        <p:txBody>
+          <a:bodyPr wrap="none" rtlCol="0">
+            <a:spAutoFit/>
+          </a:bodyPr>
+          <a:lstStyle/>
+          <a:p>
+            <a:r>
+              <a:rPr kumimoji="1" lang="ja-JP" altLang="en-US" sz="3200" b="1" u="sng" dirty="0"/>
+              <a:t>アニメーション</a:t>
+            </a:r>
+            <a:endParaRPr kumimoji="1" lang="en-US" altLang="ja-JP" sz="3200" b="1" u="sng" dirty="0"/>
+          </a:p>
+        </p:txBody>
+      </p:sp>
+      <p:sp>
+        <p:nvSpPr>
+          <p:cNvPr id="6" name="テキスト ボックス 5">
+            <a:extLst>
+              <a:ext uri="{FF2B5EF4-FFF2-40B4-BE49-F238E27FC236}">
+                <a16:creationId xmlns:a16="http://schemas.microsoft.com/office/drawing/2014/main" id="{55830AD6-028B-4C4E-80BF-B70DFC1C3A46}"/>
+              </a:ext>
+            </a:extLst>
+          </p:cNvPr>
+          <p:cNvSpPr txBox="1"/>
+          <p:nvPr/>
+        </p:nvSpPr>
+        <p:spPr>
+          <a:xfrm>
+            <a:off x="567542" y="1216429"/>
+            <a:ext cx="9199954" cy="461665"/>
+          </a:xfrm>
+          <a:prstGeom prst="rect">
+            <a:avLst/>
+          </a:prstGeom>
+          <a:noFill/>
+        </p:spPr>
+        <p:txBody>
+          <a:bodyPr wrap="none" rtlCol="0">
+            <a:spAutoFit/>
+          </a:bodyPr>
+          <a:lstStyle/>
+          <a:p>
+            <a:r>
+              <a:rPr lang="en-US" altLang="ja-JP" sz="2400" b="1" dirty="0">
+                <a:solidFill>
+                  <a:srgbClr val="FF0000"/>
+                </a:solidFill>
+              </a:rPr>
+              <a:t>I</a:t>
+            </a:r>
+            <a:r>
+              <a:rPr kumimoji="1" lang="ja-JP" altLang="en-US" sz="2400" b="1" dirty="0">
+                <a:solidFill>
+                  <a:srgbClr val="FF0000"/>
+                </a:solidFill>
+              </a:rPr>
+              <a:t>キーを</a:t>
+            </a:r>
+            <a:r>
+              <a:rPr kumimoji="1" lang="ja-JP" altLang="en-US" sz="2400" dirty="0"/>
+              <a:t>入力すると現在のポーズがタイムラインに保存されます。</a:t>
+            </a:r>
+            <a:endParaRPr kumimoji="1" lang="en-US" altLang="ja-JP" sz="2400" dirty="0"/>
+          </a:p>
+        </p:txBody>
+      </p:sp>
+      <p:pic>
+        <p:nvPicPr>
+          <p:cNvPr id="5" name="図 4">
+            <a:extLst>
+              <a:ext uri="{FF2B5EF4-FFF2-40B4-BE49-F238E27FC236}">
+                <a16:creationId xmlns:a16="http://schemas.microsoft.com/office/drawing/2014/main" id="{D65236FC-B0C1-44A9-8807-CA29460F5B34}"/>
+              </a:ext>
+            </a:extLst>
+          </p:cNvPr>
+          <p:cNvPicPr>
+            <a:picLocks noChangeAspect="1"/>
+          </p:cNvPicPr>
+          <p:nvPr/>
+        </p:nvPicPr>
+        <p:blipFill>
+          <a:blip r:embed="rId2"/>
+          <a:stretch>
+            <a:fillRect/>
+          </a:stretch>
+        </p:blipFill>
+        <p:spPr>
+          <a:xfrm>
+            <a:off x="567542" y="1817793"/>
+            <a:ext cx="5069918" cy="3823777"/>
+          </a:xfrm>
+          <a:prstGeom prst="rect">
+            <a:avLst/>
+          </a:prstGeom>
+        </p:spPr>
+      </p:pic>
+      <p:sp>
+        <p:nvSpPr>
+          <p:cNvPr id="7" name="矢印: 右 6">
+            <a:extLst>
+              <a:ext uri="{FF2B5EF4-FFF2-40B4-BE49-F238E27FC236}">
+                <a16:creationId xmlns:a16="http://schemas.microsoft.com/office/drawing/2014/main" id="{373C42E3-B8CD-431B-ABFE-DB1EB7784CEB}"/>
+              </a:ext>
+            </a:extLst>
+          </p:cNvPr>
+          <p:cNvSpPr/>
+          <p:nvPr/>
+        </p:nvSpPr>
+        <p:spPr>
+          <a:xfrm rot="13638340">
+            <a:off x="4774848" y="2882144"/>
+            <a:ext cx="502023" cy="349624"/>
+          </a:xfrm>
+          <a:prstGeom prst="rightArrow">
+            <a:avLst/>
+          </a:prstGeom>
+          <a:solidFill>
+            <a:srgbClr val="FF0000"/>
+          </a:solidFill>
+          <a:ln>
+            <a:solidFill>
+              <a:schemeClr val="tx1"/>
+            </a:solidFill>
+          </a:ln>
+        </p:spPr>
+        <p:style>
+          <a:lnRef idx="2">
+            <a:schemeClr val="accent1">
+              <a:shade val="50000"/>
+            </a:schemeClr>
+          </a:lnRef>
+          <a:fillRef idx="1">
+            <a:schemeClr val="accent1"/>
+          </a:fillRef>
+          <a:effectRef idx="0">
+            <a:schemeClr val="accent1"/>
+          </a:effectRef>
+          <a:fontRef idx="minor">
+            <a:schemeClr val="lt1"/>
+          </a:fontRef>
+        </p:style>
+        <p:txBody>
+          <a:bodyPr rtlCol="0" anchor="ctr"/>
+          <a:lstStyle/>
+          <a:p>
+            <a:pPr algn="ctr"/>
+            <a:endParaRPr kumimoji="1" lang="ja-JP" altLang="en-US"/>
+          </a:p>
+        </p:txBody>
+      </p:sp>
+    </p:spTree>
+    <p:extLst>
+      <p:ext uri="{BB962C8B-B14F-4D97-AF65-F5344CB8AC3E}">
+        <p14:creationId xmlns:p14="http://schemas.microsoft.com/office/powerpoint/2010/main" val="1448419248"/>
+      </p:ext>
+    </p:extLst>
+  </p:cSld>
+  <p:clrMapOvr>
+    <a:masterClrMapping/>
+  </p:clrMapOvr>
+</p:sld>
+</file>
+
+<file path=ppt/slides/slide23.xml><?xml version="1.0" encoding="utf-8"?>
+<p:sld xmlns:a="http://schemas.openxmlformats.org/drawingml/2006/main" xmlns:r="http://schemas.openxmlformats.org/officeDocument/2006/relationships" xmlns:p="http://schemas.openxmlformats.org/presentationml/2006/main">
+  <p:cSld>
+    <p:spTree>
+      <p:nvGrpSpPr>
+        <p:cNvPr id="1" name=""/>
+        <p:cNvGrpSpPr/>
+        <p:nvPr/>
+      </p:nvGrpSpPr>
+      <p:grpSpPr>
+        <a:xfrm>
+          <a:off x="0" y="0"/>
+          <a:ext cx="0" cy="0"/>
+          <a:chOff x="0" y="0"/>
+          <a:chExt cx="0" cy="0"/>
+        </a:xfrm>
+      </p:grpSpPr>
+      <p:sp>
+        <p:nvSpPr>
+          <p:cNvPr id="4" name="テキスト ボックス 3">
+            <a:extLst>
+              <a:ext uri="{FF2B5EF4-FFF2-40B4-BE49-F238E27FC236}">
+                <a16:creationId xmlns:a16="http://schemas.microsoft.com/office/drawing/2014/main" id="{5A13BF46-B8C5-48AA-8308-C9ECFF431A18}"/>
+              </a:ext>
+            </a:extLst>
+          </p:cNvPr>
+          <p:cNvSpPr txBox="1"/>
+          <p:nvPr/>
+        </p:nvSpPr>
+        <p:spPr>
+          <a:xfrm>
+            <a:off x="567542" y="491954"/>
+            <a:ext cx="3057247" cy="584775"/>
+          </a:xfrm>
+          <a:prstGeom prst="rect">
+            <a:avLst/>
+          </a:prstGeom>
+          <a:noFill/>
+        </p:spPr>
+        <p:txBody>
+          <a:bodyPr wrap="none" rtlCol="0">
+            <a:spAutoFit/>
+          </a:bodyPr>
+          <a:lstStyle/>
+          <a:p>
+            <a:r>
+              <a:rPr kumimoji="1" lang="ja-JP" altLang="en-US" sz="3200" b="1" u="sng" dirty="0"/>
+              <a:t>アニメーション</a:t>
+            </a:r>
+            <a:endParaRPr kumimoji="1" lang="en-US" altLang="ja-JP" sz="3200" b="1" u="sng" dirty="0"/>
+          </a:p>
+        </p:txBody>
+      </p:sp>
+      <p:sp>
+        <p:nvSpPr>
+          <p:cNvPr id="6" name="テキスト ボックス 5">
+            <a:extLst>
+              <a:ext uri="{FF2B5EF4-FFF2-40B4-BE49-F238E27FC236}">
+                <a16:creationId xmlns:a16="http://schemas.microsoft.com/office/drawing/2014/main" id="{55830AD6-028B-4C4E-80BF-B70DFC1C3A46}"/>
+              </a:ext>
+            </a:extLst>
+          </p:cNvPr>
+          <p:cNvSpPr txBox="1"/>
+          <p:nvPr/>
+        </p:nvSpPr>
+        <p:spPr>
+          <a:xfrm>
+            <a:off x="567542" y="1216429"/>
+            <a:ext cx="5724644" cy="461665"/>
+          </a:xfrm>
+          <a:prstGeom prst="rect">
+            <a:avLst/>
+          </a:prstGeom>
+          <a:noFill/>
+        </p:spPr>
+        <p:txBody>
+          <a:bodyPr wrap="none" rtlCol="0">
+            <a:spAutoFit/>
+          </a:bodyPr>
+          <a:lstStyle/>
+          <a:p>
+            <a:r>
+              <a:rPr lang="ja-JP" altLang="en-US" sz="2400" dirty="0"/>
+              <a:t>ドラッグ＆ドロップで時間を進めます。</a:t>
+            </a:r>
+            <a:endParaRPr kumimoji="1" lang="en-US" altLang="ja-JP" sz="2400" dirty="0"/>
+          </a:p>
+        </p:txBody>
+      </p:sp>
+      <p:pic>
+        <p:nvPicPr>
+          <p:cNvPr id="3" name="図 2">
+            <a:extLst>
+              <a:ext uri="{FF2B5EF4-FFF2-40B4-BE49-F238E27FC236}">
+                <a16:creationId xmlns:a16="http://schemas.microsoft.com/office/drawing/2014/main" id="{9F28C9B5-CE9A-4957-9877-2766259DC0B5}"/>
+              </a:ext>
+            </a:extLst>
+          </p:cNvPr>
+          <p:cNvPicPr>
+            <a:picLocks noChangeAspect="1"/>
+          </p:cNvPicPr>
+          <p:nvPr/>
+        </p:nvPicPr>
+        <p:blipFill>
+          <a:blip r:embed="rId2"/>
+          <a:stretch>
+            <a:fillRect/>
+          </a:stretch>
+        </p:blipFill>
+        <p:spPr>
+          <a:xfrm>
+            <a:off x="567542" y="1817794"/>
+            <a:ext cx="5848593" cy="2861782"/>
+          </a:xfrm>
+          <a:prstGeom prst="rect">
+            <a:avLst/>
+          </a:prstGeom>
+        </p:spPr>
+      </p:pic>
+      <p:cxnSp>
+        <p:nvCxnSpPr>
+          <p:cNvPr id="9" name="直線矢印コネクタ 8">
+            <a:extLst>
+              <a:ext uri="{FF2B5EF4-FFF2-40B4-BE49-F238E27FC236}">
+                <a16:creationId xmlns:a16="http://schemas.microsoft.com/office/drawing/2014/main" id="{DCDF8BF0-DB83-4B0C-9ECF-45DB1E2A0C0F}"/>
+              </a:ext>
+            </a:extLst>
+          </p:cNvPr>
+          <p:cNvCxnSpPr>
+            <a:cxnSpLocks/>
+          </p:cNvCxnSpPr>
+          <p:nvPr/>
+        </p:nvCxnSpPr>
+        <p:spPr>
+          <a:xfrm>
+            <a:off x="4383740" y="2357718"/>
+            <a:ext cx="1075766" cy="0"/>
+          </a:xfrm>
+          <a:prstGeom prst="straightConnector1">
+            <a:avLst/>
+          </a:prstGeom>
+          <a:ln w="38100">
+            <a:solidFill>
+              <a:srgbClr val="FF0000"/>
+            </a:solidFill>
+            <a:tailEnd type="triangle"/>
+          </a:ln>
+        </p:spPr>
+        <p:style>
+          <a:lnRef idx="1">
+            <a:schemeClr val="accent1"/>
+          </a:lnRef>
+          <a:fillRef idx="0">
+            <a:schemeClr val="accent1"/>
+          </a:fillRef>
+          <a:effectRef idx="0">
+            <a:schemeClr val="accent1"/>
+          </a:effectRef>
+          <a:fontRef idx="minor">
+            <a:schemeClr val="tx1"/>
+          </a:fontRef>
+        </p:style>
+      </p:cxnSp>
+    </p:spTree>
+    <p:extLst>
+      <p:ext uri="{BB962C8B-B14F-4D97-AF65-F5344CB8AC3E}">
+        <p14:creationId xmlns:p14="http://schemas.microsoft.com/office/powerpoint/2010/main" val="3157909245"/>
+      </p:ext>
+    </p:extLst>
+  </p:cSld>
+  <p:clrMapOvr>
+    <a:masterClrMapping/>
+  </p:clrMapOvr>
+</p:sld>
+</file>
+
+<file path=ppt/slides/slide24.xml><?xml version="1.0" encoding="utf-8"?>
+<p:sld xmlns:a="http://schemas.openxmlformats.org/drawingml/2006/main" xmlns:r="http://schemas.openxmlformats.org/officeDocument/2006/relationships" xmlns:p="http://schemas.openxmlformats.org/presentationml/2006/main">
+  <p:cSld>
+    <p:spTree>
+      <p:nvGrpSpPr>
+        <p:cNvPr id="1" name=""/>
+        <p:cNvGrpSpPr/>
+        <p:nvPr/>
+      </p:nvGrpSpPr>
+      <p:grpSpPr>
+        <a:xfrm>
+          <a:off x="0" y="0"/>
+          <a:ext cx="0" cy="0"/>
+          <a:chOff x="0" y="0"/>
+          <a:chExt cx="0" cy="0"/>
+        </a:xfrm>
+      </p:grpSpPr>
+      <p:sp>
+        <p:nvSpPr>
+          <p:cNvPr id="4" name="テキスト ボックス 3">
+            <a:extLst>
+              <a:ext uri="{FF2B5EF4-FFF2-40B4-BE49-F238E27FC236}">
+                <a16:creationId xmlns:a16="http://schemas.microsoft.com/office/drawing/2014/main" id="{5A13BF46-B8C5-48AA-8308-C9ECFF431A18}"/>
+              </a:ext>
+            </a:extLst>
+          </p:cNvPr>
+          <p:cNvSpPr txBox="1"/>
+          <p:nvPr/>
+        </p:nvSpPr>
+        <p:spPr>
+          <a:xfrm>
+            <a:off x="567542" y="491954"/>
+            <a:ext cx="3057247" cy="584775"/>
+          </a:xfrm>
+          <a:prstGeom prst="rect">
+            <a:avLst/>
+          </a:prstGeom>
+          <a:noFill/>
+        </p:spPr>
+        <p:txBody>
+          <a:bodyPr wrap="none" rtlCol="0">
+            <a:spAutoFit/>
+          </a:bodyPr>
+          <a:lstStyle/>
+          <a:p>
+            <a:r>
+              <a:rPr kumimoji="1" lang="ja-JP" altLang="en-US" sz="3200" b="1" u="sng" dirty="0"/>
+              <a:t>アニメーション</a:t>
+            </a:r>
+            <a:endParaRPr kumimoji="1" lang="en-US" altLang="ja-JP" sz="3200" b="1" u="sng" dirty="0"/>
+          </a:p>
+        </p:txBody>
+      </p:sp>
+      <p:sp>
+        <p:nvSpPr>
+          <p:cNvPr id="6" name="テキスト ボックス 5">
+            <a:extLst>
+              <a:ext uri="{FF2B5EF4-FFF2-40B4-BE49-F238E27FC236}">
+                <a16:creationId xmlns:a16="http://schemas.microsoft.com/office/drawing/2014/main" id="{55830AD6-028B-4C4E-80BF-B70DFC1C3A46}"/>
+              </a:ext>
+            </a:extLst>
+          </p:cNvPr>
+          <p:cNvSpPr txBox="1"/>
+          <p:nvPr/>
+        </p:nvSpPr>
+        <p:spPr>
+          <a:xfrm>
+            <a:off x="567542" y="1216429"/>
+            <a:ext cx="7571303" cy="830997"/>
+          </a:xfrm>
+          <a:prstGeom prst="rect">
+            <a:avLst/>
+          </a:prstGeom>
+          <a:noFill/>
+        </p:spPr>
+        <p:txBody>
+          <a:bodyPr wrap="none" rtlCol="0">
+            <a:spAutoFit/>
+          </a:bodyPr>
+          <a:lstStyle/>
+          <a:p>
+            <a:r>
+              <a:rPr lang="ja-JP" altLang="en-US" sz="2400" dirty="0"/>
+              <a:t>ボーンを回転させたりしてポーズをとらせましょう。</a:t>
+            </a:r>
+            <a:endParaRPr lang="en-US" altLang="ja-JP" sz="2400" dirty="0"/>
+          </a:p>
+          <a:p>
+            <a:r>
+              <a:rPr kumimoji="1" lang="ja-JP" altLang="en-US" sz="2400" dirty="0"/>
+              <a:t>ポーズが決まれば</a:t>
+            </a:r>
+            <a:r>
+              <a:rPr kumimoji="1" lang="en-US" altLang="ja-JP" sz="2400" b="1" dirty="0">
+                <a:solidFill>
+                  <a:srgbClr val="FF0000"/>
+                </a:solidFill>
+              </a:rPr>
+              <a:t>I</a:t>
+            </a:r>
+            <a:r>
+              <a:rPr kumimoji="1" lang="ja-JP" altLang="en-US" sz="2400" b="1" dirty="0">
+                <a:solidFill>
+                  <a:srgbClr val="FF0000"/>
+                </a:solidFill>
+              </a:rPr>
+              <a:t>キーで保存</a:t>
+            </a:r>
+            <a:r>
+              <a:rPr kumimoji="1" lang="ja-JP" altLang="en-US" sz="2400" dirty="0"/>
+              <a:t>します。</a:t>
+            </a:r>
+            <a:endParaRPr kumimoji="1" lang="en-US" altLang="ja-JP" sz="2400" dirty="0"/>
+          </a:p>
+        </p:txBody>
+      </p:sp>
+      <p:pic>
+        <p:nvPicPr>
+          <p:cNvPr id="5" name="図 4">
+            <a:extLst>
+              <a:ext uri="{FF2B5EF4-FFF2-40B4-BE49-F238E27FC236}">
+                <a16:creationId xmlns:a16="http://schemas.microsoft.com/office/drawing/2014/main" id="{542B7B09-24BA-4465-9F8D-0AD5CEF655CE}"/>
+              </a:ext>
+            </a:extLst>
+          </p:cNvPr>
+          <p:cNvPicPr>
+            <a:picLocks noChangeAspect="1"/>
+          </p:cNvPicPr>
+          <p:nvPr/>
+        </p:nvPicPr>
+        <p:blipFill>
+          <a:blip r:embed="rId2"/>
+          <a:stretch>
+            <a:fillRect/>
+          </a:stretch>
+        </p:blipFill>
+        <p:spPr>
+          <a:xfrm>
+            <a:off x="567542" y="2187126"/>
+            <a:ext cx="3075852" cy="4249533"/>
+          </a:xfrm>
+          <a:prstGeom prst="rect">
+            <a:avLst/>
+          </a:prstGeom>
+        </p:spPr>
+      </p:pic>
+      <p:pic>
+        <p:nvPicPr>
+          <p:cNvPr id="8" name="図 7">
+            <a:extLst>
+              <a:ext uri="{FF2B5EF4-FFF2-40B4-BE49-F238E27FC236}">
+                <a16:creationId xmlns:a16="http://schemas.microsoft.com/office/drawing/2014/main" id="{AE89D8CC-C854-49A5-9183-C43BDFCA7F44}"/>
+              </a:ext>
+            </a:extLst>
+          </p:cNvPr>
+          <p:cNvPicPr>
+            <a:picLocks noChangeAspect="1"/>
+          </p:cNvPicPr>
+          <p:nvPr/>
+        </p:nvPicPr>
+        <p:blipFill>
+          <a:blip r:embed="rId3"/>
+          <a:stretch>
+            <a:fillRect/>
+          </a:stretch>
+        </p:blipFill>
+        <p:spPr>
+          <a:xfrm>
+            <a:off x="3793791" y="2187126"/>
+            <a:ext cx="5257519" cy="3218592"/>
+          </a:xfrm>
+          <a:prstGeom prst="rect">
+            <a:avLst/>
+          </a:prstGeom>
+        </p:spPr>
+      </p:pic>
+    </p:spTree>
+    <p:extLst>
+      <p:ext uri="{BB962C8B-B14F-4D97-AF65-F5344CB8AC3E}">
+        <p14:creationId xmlns:p14="http://schemas.microsoft.com/office/powerpoint/2010/main" val="1301745985"/>
+      </p:ext>
+    </p:extLst>
+  </p:cSld>
+  <p:clrMapOvr>
+    <a:masterClrMapping/>
+  </p:clrMapOvr>
+</p:sld>
+</file>
+
+<file path=ppt/slides/slide25.xml><?xml version="1.0" encoding="utf-8"?>
+<p:sld xmlns:a="http://schemas.openxmlformats.org/drawingml/2006/main" xmlns:r="http://schemas.openxmlformats.org/officeDocument/2006/relationships" xmlns:p="http://schemas.openxmlformats.org/presentationml/2006/main">
+  <p:cSld>
+    <p:spTree>
+      <p:nvGrpSpPr>
+        <p:cNvPr id="1" name=""/>
+        <p:cNvGrpSpPr/>
+        <p:nvPr/>
+      </p:nvGrpSpPr>
+      <p:grpSpPr>
+        <a:xfrm>
+          <a:off x="0" y="0"/>
+          <a:ext cx="0" cy="0"/>
+          <a:chOff x="0" y="0"/>
+          <a:chExt cx="0" cy="0"/>
+        </a:xfrm>
+      </p:grpSpPr>
+      <p:sp>
+        <p:nvSpPr>
+          <p:cNvPr id="4" name="テキスト ボックス 3">
+            <a:extLst>
+              <a:ext uri="{FF2B5EF4-FFF2-40B4-BE49-F238E27FC236}">
+                <a16:creationId xmlns:a16="http://schemas.microsoft.com/office/drawing/2014/main" id="{5A13BF46-B8C5-48AA-8308-C9ECFF431A18}"/>
+              </a:ext>
+            </a:extLst>
+          </p:cNvPr>
+          <p:cNvSpPr txBox="1"/>
+          <p:nvPr/>
+        </p:nvSpPr>
+        <p:spPr>
+          <a:xfrm>
+            <a:off x="567542" y="491954"/>
+            <a:ext cx="3057247" cy="584775"/>
+          </a:xfrm>
+          <a:prstGeom prst="rect">
+            <a:avLst/>
+          </a:prstGeom>
+          <a:noFill/>
+        </p:spPr>
+        <p:txBody>
+          <a:bodyPr wrap="none" rtlCol="0">
+            <a:spAutoFit/>
+          </a:bodyPr>
+          <a:lstStyle/>
+          <a:p>
+            <a:r>
+              <a:rPr kumimoji="1" lang="ja-JP" altLang="en-US" sz="3200" b="1" u="sng" dirty="0"/>
+              <a:t>アニメーション</a:t>
+            </a:r>
+            <a:endParaRPr kumimoji="1" lang="en-US" altLang="ja-JP" sz="3200" b="1" u="sng" dirty="0"/>
+          </a:p>
+        </p:txBody>
+      </p:sp>
+      <p:sp>
+        <p:nvSpPr>
+          <p:cNvPr id="6" name="テキスト ボックス 5">
+            <a:extLst>
+              <a:ext uri="{FF2B5EF4-FFF2-40B4-BE49-F238E27FC236}">
+                <a16:creationId xmlns:a16="http://schemas.microsoft.com/office/drawing/2014/main" id="{55830AD6-028B-4C4E-80BF-B70DFC1C3A46}"/>
+              </a:ext>
+            </a:extLst>
+          </p:cNvPr>
+          <p:cNvSpPr txBox="1"/>
+          <p:nvPr/>
+        </p:nvSpPr>
+        <p:spPr>
+          <a:xfrm>
+            <a:off x="567542" y="1216429"/>
+            <a:ext cx="10341293" cy="461665"/>
+          </a:xfrm>
+          <a:prstGeom prst="rect">
+            <a:avLst/>
+          </a:prstGeom>
+          <a:noFill/>
+        </p:spPr>
+        <p:txBody>
+          <a:bodyPr wrap="none" rtlCol="0">
+            <a:spAutoFit/>
+          </a:bodyPr>
+          <a:lstStyle/>
+          <a:p>
+            <a:r>
+              <a:rPr kumimoji="1" lang="ja-JP" altLang="en-US" sz="2400" dirty="0"/>
+              <a:t>タイムラインの</a:t>
+            </a:r>
+            <a:r>
+              <a:rPr kumimoji="1" lang="ja-JP" altLang="en-US" sz="2400" b="1" dirty="0">
+                <a:solidFill>
+                  <a:srgbClr val="FF0000"/>
+                </a:solidFill>
+              </a:rPr>
+              <a:t>●マーク（キーフレーム）</a:t>
+            </a:r>
+            <a:r>
+              <a:rPr kumimoji="1" lang="ja-JP" altLang="en-US" sz="2400" dirty="0"/>
+              <a:t>の間でアニメーションします。</a:t>
+            </a:r>
+            <a:endParaRPr kumimoji="1" lang="en-US" altLang="ja-JP" sz="2400" dirty="0"/>
+          </a:p>
+        </p:txBody>
+      </p:sp>
+      <p:pic>
+        <p:nvPicPr>
+          <p:cNvPr id="7" name="図 6">
+            <a:extLst>
+              <a:ext uri="{FF2B5EF4-FFF2-40B4-BE49-F238E27FC236}">
+                <a16:creationId xmlns:a16="http://schemas.microsoft.com/office/drawing/2014/main" id="{D5D7FCF5-D06C-4F86-8138-0F6F8B2D1772}"/>
+              </a:ext>
+            </a:extLst>
+          </p:cNvPr>
+          <p:cNvPicPr>
+            <a:picLocks noChangeAspect="1"/>
+          </p:cNvPicPr>
+          <p:nvPr/>
+        </p:nvPicPr>
+        <p:blipFill>
+          <a:blip r:embed="rId2"/>
+          <a:stretch>
+            <a:fillRect/>
+          </a:stretch>
+        </p:blipFill>
+        <p:spPr>
+          <a:xfrm>
+            <a:off x="567542" y="1817794"/>
+            <a:ext cx="3292068" cy="4548252"/>
+          </a:xfrm>
+          <a:prstGeom prst="rect">
+            <a:avLst/>
+          </a:prstGeom>
+        </p:spPr>
+      </p:pic>
+    </p:spTree>
+    <p:extLst>
+      <p:ext uri="{BB962C8B-B14F-4D97-AF65-F5344CB8AC3E}">
+        <p14:creationId xmlns:p14="http://schemas.microsoft.com/office/powerpoint/2010/main" val="2865440978"/>
+      </p:ext>
+    </p:extLst>
+  </p:cSld>
+  <p:clrMapOvr>
+    <a:masterClrMapping/>
+  </p:clrMapOvr>
+</p:sld>
+</file>
+
+<file path=ppt/slides/slide26.xml><?xml version="1.0" encoding="utf-8"?>
+<p:sld xmlns:a="http://schemas.openxmlformats.org/drawingml/2006/main" xmlns:r="http://schemas.openxmlformats.org/officeDocument/2006/relationships" xmlns:p="http://schemas.openxmlformats.org/presentationml/2006/main">
+  <p:cSld>
+    <p:spTree>
+      <p:nvGrpSpPr>
+        <p:cNvPr id="1" name=""/>
+        <p:cNvGrpSpPr/>
+        <p:nvPr/>
+      </p:nvGrpSpPr>
+      <p:grpSpPr>
+        <a:xfrm>
+          <a:off x="0" y="0"/>
+          <a:ext cx="0" cy="0"/>
+          <a:chOff x="0" y="0"/>
+          <a:chExt cx="0" cy="0"/>
+        </a:xfrm>
+      </p:grpSpPr>
+      <p:sp>
+        <p:nvSpPr>
+          <p:cNvPr id="4" name="テキスト ボックス 3">
+            <a:extLst>
+              <a:ext uri="{FF2B5EF4-FFF2-40B4-BE49-F238E27FC236}">
+                <a16:creationId xmlns:a16="http://schemas.microsoft.com/office/drawing/2014/main" id="{5A13BF46-B8C5-48AA-8308-C9ECFF431A18}"/>
+              </a:ext>
+            </a:extLst>
+          </p:cNvPr>
+          <p:cNvSpPr txBox="1"/>
+          <p:nvPr/>
+        </p:nvSpPr>
+        <p:spPr>
+          <a:xfrm>
+            <a:off x="567542" y="491954"/>
+            <a:ext cx="3057247" cy="584775"/>
+          </a:xfrm>
+          <a:prstGeom prst="rect">
+            <a:avLst/>
+          </a:prstGeom>
+          <a:noFill/>
+        </p:spPr>
+        <p:txBody>
+          <a:bodyPr wrap="none" rtlCol="0">
+            <a:spAutoFit/>
+          </a:bodyPr>
+          <a:lstStyle/>
+          <a:p>
+            <a:r>
+              <a:rPr kumimoji="1" lang="ja-JP" altLang="en-US" sz="3200" b="1" u="sng" dirty="0"/>
+              <a:t>アニメーション</a:t>
+            </a:r>
+            <a:endParaRPr kumimoji="1" lang="en-US" altLang="ja-JP" sz="3200" b="1" u="sng" dirty="0"/>
+          </a:p>
+        </p:txBody>
+      </p:sp>
+      <p:sp>
+        <p:nvSpPr>
+          <p:cNvPr id="6" name="テキスト ボックス 5">
+            <a:extLst>
+              <a:ext uri="{FF2B5EF4-FFF2-40B4-BE49-F238E27FC236}">
+                <a16:creationId xmlns:a16="http://schemas.microsoft.com/office/drawing/2014/main" id="{55830AD6-028B-4C4E-80BF-B70DFC1C3A46}"/>
+              </a:ext>
+            </a:extLst>
+          </p:cNvPr>
+          <p:cNvSpPr txBox="1"/>
+          <p:nvPr/>
+        </p:nvSpPr>
+        <p:spPr>
+          <a:xfrm>
+            <a:off x="567542" y="1216429"/>
+            <a:ext cx="7879080" cy="830997"/>
+          </a:xfrm>
+          <a:prstGeom prst="rect">
+            <a:avLst/>
+          </a:prstGeom>
+          <a:noFill/>
+        </p:spPr>
+        <p:txBody>
+          <a:bodyPr wrap="none" rtlCol="0">
+            <a:spAutoFit/>
+          </a:bodyPr>
+          <a:lstStyle/>
+          <a:p>
+            <a:r>
+              <a:rPr kumimoji="1" lang="ja-JP" altLang="en-US" sz="2400" dirty="0"/>
+              <a:t>キーフレームは</a:t>
+            </a:r>
+            <a:r>
+              <a:rPr kumimoji="1" lang="ja-JP" altLang="en-US" sz="2400" b="1" dirty="0">
+                <a:solidFill>
+                  <a:srgbClr val="FF0000"/>
+                </a:solidFill>
+              </a:rPr>
+              <a:t>コピー＆ペースト</a:t>
+            </a:r>
+            <a:r>
+              <a:rPr kumimoji="1" lang="ja-JP" altLang="en-US" sz="2400" dirty="0"/>
+              <a:t>できます。</a:t>
+            </a:r>
+            <a:endParaRPr kumimoji="1" lang="en-US" altLang="ja-JP" sz="2400" dirty="0"/>
+          </a:p>
+          <a:p>
+            <a:r>
+              <a:rPr lang="ja-JP" altLang="en-US" sz="2400" dirty="0"/>
+              <a:t>その時のポーズをもう一度再現したい場合に便利です。</a:t>
+            </a:r>
+            <a:endParaRPr kumimoji="1" lang="en-US" altLang="ja-JP" sz="2400" dirty="0"/>
+          </a:p>
+        </p:txBody>
+      </p:sp>
+      <p:pic>
+        <p:nvPicPr>
+          <p:cNvPr id="8" name="図 7">
+            <a:extLst>
+              <a:ext uri="{FF2B5EF4-FFF2-40B4-BE49-F238E27FC236}">
+                <a16:creationId xmlns:a16="http://schemas.microsoft.com/office/drawing/2014/main" id="{11817E58-44D7-4C9A-949D-32B69C9DF721}"/>
+              </a:ext>
+            </a:extLst>
+          </p:cNvPr>
+          <p:cNvPicPr>
+            <a:picLocks noChangeAspect="1"/>
+          </p:cNvPicPr>
+          <p:nvPr/>
+        </p:nvPicPr>
+        <p:blipFill>
+          <a:blip r:embed="rId2"/>
+          <a:stretch>
+            <a:fillRect/>
+          </a:stretch>
+        </p:blipFill>
+        <p:spPr>
+          <a:xfrm>
+            <a:off x="567541" y="2187126"/>
+            <a:ext cx="6150371" cy="4178920"/>
+          </a:xfrm>
+          <a:prstGeom prst="rect">
+            <a:avLst/>
+          </a:prstGeom>
+        </p:spPr>
+      </p:pic>
+    </p:spTree>
+    <p:extLst>
+      <p:ext uri="{BB962C8B-B14F-4D97-AF65-F5344CB8AC3E}">
+        <p14:creationId xmlns:p14="http://schemas.microsoft.com/office/powerpoint/2010/main" val="1499364936"/>
+      </p:ext>
+    </p:extLst>
+  </p:cSld>
+  <p:clrMapOvr>
+    <a:masterClrMapping/>
+  </p:clrMapOvr>
+</p:sld>
+</file>
+
+<file path=ppt/slides/slide27.xml><?xml version="1.0" encoding="utf-8"?>
+<p:sld xmlns:a="http://schemas.openxmlformats.org/drawingml/2006/main" xmlns:r="http://schemas.openxmlformats.org/officeDocument/2006/relationships" xmlns:p="http://schemas.openxmlformats.org/presentationml/2006/main">
+  <p:cSld>
+    <p:spTree>
+      <p:nvGrpSpPr>
+        <p:cNvPr id="1" name=""/>
+        <p:cNvGrpSpPr/>
+        <p:nvPr/>
+      </p:nvGrpSpPr>
+      <p:grpSpPr>
+        <a:xfrm>
+          <a:off x="0" y="0"/>
+          <a:ext cx="0" cy="0"/>
+          <a:chOff x="0" y="0"/>
+          <a:chExt cx="0" cy="0"/>
+        </a:xfrm>
+      </p:grpSpPr>
+      <p:sp>
+        <p:nvSpPr>
+          <p:cNvPr id="4" name="テキスト ボックス 3">
+            <a:extLst>
+              <a:ext uri="{FF2B5EF4-FFF2-40B4-BE49-F238E27FC236}">
+                <a16:creationId xmlns:a16="http://schemas.microsoft.com/office/drawing/2014/main" id="{5A13BF46-B8C5-48AA-8308-C9ECFF431A18}"/>
+              </a:ext>
+            </a:extLst>
+          </p:cNvPr>
+          <p:cNvSpPr txBox="1"/>
+          <p:nvPr/>
+        </p:nvSpPr>
+        <p:spPr>
+          <a:xfrm>
+            <a:off x="567542" y="491954"/>
+            <a:ext cx="3057247" cy="584775"/>
+          </a:xfrm>
+          <a:prstGeom prst="rect">
+            <a:avLst/>
+          </a:prstGeom>
+          <a:noFill/>
+        </p:spPr>
+        <p:txBody>
+          <a:bodyPr wrap="none" rtlCol="0">
+            <a:spAutoFit/>
+          </a:bodyPr>
+          <a:lstStyle/>
+          <a:p>
+            <a:r>
+              <a:rPr kumimoji="1" lang="ja-JP" altLang="en-US" sz="3200" b="1" u="sng" dirty="0"/>
+              <a:t>アニメーション</a:t>
+            </a:r>
+            <a:endParaRPr kumimoji="1" lang="en-US" altLang="ja-JP" sz="3200" b="1" u="sng" dirty="0"/>
+          </a:p>
+        </p:txBody>
+      </p:sp>
+      <p:sp>
+        <p:nvSpPr>
+          <p:cNvPr id="6" name="テキスト ボックス 5">
+            <a:extLst>
+              <a:ext uri="{FF2B5EF4-FFF2-40B4-BE49-F238E27FC236}">
+                <a16:creationId xmlns:a16="http://schemas.microsoft.com/office/drawing/2014/main" id="{55830AD6-028B-4C4E-80BF-B70DFC1C3A46}"/>
+              </a:ext>
+            </a:extLst>
+          </p:cNvPr>
+          <p:cNvSpPr txBox="1"/>
+          <p:nvPr/>
+        </p:nvSpPr>
+        <p:spPr>
+          <a:xfrm>
+            <a:off x="567542" y="1216429"/>
+            <a:ext cx="7263527" cy="461665"/>
+          </a:xfrm>
+          <a:prstGeom prst="rect">
+            <a:avLst/>
+          </a:prstGeom>
+          <a:noFill/>
+        </p:spPr>
+        <p:txBody>
+          <a:bodyPr wrap="none" rtlCol="0">
+            <a:spAutoFit/>
+          </a:bodyPr>
+          <a:lstStyle/>
+          <a:p>
+            <a:r>
+              <a:rPr kumimoji="1" lang="ja-JP" altLang="en-US" sz="2400" dirty="0"/>
+              <a:t>アニメーションの長さは右下の枠で設定できます。</a:t>
+            </a:r>
+            <a:endParaRPr kumimoji="1" lang="en-US" altLang="ja-JP" sz="2400" dirty="0"/>
+          </a:p>
+        </p:txBody>
+      </p:sp>
+      <p:pic>
+        <p:nvPicPr>
+          <p:cNvPr id="3" name="図 2">
+            <a:extLst>
+              <a:ext uri="{FF2B5EF4-FFF2-40B4-BE49-F238E27FC236}">
+                <a16:creationId xmlns:a16="http://schemas.microsoft.com/office/drawing/2014/main" id="{E2B516A9-84C6-438C-9591-2C7DBEBD28E1}"/>
+              </a:ext>
+            </a:extLst>
+          </p:cNvPr>
+          <p:cNvPicPr>
+            <a:picLocks noChangeAspect="1"/>
+          </p:cNvPicPr>
+          <p:nvPr/>
+        </p:nvPicPr>
+        <p:blipFill>
+          <a:blip r:embed="rId2"/>
+          <a:stretch>
+            <a:fillRect/>
+          </a:stretch>
+        </p:blipFill>
+        <p:spPr>
+          <a:xfrm>
+            <a:off x="567542" y="1817794"/>
+            <a:ext cx="8233740" cy="2063924"/>
+          </a:xfrm>
+          <a:prstGeom prst="rect">
+            <a:avLst/>
+          </a:prstGeom>
+        </p:spPr>
+      </p:pic>
+    </p:spTree>
+    <p:extLst>
+      <p:ext uri="{BB962C8B-B14F-4D97-AF65-F5344CB8AC3E}">
+        <p14:creationId xmlns:p14="http://schemas.microsoft.com/office/powerpoint/2010/main" val="1914473710"/>
+      </p:ext>
+    </p:extLst>
+  </p:cSld>
+  <p:clrMapOvr>
+    <a:masterClrMapping/>
+  </p:clrMapOvr>
+</p:sld>
+</file>
+
+<file path=ppt/slides/slide28.xml><?xml version="1.0" encoding="utf-8"?>
+<p:sld xmlns:a="http://schemas.openxmlformats.org/drawingml/2006/main" xmlns:r="http://schemas.openxmlformats.org/officeDocument/2006/relationships" xmlns:p="http://schemas.openxmlformats.org/presentationml/2006/main">
+  <p:cSld>
+    <p:spTree>
+      <p:nvGrpSpPr>
+        <p:cNvPr id="1" name=""/>
+        <p:cNvGrpSpPr/>
+        <p:nvPr/>
+      </p:nvGrpSpPr>
+      <p:grpSpPr>
+        <a:xfrm>
+          <a:off x="0" y="0"/>
+          <a:ext cx="0" cy="0"/>
+          <a:chOff x="0" y="0"/>
+          <a:chExt cx="0" cy="0"/>
+        </a:xfrm>
+      </p:grpSpPr>
+      <p:sp>
+        <p:nvSpPr>
+          <p:cNvPr id="4" name="テキスト ボックス 3">
+            <a:extLst>
+              <a:ext uri="{FF2B5EF4-FFF2-40B4-BE49-F238E27FC236}">
+                <a16:creationId xmlns:a16="http://schemas.microsoft.com/office/drawing/2014/main" id="{5A13BF46-B8C5-48AA-8308-C9ECFF431A18}"/>
+              </a:ext>
+            </a:extLst>
+          </p:cNvPr>
+          <p:cNvSpPr txBox="1"/>
+          <p:nvPr/>
+        </p:nvSpPr>
+        <p:spPr>
+          <a:xfrm>
+            <a:off x="567542" y="491954"/>
+            <a:ext cx="3057247" cy="584775"/>
+          </a:xfrm>
+          <a:prstGeom prst="rect">
+            <a:avLst/>
+          </a:prstGeom>
+          <a:noFill/>
+        </p:spPr>
+        <p:txBody>
+          <a:bodyPr wrap="none" rtlCol="0">
+            <a:spAutoFit/>
+          </a:bodyPr>
+          <a:lstStyle/>
+          <a:p>
+            <a:r>
+              <a:rPr kumimoji="1" lang="ja-JP" altLang="en-US" sz="3200" b="1" u="sng" dirty="0"/>
+              <a:t>アニメーション</a:t>
+            </a:r>
+            <a:endParaRPr kumimoji="1" lang="en-US" altLang="ja-JP" sz="3200" b="1" u="sng" dirty="0"/>
+          </a:p>
+        </p:txBody>
+      </p:sp>
+      <p:sp>
+        <p:nvSpPr>
+          <p:cNvPr id="6" name="テキスト ボックス 5">
+            <a:extLst>
+              <a:ext uri="{FF2B5EF4-FFF2-40B4-BE49-F238E27FC236}">
+                <a16:creationId xmlns:a16="http://schemas.microsoft.com/office/drawing/2014/main" id="{55830AD6-028B-4C4E-80BF-B70DFC1C3A46}"/>
+              </a:ext>
+            </a:extLst>
+          </p:cNvPr>
+          <p:cNvSpPr txBox="1"/>
+          <p:nvPr/>
+        </p:nvSpPr>
+        <p:spPr>
+          <a:xfrm>
+            <a:off x="567542" y="1216429"/>
+            <a:ext cx="9725739" cy="830997"/>
+          </a:xfrm>
+          <a:prstGeom prst="rect">
+            <a:avLst/>
+          </a:prstGeom>
+          <a:noFill/>
+        </p:spPr>
+        <p:txBody>
+          <a:bodyPr wrap="none" rtlCol="0">
+            <a:spAutoFit/>
+          </a:bodyPr>
+          <a:lstStyle/>
+          <a:p>
+            <a:r>
+              <a:rPr kumimoji="1" lang="ja-JP" altLang="en-US" sz="2400" dirty="0"/>
+              <a:t>アニメーションが完成したら名前を付けて保存します。</a:t>
+            </a:r>
+            <a:endParaRPr kumimoji="1" lang="en-US" altLang="ja-JP" sz="2400" dirty="0"/>
+          </a:p>
+          <a:p>
+            <a:r>
+              <a:rPr lang="ja-JP" altLang="en-US" sz="2400" dirty="0"/>
+              <a:t>タイムラインのモードを「</a:t>
+            </a:r>
+            <a:r>
+              <a:rPr lang="ja-JP" altLang="en-US" sz="2400" b="1" dirty="0">
+                <a:solidFill>
+                  <a:srgbClr val="FF0000"/>
+                </a:solidFill>
+              </a:rPr>
+              <a:t>アクションエディター</a:t>
+            </a:r>
+            <a:r>
+              <a:rPr lang="ja-JP" altLang="en-US" sz="2400" dirty="0"/>
+              <a:t>」に切り替えます。</a:t>
+            </a:r>
+            <a:endParaRPr kumimoji="1" lang="en-US" altLang="ja-JP" sz="2400" dirty="0"/>
+          </a:p>
+        </p:txBody>
+      </p:sp>
+      <p:pic>
+        <p:nvPicPr>
+          <p:cNvPr id="5" name="図 4">
+            <a:extLst>
+              <a:ext uri="{FF2B5EF4-FFF2-40B4-BE49-F238E27FC236}">
+                <a16:creationId xmlns:a16="http://schemas.microsoft.com/office/drawing/2014/main" id="{87F255B8-AD8E-41AC-A883-EEFF7FF402BC}"/>
+              </a:ext>
+            </a:extLst>
+          </p:cNvPr>
+          <p:cNvPicPr>
+            <a:picLocks noChangeAspect="1"/>
+          </p:cNvPicPr>
+          <p:nvPr/>
+        </p:nvPicPr>
+        <p:blipFill>
+          <a:blip r:embed="rId2"/>
+          <a:stretch>
+            <a:fillRect/>
+          </a:stretch>
+        </p:blipFill>
+        <p:spPr>
+          <a:xfrm>
+            <a:off x="567542" y="2187126"/>
+            <a:ext cx="4373636" cy="4178920"/>
+          </a:xfrm>
+          <a:prstGeom prst="rect">
+            <a:avLst/>
+          </a:prstGeom>
+        </p:spPr>
+      </p:pic>
+      <p:sp>
+        <p:nvSpPr>
+          <p:cNvPr id="7" name="矢印: 右 6">
+            <a:extLst>
+              <a:ext uri="{FF2B5EF4-FFF2-40B4-BE49-F238E27FC236}">
+                <a16:creationId xmlns:a16="http://schemas.microsoft.com/office/drawing/2014/main" id="{5918EA42-B4C8-4A7D-9389-B6CFFFEC163F}"/>
+              </a:ext>
+            </a:extLst>
+          </p:cNvPr>
+          <p:cNvSpPr/>
+          <p:nvPr/>
+        </p:nvSpPr>
+        <p:spPr>
+          <a:xfrm rot="13638340">
+            <a:off x="2435060" y="2613203"/>
+            <a:ext cx="502023" cy="349624"/>
+          </a:xfrm>
+          <a:prstGeom prst="rightArrow">
+            <a:avLst/>
+          </a:prstGeom>
+          <a:solidFill>
+            <a:srgbClr val="FF0000"/>
+          </a:solidFill>
+          <a:ln>
+            <a:solidFill>
+              <a:schemeClr val="tx1"/>
+            </a:solidFill>
+          </a:ln>
+        </p:spPr>
+        <p:style>
+          <a:lnRef idx="2">
+            <a:schemeClr val="accent1">
+              <a:shade val="50000"/>
+            </a:schemeClr>
+          </a:lnRef>
+          <a:fillRef idx="1">
+            <a:schemeClr val="accent1"/>
+          </a:fillRef>
+          <a:effectRef idx="0">
+            <a:schemeClr val="accent1"/>
+          </a:effectRef>
+          <a:fontRef idx="minor">
+            <a:schemeClr val="lt1"/>
+          </a:fontRef>
+        </p:style>
+        <p:txBody>
+          <a:bodyPr rtlCol="0" anchor="ctr"/>
+          <a:lstStyle/>
+          <a:p>
+            <a:pPr algn="ctr"/>
+            <a:endParaRPr kumimoji="1" lang="ja-JP" altLang="en-US"/>
+          </a:p>
+        </p:txBody>
+      </p:sp>
+    </p:spTree>
+    <p:extLst>
+      <p:ext uri="{BB962C8B-B14F-4D97-AF65-F5344CB8AC3E}">
+        <p14:creationId xmlns:p14="http://schemas.microsoft.com/office/powerpoint/2010/main" val="130078009"/>
+      </p:ext>
+    </p:extLst>
+  </p:cSld>
+  <p:clrMapOvr>
+    <a:masterClrMapping/>
+  </p:clrMapOvr>
+</p:sld>
+</file>
+
+<file path=ppt/slides/slide29.xml><?xml version="1.0" encoding="utf-8"?>
+<p:sld xmlns:a="http://schemas.openxmlformats.org/drawingml/2006/main" xmlns:r="http://schemas.openxmlformats.org/officeDocument/2006/relationships" xmlns:p="http://schemas.openxmlformats.org/presentationml/2006/main">
+  <p:cSld>
+    <p:spTree>
+      <p:nvGrpSpPr>
+        <p:cNvPr id="1" name=""/>
+        <p:cNvGrpSpPr/>
+        <p:nvPr/>
+      </p:nvGrpSpPr>
+      <p:grpSpPr>
+        <a:xfrm>
+          <a:off x="0" y="0"/>
+          <a:ext cx="0" cy="0"/>
+          <a:chOff x="0" y="0"/>
+          <a:chExt cx="0" cy="0"/>
+        </a:xfrm>
+      </p:grpSpPr>
+      <p:sp>
+        <p:nvSpPr>
+          <p:cNvPr id="4" name="テキスト ボックス 3">
+            <a:extLst>
+              <a:ext uri="{FF2B5EF4-FFF2-40B4-BE49-F238E27FC236}">
+                <a16:creationId xmlns:a16="http://schemas.microsoft.com/office/drawing/2014/main" id="{5A13BF46-B8C5-48AA-8308-C9ECFF431A18}"/>
+              </a:ext>
+            </a:extLst>
+          </p:cNvPr>
+          <p:cNvSpPr txBox="1"/>
+          <p:nvPr/>
+        </p:nvSpPr>
+        <p:spPr>
+          <a:xfrm>
+            <a:off x="567542" y="491954"/>
+            <a:ext cx="3057247" cy="584775"/>
+          </a:xfrm>
+          <a:prstGeom prst="rect">
+            <a:avLst/>
+          </a:prstGeom>
+          <a:noFill/>
+        </p:spPr>
+        <p:txBody>
+          <a:bodyPr wrap="none" rtlCol="0">
+            <a:spAutoFit/>
+          </a:bodyPr>
+          <a:lstStyle/>
+          <a:p>
+            <a:r>
+              <a:rPr kumimoji="1" lang="ja-JP" altLang="en-US" sz="3200" b="1" u="sng" dirty="0"/>
+              <a:t>アニメーション</a:t>
+            </a:r>
+            <a:endParaRPr kumimoji="1" lang="en-US" altLang="ja-JP" sz="3200" b="1" u="sng" dirty="0"/>
+          </a:p>
+        </p:txBody>
+      </p:sp>
+      <p:sp>
+        <p:nvSpPr>
+          <p:cNvPr id="6" name="テキスト ボックス 5">
+            <a:extLst>
+              <a:ext uri="{FF2B5EF4-FFF2-40B4-BE49-F238E27FC236}">
+                <a16:creationId xmlns:a16="http://schemas.microsoft.com/office/drawing/2014/main" id="{55830AD6-028B-4C4E-80BF-B70DFC1C3A46}"/>
+              </a:ext>
+            </a:extLst>
+          </p:cNvPr>
+          <p:cNvSpPr txBox="1"/>
+          <p:nvPr/>
+        </p:nvSpPr>
+        <p:spPr>
+          <a:xfrm>
+            <a:off x="567542" y="1216429"/>
+            <a:ext cx="6032421" cy="461665"/>
+          </a:xfrm>
+          <a:prstGeom prst="rect">
+            <a:avLst/>
+          </a:prstGeom>
+          <a:noFill/>
+        </p:spPr>
+        <p:txBody>
+          <a:bodyPr wrap="none" rtlCol="0">
+            <a:spAutoFit/>
+          </a:bodyPr>
+          <a:lstStyle/>
+          <a:p>
+            <a:r>
+              <a:rPr kumimoji="1" lang="ja-JP" altLang="en-US" sz="2400" dirty="0"/>
+              <a:t>中央に名前を入力できるので入力します。</a:t>
+            </a:r>
+            <a:endParaRPr kumimoji="1" lang="en-US" altLang="ja-JP" sz="2400" dirty="0"/>
+          </a:p>
+        </p:txBody>
+      </p:sp>
+      <p:pic>
+        <p:nvPicPr>
+          <p:cNvPr id="3" name="図 2">
+            <a:extLst>
+              <a:ext uri="{FF2B5EF4-FFF2-40B4-BE49-F238E27FC236}">
+                <a16:creationId xmlns:a16="http://schemas.microsoft.com/office/drawing/2014/main" id="{84F74DEA-5679-47AD-98E8-DB0B2413EE27}"/>
+              </a:ext>
+            </a:extLst>
+          </p:cNvPr>
+          <p:cNvPicPr>
+            <a:picLocks noChangeAspect="1"/>
+          </p:cNvPicPr>
+          <p:nvPr/>
+        </p:nvPicPr>
+        <p:blipFill>
+          <a:blip r:embed="rId2"/>
+          <a:stretch>
+            <a:fillRect/>
+          </a:stretch>
+        </p:blipFill>
+        <p:spPr>
+          <a:xfrm>
+            <a:off x="567542" y="1817794"/>
+            <a:ext cx="4255470" cy="4285757"/>
+          </a:xfrm>
+          <a:prstGeom prst="rect">
+            <a:avLst/>
+          </a:prstGeom>
+        </p:spPr>
+      </p:pic>
+      <p:sp>
+        <p:nvSpPr>
+          <p:cNvPr id="8" name="矢印: 右 7">
+            <a:extLst>
+              <a:ext uri="{FF2B5EF4-FFF2-40B4-BE49-F238E27FC236}">
+                <a16:creationId xmlns:a16="http://schemas.microsoft.com/office/drawing/2014/main" id="{4C6EE5C4-F233-4964-9EA9-A5415201E262}"/>
+              </a:ext>
+            </a:extLst>
+          </p:cNvPr>
+          <p:cNvSpPr/>
+          <p:nvPr/>
+        </p:nvSpPr>
+        <p:spPr>
+          <a:xfrm rot="13638340">
+            <a:off x="2829507" y="2191862"/>
+            <a:ext cx="502023" cy="349624"/>
+          </a:xfrm>
+          <a:prstGeom prst="rightArrow">
+            <a:avLst/>
+          </a:prstGeom>
+          <a:solidFill>
+            <a:srgbClr val="FF0000"/>
+          </a:solidFill>
+          <a:ln>
+            <a:solidFill>
+              <a:schemeClr val="tx1"/>
+            </a:solidFill>
+          </a:ln>
+        </p:spPr>
+        <p:style>
+          <a:lnRef idx="2">
+            <a:schemeClr val="accent1">
+              <a:shade val="50000"/>
+            </a:schemeClr>
+          </a:lnRef>
+          <a:fillRef idx="1">
+            <a:schemeClr val="accent1"/>
+          </a:fillRef>
+          <a:effectRef idx="0">
+            <a:schemeClr val="accent1"/>
+          </a:effectRef>
+          <a:fontRef idx="minor">
+            <a:schemeClr val="lt1"/>
+          </a:fontRef>
+        </p:style>
+        <p:txBody>
+          <a:bodyPr rtlCol="0" anchor="ctr"/>
+          <a:lstStyle/>
+          <a:p>
+            <a:pPr algn="ctr"/>
+            <a:endParaRPr kumimoji="1" lang="ja-JP" altLang="en-US"/>
+          </a:p>
+        </p:txBody>
+      </p:sp>
+      <p:sp>
+        <p:nvSpPr>
+          <p:cNvPr id="9" name="テキスト ボックス 8">
+            <a:extLst>
+              <a:ext uri="{FF2B5EF4-FFF2-40B4-BE49-F238E27FC236}">
+                <a16:creationId xmlns:a16="http://schemas.microsoft.com/office/drawing/2014/main" id="{1B3E9EE6-A9E9-43C3-BD94-178A28756B30}"/>
+              </a:ext>
+            </a:extLst>
+          </p:cNvPr>
+          <p:cNvSpPr txBox="1"/>
+          <p:nvPr/>
+        </p:nvSpPr>
+        <p:spPr>
+          <a:xfrm>
+            <a:off x="4888530" y="5641886"/>
+            <a:ext cx="6647974" cy="461665"/>
+          </a:xfrm>
+          <a:prstGeom prst="rect">
+            <a:avLst/>
+          </a:prstGeom>
+          <a:noFill/>
+        </p:spPr>
+        <p:txBody>
+          <a:bodyPr wrap="none" rtlCol="0">
+            <a:spAutoFit/>
+          </a:bodyPr>
+          <a:lstStyle/>
+          <a:p>
+            <a:r>
+              <a:rPr kumimoji="1" lang="ja-JP" altLang="en-US" sz="2400" dirty="0"/>
+              <a:t>あとはいつも通りファイルを保存しましょう。</a:t>
+            </a:r>
+            <a:endParaRPr kumimoji="1" lang="en-US" altLang="ja-JP" sz="2400" dirty="0"/>
+          </a:p>
+        </p:txBody>
+      </p:sp>
+    </p:spTree>
+    <p:extLst>
+      <p:ext uri="{BB962C8B-B14F-4D97-AF65-F5344CB8AC3E}">
+        <p14:creationId xmlns:p14="http://schemas.microsoft.com/office/powerpoint/2010/main" val="1700075913"/>
+      </p:ext>
+    </p:extLst>
+  </p:cSld>
+  <p:clrMapOvr>
+    <a:masterClrMapping/>
+  </p:clrMapOvr>
+</p:sld>
+</file>
+
+<file path=ppt/slides/slide3.xml><?xml version="1.0" encoding="utf-8"?>
+<p:sld xmlns:a="http://schemas.openxmlformats.org/drawingml/2006/main" xmlns:r="http://schemas.openxmlformats.org/officeDocument/2006/relationships" xmlns:p="http://schemas.openxmlformats.org/presentationml/2006/main">
+  <p:cSld>
+    <p:spTree>
+      <p:nvGrpSpPr>
+        <p:cNvPr id="1" name=""/>
+        <p:cNvGrpSpPr/>
+        <p:nvPr/>
+      </p:nvGrpSpPr>
+      <p:grpSpPr>
+        <a:xfrm>
+          <a:off x="0" y="0"/>
+          <a:ext cx="0" cy="0"/>
+          <a:chOff x="0" y="0"/>
+          <a:chExt cx="0" cy="0"/>
+        </a:xfrm>
+      </p:grpSpPr>
+      <p:sp>
+        <p:nvSpPr>
+          <p:cNvPr id="4" name="テキスト ボックス 3">
+            <a:extLst>
+              <a:ext uri="{FF2B5EF4-FFF2-40B4-BE49-F238E27FC236}">
+                <a16:creationId xmlns:a16="http://schemas.microsoft.com/office/drawing/2014/main" id="{5A13BF46-B8C5-48AA-8308-C9ECFF431A18}"/>
+              </a:ext>
+            </a:extLst>
+          </p:cNvPr>
+          <p:cNvSpPr txBox="1"/>
+          <p:nvPr/>
+        </p:nvSpPr>
+        <p:spPr>
+          <a:xfrm>
+            <a:off x="567542" y="491954"/>
+            <a:ext cx="3057247" cy="584775"/>
+          </a:xfrm>
+          <a:prstGeom prst="rect">
+            <a:avLst/>
+          </a:prstGeom>
+          <a:noFill/>
+        </p:spPr>
+        <p:txBody>
+          <a:bodyPr wrap="none" rtlCol="0">
+            <a:spAutoFit/>
+          </a:bodyPr>
+          <a:lstStyle/>
+          <a:p>
+            <a:r>
+              <a:rPr kumimoji="1" lang="ja-JP" altLang="en-US" sz="3200" b="1" u="sng" dirty="0"/>
+              <a:t>アニメーション</a:t>
+            </a:r>
+            <a:endParaRPr kumimoji="1" lang="en-US" altLang="ja-JP" sz="3200" b="1" u="sng" dirty="0"/>
+          </a:p>
+        </p:txBody>
+      </p:sp>
+      <p:sp>
+        <p:nvSpPr>
+          <p:cNvPr id="6" name="テキスト ボックス 5">
+            <a:extLst>
+              <a:ext uri="{FF2B5EF4-FFF2-40B4-BE49-F238E27FC236}">
+                <a16:creationId xmlns:a16="http://schemas.microsoft.com/office/drawing/2014/main" id="{55830AD6-028B-4C4E-80BF-B70DFC1C3A46}"/>
+              </a:ext>
+            </a:extLst>
+          </p:cNvPr>
+          <p:cNvSpPr txBox="1"/>
+          <p:nvPr/>
+        </p:nvSpPr>
+        <p:spPr>
+          <a:xfrm>
+            <a:off x="567542" y="1216429"/>
+            <a:ext cx="8802410" cy="830997"/>
+          </a:xfrm>
+          <a:prstGeom prst="rect">
+            <a:avLst/>
+          </a:prstGeom>
+          <a:noFill/>
+        </p:spPr>
+        <p:txBody>
+          <a:bodyPr wrap="none" rtlCol="0">
+            <a:spAutoFit/>
+          </a:bodyPr>
+          <a:lstStyle/>
+          <a:p>
+            <a:r>
+              <a:rPr kumimoji="1" lang="ja-JP" altLang="en-US" sz="2400" dirty="0"/>
+              <a:t>配布した</a:t>
+            </a:r>
+            <a:r>
+              <a:rPr kumimoji="1" lang="en-US" altLang="ja-JP" sz="2400" b="1" dirty="0" err="1">
+                <a:solidFill>
+                  <a:srgbClr val="FF0000"/>
+                </a:solidFill>
+              </a:rPr>
+              <a:t>Human.brend</a:t>
+            </a:r>
+            <a:r>
+              <a:rPr kumimoji="1" lang="ja-JP" altLang="en-US" sz="2400" dirty="0"/>
+              <a:t>を開き、</a:t>
+            </a:r>
+            <a:endParaRPr kumimoji="1" lang="en-US" altLang="ja-JP" sz="2400" dirty="0"/>
+          </a:p>
+          <a:p>
+            <a:r>
+              <a:rPr kumimoji="1" lang="ja-JP" altLang="en-US" sz="2400" dirty="0"/>
+              <a:t>オブジェクトモードの状態で</a:t>
+            </a:r>
+            <a:r>
+              <a:rPr kumimoji="1" lang="ja-JP" altLang="en-US" sz="2400" b="1" dirty="0">
+                <a:solidFill>
+                  <a:srgbClr val="FF0000"/>
+                </a:solidFill>
+              </a:rPr>
+              <a:t>アーマチュア</a:t>
+            </a:r>
+            <a:r>
+              <a:rPr kumimoji="1" lang="ja-JP" altLang="en-US" sz="2400" dirty="0"/>
+              <a:t>を追加しましょう。</a:t>
+            </a:r>
+            <a:endParaRPr kumimoji="1" lang="en-US" altLang="ja-JP" sz="2400" dirty="0"/>
+          </a:p>
+        </p:txBody>
+      </p:sp>
+      <p:pic>
+        <p:nvPicPr>
+          <p:cNvPr id="3" name="図 2">
+            <a:extLst>
+              <a:ext uri="{FF2B5EF4-FFF2-40B4-BE49-F238E27FC236}">
+                <a16:creationId xmlns:a16="http://schemas.microsoft.com/office/drawing/2014/main" id="{FEEA1314-F7C5-47CF-8F76-3BE735818A16}"/>
+              </a:ext>
+            </a:extLst>
+          </p:cNvPr>
+          <p:cNvPicPr>
+            <a:picLocks noChangeAspect="1"/>
+          </p:cNvPicPr>
+          <p:nvPr/>
+        </p:nvPicPr>
+        <p:blipFill>
+          <a:blip r:embed="rId2"/>
+          <a:stretch>
+            <a:fillRect/>
+          </a:stretch>
+        </p:blipFill>
+        <p:spPr>
+          <a:xfrm>
+            <a:off x="581126" y="2187126"/>
+            <a:ext cx="6087325" cy="4448796"/>
+          </a:xfrm>
+          <a:prstGeom prst="rect">
+            <a:avLst/>
+          </a:prstGeom>
+        </p:spPr>
+      </p:pic>
+      <p:pic>
+        <p:nvPicPr>
+          <p:cNvPr id="8" name="図 7">
+            <a:extLst>
+              <a:ext uri="{FF2B5EF4-FFF2-40B4-BE49-F238E27FC236}">
+                <a16:creationId xmlns:a16="http://schemas.microsoft.com/office/drawing/2014/main" id="{10D7AD12-1023-444D-B58A-B5ADF0FEDCA4}"/>
+              </a:ext>
+            </a:extLst>
+          </p:cNvPr>
+          <p:cNvPicPr>
+            <a:picLocks noChangeAspect="1"/>
+          </p:cNvPicPr>
+          <p:nvPr/>
+        </p:nvPicPr>
+        <p:blipFill>
+          <a:blip r:embed="rId3"/>
+          <a:stretch>
+            <a:fillRect/>
+          </a:stretch>
+        </p:blipFill>
+        <p:spPr>
+          <a:xfrm>
+            <a:off x="6963949" y="2187126"/>
+            <a:ext cx="3319560" cy="4448796"/>
+          </a:xfrm>
+          <a:prstGeom prst="rect">
+            <a:avLst/>
+          </a:prstGeom>
+        </p:spPr>
+      </p:pic>
+    </p:spTree>
+    <p:extLst>
+      <p:ext uri="{BB962C8B-B14F-4D97-AF65-F5344CB8AC3E}">
+        <p14:creationId xmlns:p14="http://schemas.microsoft.com/office/powerpoint/2010/main" val="1336439466"/>
+      </p:ext>
+    </p:extLst>
+  </p:cSld>
+  <p:clrMapOvr>
+    <a:masterClrMapping/>
+  </p:clrMapOvr>
+</p:sld>
+</file>
+
+<file path=ppt/slides/slide30.xml><?xml version="1.0" encoding="utf-8"?>
+<p:sld xmlns:a="http://schemas.openxmlformats.org/drawingml/2006/main" xmlns:r="http://schemas.openxmlformats.org/officeDocument/2006/relationships" xmlns:p="http://schemas.openxmlformats.org/presentationml/2006/main">
+  <p:cSld>
+    <p:spTree>
+      <p:nvGrpSpPr>
+        <p:cNvPr id="1" name=""/>
+        <p:cNvGrpSpPr/>
+        <p:nvPr/>
+      </p:nvGrpSpPr>
+      <p:grpSpPr>
+        <a:xfrm>
+          <a:off x="0" y="0"/>
+          <a:ext cx="0" cy="0"/>
+          <a:chOff x="0" y="0"/>
+          <a:chExt cx="0" cy="0"/>
+        </a:xfrm>
+      </p:grpSpPr>
+      <p:sp>
+        <p:nvSpPr>
+          <p:cNvPr id="4" name="テキスト ボックス 3">
+            <a:extLst>
+              <a:ext uri="{FF2B5EF4-FFF2-40B4-BE49-F238E27FC236}">
+                <a16:creationId xmlns:a16="http://schemas.microsoft.com/office/drawing/2014/main" id="{5A13BF46-B8C5-48AA-8308-C9ECFF431A18}"/>
+              </a:ext>
+            </a:extLst>
+          </p:cNvPr>
+          <p:cNvSpPr txBox="1"/>
+          <p:nvPr/>
+        </p:nvSpPr>
+        <p:spPr>
+          <a:xfrm>
+            <a:off x="567542" y="491954"/>
+            <a:ext cx="3057247" cy="584775"/>
+          </a:xfrm>
+          <a:prstGeom prst="rect">
+            <a:avLst/>
+          </a:prstGeom>
+          <a:noFill/>
+        </p:spPr>
+        <p:txBody>
+          <a:bodyPr wrap="none" rtlCol="0">
+            <a:spAutoFit/>
+          </a:bodyPr>
+          <a:lstStyle/>
+          <a:p>
+            <a:r>
+              <a:rPr kumimoji="1" lang="ja-JP" altLang="en-US" sz="3200" b="1" u="sng" dirty="0"/>
+              <a:t>アニメーション</a:t>
+            </a:r>
+            <a:endParaRPr kumimoji="1" lang="en-US" altLang="ja-JP" sz="3200" b="1" u="sng" dirty="0"/>
+          </a:p>
+        </p:txBody>
+      </p:sp>
+      <p:sp>
+        <p:nvSpPr>
+          <p:cNvPr id="6" name="テキスト ボックス 5">
+            <a:extLst>
+              <a:ext uri="{FF2B5EF4-FFF2-40B4-BE49-F238E27FC236}">
+                <a16:creationId xmlns:a16="http://schemas.microsoft.com/office/drawing/2014/main" id="{55830AD6-028B-4C4E-80BF-B70DFC1C3A46}"/>
+              </a:ext>
+            </a:extLst>
+          </p:cNvPr>
+          <p:cNvSpPr txBox="1"/>
+          <p:nvPr/>
+        </p:nvSpPr>
+        <p:spPr>
+          <a:xfrm>
+            <a:off x="567542" y="1216429"/>
+            <a:ext cx="10033516" cy="830997"/>
+          </a:xfrm>
+          <a:prstGeom prst="rect">
+            <a:avLst/>
+          </a:prstGeom>
+          <a:noFill/>
+        </p:spPr>
+        <p:txBody>
+          <a:bodyPr wrap="none" rtlCol="0">
+            <a:spAutoFit/>
+          </a:bodyPr>
+          <a:lstStyle/>
+          <a:p>
+            <a:r>
+              <a:rPr kumimoji="1" lang="ja-JP" altLang="en-US" sz="2400" dirty="0"/>
+              <a:t>追加でアニメーションを作る場合は、新規作成ボタンを押します。</a:t>
+            </a:r>
+            <a:endParaRPr kumimoji="1" lang="en-US" altLang="ja-JP" sz="2400" dirty="0"/>
+          </a:p>
+          <a:p>
+            <a:r>
+              <a:rPr lang="ja-JP" altLang="en-US" sz="2400" dirty="0"/>
+              <a:t>これで１つのモデルに複数のアニメーションを入れることもできます。</a:t>
+            </a:r>
+            <a:endParaRPr kumimoji="1" lang="en-US" altLang="ja-JP" sz="2400" dirty="0"/>
+          </a:p>
+        </p:txBody>
+      </p:sp>
+      <p:pic>
+        <p:nvPicPr>
+          <p:cNvPr id="3" name="図 2">
+            <a:extLst>
+              <a:ext uri="{FF2B5EF4-FFF2-40B4-BE49-F238E27FC236}">
+                <a16:creationId xmlns:a16="http://schemas.microsoft.com/office/drawing/2014/main" id="{84F74DEA-5679-47AD-98E8-DB0B2413EE27}"/>
+              </a:ext>
+            </a:extLst>
+          </p:cNvPr>
+          <p:cNvPicPr>
+            <a:picLocks noChangeAspect="1"/>
+          </p:cNvPicPr>
+          <p:nvPr/>
+        </p:nvPicPr>
+        <p:blipFill>
+          <a:blip r:embed="rId2"/>
+          <a:stretch>
+            <a:fillRect/>
+          </a:stretch>
+        </p:blipFill>
+        <p:spPr>
+          <a:xfrm>
+            <a:off x="567542" y="2187126"/>
+            <a:ext cx="4255470" cy="4285757"/>
+          </a:xfrm>
+          <a:prstGeom prst="rect">
+            <a:avLst/>
+          </a:prstGeom>
+        </p:spPr>
+      </p:pic>
+      <p:sp>
+        <p:nvSpPr>
+          <p:cNvPr id="8" name="矢印: 右 7">
+            <a:extLst>
+              <a:ext uri="{FF2B5EF4-FFF2-40B4-BE49-F238E27FC236}">
+                <a16:creationId xmlns:a16="http://schemas.microsoft.com/office/drawing/2014/main" id="{4C6EE5C4-F233-4964-9EA9-A5415201E262}"/>
+              </a:ext>
+            </a:extLst>
+          </p:cNvPr>
+          <p:cNvSpPr/>
+          <p:nvPr/>
+        </p:nvSpPr>
+        <p:spPr>
+          <a:xfrm rot="13638340">
+            <a:off x="4129390" y="2516370"/>
+            <a:ext cx="502023" cy="349624"/>
+          </a:xfrm>
+          <a:prstGeom prst="rightArrow">
+            <a:avLst/>
+          </a:prstGeom>
+          <a:solidFill>
+            <a:srgbClr val="FF0000"/>
+          </a:solidFill>
+          <a:ln>
+            <a:solidFill>
+              <a:schemeClr val="tx1"/>
+            </a:solidFill>
+          </a:ln>
+        </p:spPr>
+        <p:style>
+          <a:lnRef idx="2">
+            <a:schemeClr val="accent1">
+              <a:shade val="50000"/>
+            </a:schemeClr>
+          </a:lnRef>
+          <a:fillRef idx="1">
+            <a:schemeClr val="accent1"/>
+          </a:fillRef>
+          <a:effectRef idx="0">
+            <a:schemeClr val="accent1"/>
+          </a:effectRef>
+          <a:fontRef idx="minor">
+            <a:schemeClr val="lt1"/>
+          </a:fontRef>
+        </p:style>
+        <p:txBody>
+          <a:bodyPr rtlCol="0" anchor="ctr"/>
+          <a:lstStyle/>
+          <a:p>
+            <a:pPr algn="ctr"/>
+            <a:endParaRPr kumimoji="1" lang="ja-JP" altLang="en-US"/>
+          </a:p>
+        </p:txBody>
+      </p:sp>
+    </p:spTree>
+    <p:extLst>
+      <p:ext uri="{BB962C8B-B14F-4D97-AF65-F5344CB8AC3E}">
+        <p14:creationId xmlns:p14="http://schemas.microsoft.com/office/powerpoint/2010/main" val="2122864637"/>
+      </p:ext>
+    </p:extLst>
+  </p:cSld>
+  <p:clrMapOvr>
+    <a:masterClrMapping/>
+  </p:clrMapOvr>
+</p:sld>
+</file>
+
+<file path=ppt/slides/slide4.xml><?xml version="1.0" encoding="utf-8"?>
+<p:sld xmlns:a="http://schemas.openxmlformats.org/drawingml/2006/main" xmlns:r="http://schemas.openxmlformats.org/officeDocument/2006/relationships" xmlns:p="http://schemas.openxmlformats.org/presentationml/2006/main">
+  <p:cSld>
+    <p:spTree>
+      <p:nvGrpSpPr>
+        <p:cNvPr id="1" name=""/>
+        <p:cNvGrpSpPr/>
+        <p:nvPr/>
+      </p:nvGrpSpPr>
+      <p:grpSpPr>
+        <a:xfrm>
+          <a:off x="0" y="0"/>
+          <a:ext cx="0" cy="0"/>
+          <a:chOff x="0" y="0"/>
+          <a:chExt cx="0" cy="0"/>
+        </a:xfrm>
+      </p:grpSpPr>
+      <p:sp>
+        <p:nvSpPr>
+          <p:cNvPr id="4" name="テキスト ボックス 3">
+            <a:extLst>
+              <a:ext uri="{FF2B5EF4-FFF2-40B4-BE49-F238E27FC236}">
+                <a16:creationId xmlns:a16="http://schemas.microsoft.com/office/drawing/2014/main" id="{5A13BF46-B8C5-48AA-8308-C9ECFF431A18}"/>
+              </a:ext>
+            </a:extLst>
+          </p:cNvPr>
+          <p:cNvSpPr txBox="1"/>
+          <p:nvPr/>
+        </p:nvSpPr>
+        <p:spPr>
+          <a:xfrm>
+            <a:off x="567542" y="491954"/>
+            <a:ext cx="3057247" cy="584775"/>
+          </a:xfrm>
+          <a:prstGeom prst="rect">
+            <a:avLst/>
+          </a:prstGeom>
+          <a:noFill/>
+        </p:spPr>
+        <p:txBody>
+          <a:bodyPr wrap="none" rtlCol="0">
+            <a:spAutoFit/>
+          </a:bodyPr>
+          <a:lstStyle/>
+          <a:p>
+            <a:r>
+              <a:rPr kumimoji="1" lang="ja-JP" altLang="en-US" sz="3200" b="1" u="sng" dirty="0"/>
+              <a:t>アニメーション</a:t>
+            </a:r>
+            <a:endParaRPr kumimoji="1" lang="en-US" altLang="ja-JP" sz="3200" b="1" u="sng" dirty="0"/>
+          </a:p>
+        </p:txBody>
+      </p:sp>
+      <p:sp>
+        <p:nvSpPr>
+          <p:cNvPr id="6" name="テキスト ボックス 5">
+            <a:extLst>
+              <a:ext uri="{FF2B5EF4-FFF2-40B4-BE49-F238E27FC236}">
+                <a16:creationId xmlns:a16="http://schemas.microsoft.com/office/drawing/2014/main" id="{55830AD6-028B-4C4E-80BF-B70DFC1C3A46}"/>
+              </a:ext>
+            </a:extLst>
+          </p:cNvPr>
+          <p:cNvSpPr txBox="1"/>
+          <p:nvPr/>
+        </p:nvSpPr>
+        <p:spPr>
+          <a:xfrm>
+            <a:off x="567542" y="1216429"/>
+            <a:ext cx="10182596" cy="830997"/>
+          </a:xfrm>
+          <a:prstGeom prst="rect">
+            <a:avLst/>
+          </a:prstGeom>
+          <a:noFill/>
+        </p:spPr>
+        <p:txBody>
+          <a:bodyPr wrap="none" rtlCol="0">
+            <a:spAutoFit/>
+          </a:bodyPr>
+          <a:lstStyle/>
+          <a:p>
+            <a:r>
+              <a:rPr kumimoji="1" lang="ja-JP" altLang="en-US" sz="2400" dirty="0"/>
+              <a:t>ボーンは常に見えるようにします。</a:t>
+            </a:r>
+            <a:endParaRPr kumimoji="1" lang="en-US" altLang="ja-JP" sz="2400" dirty="0"/>
+          </a:p>
+          <a:p>
+            <a:r>
+              <a:rPr lang="ja-JP" altLang="en-US" sz="2400" dirty="0"/>
+              <a:t>右側のメニューから「</a:t>
+            </a:r>
+            <a:r>
+              <a:rPr lang="ja-JP" altLang="en-US" sz="2400" b="1" dirty="0">
+                <a:solidFill>
+                  <a:srgbClr val="FF0000"/>
+                </a:solidFill>
+              </a:rPr>
+              <a:t>ビューポート表示　＞　最前面</a:t>
+            </a:r>
+            <a:r>
+              <a:rPr lang="ja-JP" altLang="en-US" sz="2400" dirty="0"/>
+              <a:t>」を</a:t>
+            </a:r>
+            <a:r>
+              <a:rPr lang="en-US" altLang="ja-JP" sz="2400" dirty="0"/>
+              <a:t>ON</a:t>
+            </a:r>
+            <a:r>
+              <a:rPr lang="ja-JP" altLang="en-US" sz="2400" dirty="0"/>
+              <a:t>にします。</a:t>
+            </a:r>
+            <a:endParaRPr kumimoji="1" lang="en-US" altLang="ja-JP" sz="2400" dirty="0"/>
+          </a:p>
+        </p:txBody>
+      </p:sp>
+      <p:pic>
+        <p:nvPicPr>
+          <p:cNvPr id="5" name="図 4">
+            <a:extLst>
+              <a:ext uri="{FF2B5EF4-FFF2-40B4-BE49-F238E27FC236}">
+                <a16:creationId xmlns:a16="http://schemas.microsoft.com/office/drawing/2014/main" id="{30EE3FDC-0D96-49A1-A19A-1D6C30576A46}"/>
+              </a:ext>
+            </a:extLst>
+          </p:cNvPr>
+          <p:cNvPicPr>
+            <a:picLocks noChangeAspect="1"/>
+          </p:cNvPicPr>
+          <p:nvPr/>
+        </p:nvPicPr>
+        <p:blipFill>
+          <a:blip r:embed="rId2"/>
+          <a:stretch>
+            <a:fillRect/>
+          </a:stretch>
+        </p:blipFill>
+        <p:spPr>
+          <a:xfrm>
+            <a:off x="567542" y="2187126"/>
+            <a:ext cx="3941705" cy="4188062"/>
+          </a:xfrm>
+          <a:prstGeom prst="rect">
+            <a:avLst/>
+          </a:prstGeom>
+        </p:spPr>
+      </p:pic>
+      <p:sp>
+        <p:nvSpPr>
+          <p:cNvPr id="7" name="矢印: 右 6">
+            <a:extLst>
+              <a:ext uri="{FF2B5EF4-FFF2-40B4-BE49-F238E27FC236}">
+                <a16:creationId xmlns:a16="http://schemas.microsoft.com/office/drawing/2014/main" id="{33274B73-B65B-4554-834B-402ABB92FFC8}"/>
+              </a:ext>
+            </a:extLst>
+          </p:cNvPr>
+          <p:cNvSpPr/>
+          <p:nvPr/>
+        </p:nvSpPr>
+        <p:spPr>
+          <a:xfrm rot="13638340">
+            <a:off x="2510118" y="5638799"/>
+            <a:ext cx="502023" cy="349624"/>
+          </a:xfrm>
+          <a:prstGeom prst="rightArrow">
+            <a:avLst/>
+          </a:prstGeom>
+          <a:solidFill>
+            <a:srgbClr val="FF0000"/>
+          </a:solidFill>
+          <a:ln>
+            <a:solidFill>
+              <a:schemeClr val="tx1"/>
+            </a:solidFill>
+          </a:ln>
+        </p:spPr>
+        <p:style>
+          <a:lnRef idx="2">
+            <a:schemeClr val="accent1">
+              <a:shade val="50000"/>
+            </a:schemeClr>
+          </a:lnRef>
+          <a:fillRef idx="1">
+            <a:schemeClr val="accent1"/>
+          </a:fillRef>
+          <a:effectRef idx="0">
+            <a:schemeClr val="accent1"/>
+          </a:effectRef>
+          <a:fontRef idx="minor">
+            <a:schemeClr val="lt1"/>
+          </a:fontRef>
+        </p:style>
+        <p:txBody>
+          <a:bodyPr rtlCol="0" anchor="ctr"/>
+          <a:lstStyle/>
+          <a:p>
+            <a:pPr algn="ctr"/>
+            <a:endParaRPr kumimoji="1" lang="ja-JP" altLang="en-US"/>
+          </a:p>
+        </p:txBody>
+      </p:sp>
+    </p:spTree>
+    <p:extLst>
+      <p:ext uri="{BB962C8B-B14F-4D97-AF65-F5344CB8AC3E}">
+        <p14:creationId xmlns:p14="http://schemas.microsoft.com/office/powerpoint/2010/main" val="1145400888"/>
+      </p:ext>
+    </p:extLst>
+  </p:cSld>
+  <p:clrMapOvr>
+    <a:masterClrMapping/>
+  </p:clrMapOvr>
+</p:sld>
+</file>
+
+<file path=ppt/slides/slide5.xml><?xml version="1.0" encoding="utf-8"?>
+<p:sld xmlns:a="http://schemas.openxmlformats.org/drawingml/2006/main" xmlns:r="http://schemas.openxmlformats.org/officeDocument/2006/relationships" xmlns:p="http://schemas.openxmlformats.org/presentationml/2006/main">
+  <p:cSld>
+    <p:spTree>
+      <p:nvGrpSpPr>
+        <p:cNvPr id="1" name=""/>
+        <p:cNvGrpSpPr/>
+        <p:nvPr/>
+      </p:nvGrpSpPr>
+      <p:grpSpPr>
+        <a:xfrm>
+          <a:off x="0" y="0"/>
+          <a:ext cx="0" cy="0"/>
+          <a:chOff x="0" y="0"/>
+          <a:chExt cx="0" cy="0"/>
+        </a:xfrm>
+      </p:grpSpPr>
+      <p:sp>
+        <p:nvSpPr>
+          <p:cNvPr id="4" name="テキスト ボックス 3">
+            <a:extLst>
+              <a:ext uri="{FF2B5EF4-FFF2-40B4-BE49-F238E27FC236}">
+                <a16:creationId xmlns:a16="http://schemas.microsoft.com/office/drawing/2014/main" id="{5A13BF46-B8C5-48AA-8308-C9ECFF431A18}"/>
+              </a:ext>
+            </a:extLst>
+          </p:cNvPr>
+          <p:cNvSpPr txBox="1"/>
+          <p:nvPr/>
+        </p:nvSpPr>
+        <p:spPr>
+          <a:xfrm>
+            <a:off x="567542" y="491954"/>
+            <a:ext cx="3057247" cy="584775"/>
+          </a:xfrm>
+          <a:prstGeom prst="rect">
+            <a:avLst/>
+          </a:prstGeom>
+          <a:noFill/>
+        </p:spPr>
+        <p:txBody>
+          <a:bodyPr wrap="none" rtlCol="0">
+            <a:spAutoFit/>
+          </a:bodyPr>
+          <a:lstStyle/>
+          <a:p>
+            <a:r>
+              <a:rPr kumimoji="1" lang="ja-JP" altLang="en-US" sz="3200" b="1" u="sng" dirty="0"/>
+              <a:t>アニメーション</a:t>
+            </a:r>
+            <a:endParaRPr kumimoji="1" lang="en-US" altLang="ja-JP" sz="3200" b="1" u="sng" dirty="0"/>
+          </a:p>
+        </p:txBody>
+      </p:sp>
+      <p:sp>
+        <p:nvSpPr>
+          <p:cNvPr id="6" name="テキスト ボックス 5">
+            <a:extLst>
+              <a:ext uri="{FF2B5EF4-FFF2-40B4-BE49-F238E27FC236}">
+                <a16:creationId xmlns:a16="http://schemas.microsoft.com/office/drawing/2014/main" id="{55830AD6-028B-4C4E-80BF-B70DFC1C3A46}"/>
+              </a:ext>
+            </a:extLst>
+          </p:cNvPr>
+          <p:cNvSpPr txBox="1"/>
+          <p:nvPr/>
+        </p:nvSpPr>
+        <p:spPr>
+          <a:xfrm>
+            <a:off x="567542" y="1216429"/>
+            <a:ext cx="6647974" cy="461665"/>
+          </a:xfrm>
+          <a:prstGeom prst="rect">
+            <a:avLst/>
+          </a:prstGeom>
+          <a:noFill/>
+        </p:spPr>
+        <p:txBody>
+          <a:bodyPr wrap="none" rtlCol="0">
+            <a:spAutoFit/>
+          </a:bodyPr>
+          <a:lstStyle/>
+          <a:p>
+            <a:r>
+              <a:rPr kumimoji="1" lang="ja-JP" altLang="en-US" sz="2400" dirty="0"/>
+              <a:t>編集モードに切り替えてボーンを編集します。</a:t>
+            </a:r>
+            <a:endParaRPr kumimoji="1" lang="en-US" altLang="ja-JP" sz="2400" dirty="0"/>
+          </a:p>
+        </p:txBody>
+      </p:sp>
+      <p:pic>
+        <p:nvPicPr>
+          <p:cNvPr id="3" name="図 2">
+            <a:extLst>
+              <a:ext uri="{FF2B5EF4-FFF2-40B4-BE49-F238E27FC236}">
+                <a16:creationId xmlns:a16="http://schemas.microsoft.com/office/drawing/2014/main" id="{C2F5F460-9B22-4963-9C7A-1A7B9C612D97}"/>
+              </a:ext>
+            </a:extLst>
+          </p:cNvPr>
+          <p:cNvPicPr>
+            <a:picLocks noChangeAspect="1"/>
+          </p:cNvPicPr>
+          <p:nvPr/>
+        </p:nvPicPr>
+        <p:blipFill>
+          <a:blip r:embed="rId2"/>
+          <a:stretch>
+            <a:fillRect/>
+          </a:stretch>
+        </p:blipFill>
+        <p:spPr>
+          <a:xfrm>
+            <a:off x="567543" y="1817794"/>
+            <a:ext cx="6398034" cy="4713264"/>
+          </a:xfrm>
+          <a:prstGeom prst="rect">
+            <a:avLst/>
+          </a:prstGeom>
+        </p:spPr>
+      </p:pic>
+      <p:sp>
+        <p:nvSpPr>
+          <p:cNvPr id="8" name="矢印: 右 7">
+            <a:extLst>
+              <a:ext uri="{FF2B5EF4-FFF2-40B4-BE49-F238E27FC236}">
+                <a16:creationId xmlns:a16="http://schemas.microsoft.com/office/drawing/2014/main" id="{75259959-1FEC-4E6A-BC7F-4308ED313371}"/>
+              </a:ext>
+            </a:extLst>
+          </p:cNvPr>
+          <p:cNvSpPr/>
+          <p:nvPr/>
+        </p:nvSpPr>
+        <p:spPr>
+          <a:xfrm rot="13638340">
+            <a:off x="1237130" y="2142563"/>
+            <a:ext cx="502023" cy="349624"/>
+          </a:xfrm>
+          <a:prstGeom prst="rightArrow">
+            <a:avLst/>
+          </a:prstGeom>
+          <a:solidFill>
+            <a:srgbClr val="FF0000"/>
+          </a:solidFill>
+          <a:ln>
+            <a:solidFill>
+              <a:schemeClr val="tx1"/>
+            </a:solidFill>
+          </a:ln>
+        </p:spPr>
+        <p:style>
+          <a:lnRef idx="2">
+            <a:schemeClr val="accent1">
+              <a:shade val="50000"/>
+            </a:schemeClr>
+          </a:lnRef>
+          <a:fillRef idx="1">
+            <a:schemeClr val="accent1"/>
+          </a:fillRef>
+          <a:effectRef idx="0">
+            <a:schemeClr val="accent1"/>
+          </a:effectRef>
+          <a:fontRef idx="minor">
+            <a:schemeClr val="lt1"/>
+          </a:fontRef>
+        </p:style>
+        <p:txBody>
+          <a:bodyPr rtlCol="0" anchor="ctr"/>
+          <a:lstStyle/>
+          <a:p>
+            <a:pPr algn="ctr"/>
+            <a:endParaRPr kumimoji="1" lang="ja-JP" altLang="en-US"/>
+          </a:p>
+        </p:txBody>
+      </p:sp>
+    </p:spTree>
+    <p:extLst>
+      <p:ext uri="{BB962C8B-B14F-4D97-AF65-F5344CB8AC3E}">
+        <p14:creationId xmlns:p14="http://schemas.microsoft.com/office/powerpoint/2010/main" val="687667228"/>
+      </p:ext>
+    </p:extLst>
+  </p:cSld>
+  <p:clrMapOvr>
+    <a:masterClrMapping/>
+  </p:clrMapOvr>
+</p:sld>
+</file>
+
+<file path=ppt/slides/slide6.xml><?xml version="1.0" encoding="utf-8"?>
+<p:sld xmlns:a="http://schemas.openxmlformats.org/drawingml/2006/main" xmlns:r="http://schemas.openxmlformats.org/officeDocument/2006/relationships" xmlns:p="http://schemas.openxmlformats.org/presentationml/2006/main">
+  <p:cSld>
+    <p:spTree>
+      <p:nvGrpSpPr>
+        <p:cNvPr id="1" name=""/>
+        <p:cNvGrpSpPr/>
+        <p:nvPr/>
+      </p:nvGrpSpPr>
+      <p:grpSpPr>
+        <a:xfrm>
+          <a:off x="0" y="0"/>
+          <a:ext cx="0" cy="0"/>
+          <a:chOff x="0" y="0"/>
+          <a:chExt cx="0" cy="0"/>
+        </a:xfrm>
+      </p:grpSpPr>
+      <p:sp>
+        <p:nvSpPr>
+          <p:cNvPr id="4" name="テキスト ボックス 3">
+            <a:extLst>
+              <a:ext uri="{FF2B5EF4-FFF2-40B4-BE49-F238E27FC236}">
+                <a16:creationId xmlns:a16="http://schemas.microsoft.com/office/drawing/2014/main" id="{5A13BF46-B8C5-48AA-8308-C9ECFF431A18}"/>
+              </a:ext>
+            </a:extLst>
+          </p:cNvPr>
+          <p:cNvSpPr txBox="1"/>
+          <p:nvPr/>
+        </p:nvSpPr>
+        <p:spPr>
+          <a:xfrm>
+            <a:off x="567542" y="491954"/>
+            <a:ext cx="3057247" cy="584775"/>
+          </a:xfrm>
+          <a:prstGeom prst="rect">
+            <a:avLst/>
+          </a:prstGeom>
+          <a:noFill/>
+        </p:spPr>
+        <p:txBody>
+          <a:bodyPr wrap="none" rtlCol="0">
+            <a:spAutoFit/>
+          </a:bodyPr>
+          <a:lstStyle/>
+          <a:p>
+            <a:r>
+              <a:rPr kumimoji="1" lang="ja-JP" altLang="en-US" sz="3200" b="1" u="sng" dirty="0"/>
+              <a:t>アニメーション</a:t>
+            </a:r>
+            <a:endParaRPr kumimoji="1" lang="en-US" altLang="ja-JP" sz="3200" b="1" u="sng" dirty="0"/>
+          </a:p>
+        </p:txBody>
+      </p:sp>
+      <p:sp>
+        <p:nvSpPr>
+          <p:cNvPr id="6" name="テキスト ボックス 5">
+            <a:extLst>
+              <a:ext uri="{FF2B5EF4-FFF2-40B4-BE49-F238E27FC236}">
+                <a16:creationId xmlns:a16="http://schemas.microsoft.com/office/drawing/2014/main" id="{55830AD6-028B-4C4E-80BF-B70DFC1C3A46}"/>
+              </a:ext>
+            </a:extLst>
+          </p:cNvPr>
+          <p:cNvSpPr txBox="1"/>
+          <p:nvPr/>
+        </p:nvSpPr>
+        <p:spPr>
+          <a:xfrm>
+            <a:off x="567542" y="1216429"/>
+            <a:ext cx="6032421" cy="461665"/>
+          </a:xfrm>
+          <a:prstGeom prst="rect">
+            <a:avLst/>
+          </a:prstGeom>
+          <a:noFill/>
+        </p:spPr>
+        <p:txBody>
+          <a:bodyPr wrap="none" rtlCol="0">
+            <a:spAutoFit/>
+          </a:bodyPr>
+          <a:lstStyle/>
+          <a:p>
+            <a:r>
+              <a:rPr kumimoji="1" lang="ja-JP" altLang="en-US" sz="2400" dirty="0"/>
+              <a:t>ボーンは３つのパーツに分かれています。</a:t>
+            </a:r>
+            <a:endParaRPr kumimoji="1" lang="en-US" altLang="ja-JP" sz="2400" dirty="0"/>
+          </a:p>
+        </p:txBody>
+      </p:sp>
+      <p:pic>
+        <p:nvPicPr>
+          <p:cNvPr id="5" name="図 4">
+            <a:extLst>
+              <a:ext uri="{FF2B5EF4-FFF2-40B4-BE49-F238E27FC236}">
+                <a16:creationId xmlns:a16="http://schemas.microsoft.com/office/drawing/2014/main" id="{F7AAA293-72F4-4105-8F86-7755FA7F3611}"/>
+              </a:ext>
+            </a:extLst>
+          </p:cNvPr>
+          <p:cNvPicPr>
+            <a:picLocks noChangeAspect="1"/>
+          </p:cNvPicPr>
+          <p:nvPr/>
+        </p:nvPicPr>
+        <p:blipFill>
+          <a:blip r:embed="rId2"/>
+          <a:stretch>
+            <a:fillRect/>
+          </a:stretch>
+        </p:blipFill>
+        <p:spPr>
+          <a:xfrm>
+            <a:off x="567542" y="2328782"/>
+            <a:ext cx="1924319" cy="3877216"/>
+          </a:xfrm>
+          <a:prstGeom prst="rect">
+            <a:avLst/>
+          </a:prstGeom>
+        </p:spPr>
+      </p:pic>
+      <p:sp>
+        <p:nvSpPr>
+          <p:cNvPr id="9" name="テキスト ボックス 8">
+            <a:extLst>
+              <a:ext uri="{FF2B5EF4-FFF2-40B4-BE49-F238E27FC236}">
+                <a16:creationId xmlns:a16="http://schemas.microsoft.com/office/drawing/2014/main" id="{AB6CF510-A2BB-4351-95D7-5069F54EAAEC}"/>
+              </a:ext>
+            </a:extLst>
+          </p:cNvPr>
+          <p:cNvSpPr txBox="1"/>
+          <p:nvPr/>
+        </p:nvSpPr>
+        <p:spPr>
+          <a:xfrm>
+            <a:off x="1529701" y="1913283"/>
+            <a:ext cx="3262432" cy="830997"/>
+          </a:xfrm>
+          <a:prstGeom prst="rect">
+            <a:avLst/>
+          </a:prstGeom>
+          <a:solidFill>
+            <a:schemeClr val="bg1"/>
+          </a:solidFill>
+          <a:ln>
+            <a:solidFill>
+              <a:schemeClr val="tx1"/>
+            </a:solidFill>
+          </a:ln>
+        </p:spPr>
+        <p:txBody>
+          <a:bodyPr wrap="none" rtlCol="0">
+            <a:spAutoFit/>
+          </a:bodyPr>
+          <a:lstStyle/>
+          <a:p>
+            <a:r>
+              <a:rPr lang="ja-JP" altLang="en-US" sz="2400" dirty="0">
+                <a:solidFill>
+                  <a:srgbClr val="FF0000"/>
+                </a:solidFill>
+              </a:rPr>
+              <a:t>ヘッド</a:t>
+            </a:r>
+            <a:endParaRPr lang="en-US" altLang="ja-JP" sz="2400" dirty="0">
+              <a:solidFill>
+                <a:srgbClr val="FF0000"/>
+              </a:solidFill>
+            </a:endParaRPr>
+          </a:p>
+          <a:p>
+            <a:r>
+              <a:rPr kumimoji="1" lang="ja-JP" altLang="en-US" sz="2400" dirty="0"/>
+              <a:t>先端の関節となる部分</a:t>
+            </a:r>
+            <a:endParaRPr kumimoji="1" lang="en-US" altLang="ja-JP" sz="2400" dirty="0"/>
+          </a:p>
+        </p:txBody>
+      </p:sp>
+      <p:sp>
+        <p:nvSpPr>
+          <p:cNvPr id="10" name="テキスト ボックス 9">
+            <a:extLst>
+              <a:ext uri="{FF2B5EF4-FFF2-40B4-BE49-F238E27FC236}">
+                <a16:creationId xmlns:a16="http://schemas.microsoft.com/office/drawing/2014/main" id="{5F2569AF-642F-4159-AEF5-CDF8E7AD6882}"/>
+              </a:ext>
+            </a:extLst>
+          </p:cNvPr>
+          <p:cNvSpPr txBox="1"/>
+          <p:nvPr/>
+        </p:nvSpPr>
+        <p:spPr>
+          <a:xfrm>
+            <a:off x="1529701" y="5790500"/>
+            <a:ext cx="3262432" cy="830997"/>
+          </a:xfrm>
+          <a:prstGeom prst="rect">
+            <a:avLst/>
+          </a:prstGeom>
+          <a:solidFill>
+            <a:schemeClr val="bg1"/>
+          </a:solidFill>
+          <a:ln>
+            <a:solidFill>
+              <a:schemeClr val="tx1"/>
+            </a:solidFill>
+          </a:ln>
+        </p:spPr>
+        <p:txBody>
+          <a:bodyPr wrap="none" rtlCol="0">
+            <a:spAutoFit/>
+          </a:bodyPr>
+          <a:lstStyle/>
+          <a:p>
+            <a:r>
+              <a:rPr lang="ja-JP" altLang="en-US" sz="2400" dirty="0">
+                <a:solidFill>
+                  <a:srgbClr val="FF0000"/>
+                </a:solidFill>
+              </a:rPr>
+              <a:t>テール</a:t>
+            </a:r>
+            <a:endParaRPr lang="en-US" altLang="ja-JP" sz="2400" dirty="0">
+              <a:solidFill>
+                <a:srgbClr val="FF0000"/>
+              </a:solidFill>
+            </a:endParaRPr>
+          </a:p>
+          <a:p>
+            <a:r>
+              <a:rPr kumimoji="1" lang="ja-JP" altLang="en-US" sz="2400" dirty="0"/>
+              <a:t>末尾の関節となる部分</a:t>
+            </a:r>
+            <a:endParaRPr kumimoji="1" lang="en-US" altLang="ja-JP" sz="2400" dirty="0"/>
+          </a:p>
+        </p:txBody>
+      </p:sp>
+      <p:sp>
+        <p:nvSpPr>
+          <p:cNvPr id="11" name="テキスト ボックス 10">
+            <a:extLst>
+              <a:ext uri="{FF2B5EF4-FFF2-40B4-BE49-F238E27FC236}">
+                <a16:creationId xmlns:a16="http://schemas.microsoft.com/office/drawing/2014/main" id="{B419C41B-6E46-4108-B1E7-623EFC783BDA}"/>
+              </a:ext>
+            </a:extLst>
+          </p:cNvPr>
+          <p:cNvSpPr txBox="1"/>
+          <p:nvPr/>
+        </p:nvSpPr>
+        <p:spPr>
+          <a:xfrm>
+            <a:off x="1529701" y="3921072"/>
+            <a:ext cx="2646878" cy="830997"/>
+          </a:xfrm>
+          <a:prstGeom prst="rect">
+            <a:avLst/>
+          </a:prstGeom>
+          <a:solidFill>
+            <a:schemeClr val="bg1"/>
+          </a:solidFill>
+          <a:ln>
+            <a:solidFill>
+              <a:schemeClr val="tx1"/>
+            </a:solidFill>
+          </a:ln>
+        </p:spPr>
+        <p:txBody>
+          <a:bodyPr wrap="none" rtlCol="0">
+            <a:spAutoFit/>
+          </a:bodyPr>
+          <a:lstStyle/>
+          <a:p>
+            <a:r>
+              <a:rPr lang="ja-JP" altLang="en-US" sz="2400" dirty="0">
+                <a:solidFill>
+                  <a:srgbClr val="FF0000"/>
+                </a:solidFill>
+              </a:rPr>
+              <a:t>ボディ</a:t>
+            </a:r>
+            <a:endParaRPr lang="en-US" altLang="ja-JP" sz="2400" dirty="0">
+              <a:solidFill>
+                <a:srgbClr val="FF0000"/>
+              </a:solidFill>
+            </a:endParaRPr>
+          </a:p>
+          <a:p>
+            <a:r>
+              <a:rPr kumimoji="1" lang="ja-JP" altLang="en-US" sz="2400" dirty="0"/>
+              <a:t>骨のメインの部分</a:t>
+            </a:r>
+            <a:endParaRPr kumimoji="1" lang="en-US" altLang="ja-JP" sz="2400" dirty="0"/>
+          </a:p>
+        </p:txBody>
+      </p:sp>
+    </p:spTree>
+    <p:extLst>
+      <p:ext uri="{BB962C8B-B14F-4D97-AF65-F5344CB8AC3E}">
+        <p14:creationId xmlns:p14="http://schemas.microsoft.com/office/powerpoint/2010/main" val="218351019"/>
+      </p:ext>
+    </p:extLst>
+  </p:cSld>
+  <p:clrMapOvr>
+    <a:masterClrMapping/>
+  </p:clrMapOvr>
+</p:sld>
+</file>
+
+<file path=ppt/slides/slide7.xml><?xml version="1.0" encoding="utf-8"?>
+<p:sld xmlns:a="http://schemas.openxmlformats.org/drawingml/2006/main" xmlns:r="http://schemas.openxmlformats.org/officeDocument/2006/relationships" xmlns:p="http://schemas.openxmlformats.org/presentationml/2006/main">
+  <p:cSld>
+    <p:spTree>
+      <p:nvGrpSpPr>
+        <p:cNvPr id="1" name=""/>
+        <p:cNvGrpSpPr/>
+        <p:nvPr/>
+      </p:nvGrpSpPr>
+      <p:grpSpPr>
+        <a:xfrm>
+          <a:off x="0" y="0"/>
+          <a:ext cx="0" cy="0"/>
+          <a:chOff x="0" y="0"/>
+          <a:chExt cx="0" cy="0"/>
+        </a:xfrm>
+      </p:grpSpPr>
+      <p:sp>
+        <p:nvSpPr>
+          <p:cNvPr id="4" name="テキスト ボックス 3">
+            <a:extLst>
+              <a:ext uri="{FF2B5EF4-FFF2-40B4-BE49-F238E27FC236}">
+                <a16:creationId xmlns:a16="http://schemas.microsoft.com/office/drawing/2014/main" id="{5A13BF46-B8C5-48AA-8308-C9ECFF431A18}"/>
+              </a:ext>
+            </a:extLst>
+          </p:cNvPr>
+          <p:cNvSpPr txBox="1"/>
+          <p:nvPr/>
+        </p:nvSpPr>
+        <p:spPr>
+          <a:xfrm>
+            <a:off x="567542" y="491954"/>
+            <a:ext cx="3057247" cy="584775"/>
+          </a:xfrm>
+          <a:prstGeom prst="rect">
+            <a:avLst/>
+          </a:prstGeom>
+          <a:noFill/>
+        </p:spPr>
+        <p:txBody>
+          <a:bodyPr wrap="none" rtlCol="0">
+            <a:spAutoFit/>
+          </a:bodyPr>
+          <a:lstStyle/>
+          <a:p>
+            <a:r>
+              <a:rPr kumimoji="1" lang="ja-JP" altLang="en-US" sz="3200" b="1" u="sng" dirty="0"/>
+              <a:t>アニメーション</a:t>
+            </a:r>
+            <a:endParaRPr kumimoji="1" lang="en-US" altLang="ja-JP" sz="3200" b="1" u="sng" dirty="0"/>
+          </a:p>
+        </p:txBody>
+      </p:sp>
+      <p:sp>
+        <p:nvSpPr>
+          <p:cNvPr id="6" name="テキスト ボックス 5">
+            <a:extLst>
+              <a:ext uri="{FF2B5EF4-FFF2-40B4-BE49-F238E27FC236}">
+                <a16:creationId xmlns:a16="http://schemas.microsoft.com/office/drawing/2014/main" id="{55830AD6-028B-4C4E-80BF-B70DFC1C3A46}"/>
+              </a:ext>
+            </a:extLst>
+          </p:cNvPr>
+          <p:cNvSpPr txBox="1"/>
+          <p:nvPr/>
+        </p:nvSpPr>
+        <p:spPr>
+          <a:xfrm>
+            <a:off x="567542" y="1216429"/>
+            <a:ext cx="9417963" cy="830997"/>
+          </a:xfrm>
+          <a:prstGeom prst="rect">
+            <a:avLst/>
+          </a:prstGeom>
+          <a:noFill/>
+        </p:spPr>
+        <p:txBody>
+          <a:bodyPr wrap="none" rtlCol="0">
+            <a:spAutoFit/>
+          </a:bodyPr>
+          <a:lstStyle/>
+          <a:p>
+            <a:r>
+              <a:rPr kumimoji="1" lang="ja-JP" altLang="en-US" sz="2400" dirty="0"/>
+              <a:t>ボーンの</a:t>
+            </a:r>
+            <a:r>
+              <a:rPr kumimoji="1" lang="ja-JP" altLang="en-US" sz="2400" b="1" dirty="0">
+                <a:solidFill>
+                  <a:srgbClr val="FF0000"/>
+                </a:solidFill>
+              </a:rPr>
+              <a:t>位置を移動する場合はボディを選択</a:t>
+            </a:r>
+            <a:r>
+              <a:rPr kumimoji="1" lang="ja-JP" altLang="en-US" sz="2400" dirty="0"/>
+              <a:t>してから移動します。</a:t>
+            </a:r>
+            <a:endParaRPr kumimoji="1" lang="en-US" altLang="ja-JP" sz="2400" dirty="0"/>
+          </a:p>
+          <a:p>
+            <a:r>
+              <a:rPr lang="ja-JP" altLang="en-US" sz="2400" dirty="0"/>
+              <a:t>以下の位置まで移動しましょう。</a:t>
+            </a:r>
+            <a:endParaRPr kumimoji="1" lang="en-US" altLang="ja-JP" sz="2400" dirty="0"/>
+          </a:p>
+        </p:txBody>
+      </p:sp>
+      <p:pic>
+        <p:nvPicPr>
+          <p:cNvPr id="3" name="図 2">
+            <a:extLst>
+              <a:ext uri="{FF2B5EF4-FFF2-40B4-BE49-F238E27FC236}">
+                <a16:creationId xmlns:a16="http://schemas.microsoft.com/office/drawing/2014/main" id="{456BECF3-B57E-4377-A9D7-9F6F593F9D83}"/>
+              </a:ext>
+            </a:extLst>
+          </p:cNvPr>
+          <p:cNvPicPr>
+            <a:picLocks noChangeAspect="1"/>
+          </p:cNvPicPr>
+          <p:nvPr/>
+        </p:nvPicPr>
+        <p:blipFill>
+          <a:blip r:embed="rId2"/>
+          <a:stretch>
+            <a:fillRect/>
+          </a:stretch>
+        </p:blipFill>
+        <p:spPr>
+          <a:xfrm>
+            <a:off x="567542" y="2187126"/>
+            <a:ext cx="3654694" cy="4312286"/>
+          </a:xfrm>
+          <a:prstGeom prst="rect">
+            <a:avLst/>
+          </a:prstGeom>
+        </p:spPr>
+      </p:pic>
+    </p:spTree>
+    <p:extLst>
+      <p:ext uri="{BB962C8B-B14F-4D97-AF65-F5344CB8AC3E}">
+        <p14:creationId xmlns:p14="http://schemas.microsoft.com/office/powerpoint/2010/main" val="3681753416"/>
+      </p:ext>
+    </p:extLst>
+  </p:cSld>
+  <p:clrMapOvr>
+    <a:masterClrMapping/>
+  </p:clrMapOvr>
+</p:sld>
+</file>
+
+<file path=ppt/slides/slide8.xml><?xml version="1.0" encoding="utf-8"?>
+<p:sld xmlns:a="http://schemas.openxmlformats.org/drawingml/2006/main" xmlns:r="http://schemas.openxmlformats.org/officeDocument/2006/relationships" xmlns:p="http://schemas.openxmlformats.org/presentationml/2006/main">
+  <p:cSld>
+    <p:spTree>
+      <p:nvGrpSpPr>
+        <p:cNvPr id="1" name=""/>
+        <p:cNvGrpSpPr/>
+        <p:nvPr/>
+      </p:nvGrpSpPr>
+      <p:grpSpPr>
+        <a:xfrm>
+          <a:off x="0" y="0"/>
+          <a:ext cx="0" cy="0"/>
+          <a:chOff x="0" y="0"/>
+          <a:chExt cx="0" cy="0"/>
+        </a:xfrm>
+      </p:grpSpPr>
+      <p:sp>
+        <p:nvSpPr>
+          <p:cNvPr id="4" name="テキスト ボックス 3">
+            <a:extLst>
+              <a:ext uri="{FF2B5EF4-FFF2-40B4-BE49-F238E27FC236}">
+                <a16:creationId xmlns:a16="http://schemas.microsoft.com/office/drawing/2014/main" id="{5A13BF46-B8C5-48AA-8308-C9ECFF431A18}"/>
+              </a:ext>
+            </a:extLst>
+          </p:cNvPr>
+          <p:cNvSpPr txBox="1"/>
+          <p:nvPr/>
+        </p:nvSpPr>
+        <p:spPr>
+          <a:xfrm>
+            <a:off x="567542" y="491954"/>
+            <a:ext cx="3057247" cy="584775"/>
+          </a:xfrm>
+          <a:prstGeom prst="rect">
+            <a:avLst/>
+          </a:prstGeom>
+          <a:noFill/>
+        </p:spPr>
+        <p:txBody>
+          <a:bodyPr wrap="none" rtlCol="0">
+            <a:spAutoFit/>
+          </a:bodyPr>
+          <a:lstStyle/>
+          <a:p>
+            <a:r>
+              <a:rPr kumimoji="1" lang="ja-JP" altLang="en-US" sz="3200" b="1" u="sng" dirty="0"/>
+              <a:t>アニメーション</a:t>
+            </a:r>
+            <a:endParaRPr kumimoji="1" lang="en-US" altLang="ja-JP" sz="3200" b="1" u="sng" dirty="0"/>
+          </a:p>
+        </p:txBody>
+      </p:sp>
+      <p:sp>
+        <p:nvSpPr>
+          <p:cNvPr id="6" name="テキスト ボックス 5">
+            <a:extLst>
+              <a:ext uri="{FF2B5EF4-FFF2-40B4-BE49-F238E27FC236}">
+                <a16:creationId xmlns:a16="http://schemas.microsoft.com/office/drawing/2014/main" id="{55830AD6-028B-4C4E-80BF-B70DFC1C3A46}"/>
+              </a:ext>
+            </a:extLst>
+          </p:cNvPr>
+          <p:cNvSpPr txBox="1"/>
+          <p:nvPr/>
+        </p:nvSpPr>
+        <p:spPr>
+          <a:xfrm>
+            <a:off x="567542" y="1216429"/>
+            <a:ext cx="9110186" cy="830997"/>
+          </a:xfrm>
+          <a:prstGeom prst="rect">
+            <a:avLst/>
+          </a:prstGeom>
+          <a:noFill/>
+        </p:spPr>
+        <p:txBody>
+          <a:bodyPr wrap="none" rtlCol="0">
+            <a:spAutoFit/>
+          </a:bodyPr>
+          <a:lstStyle/>
+          <a:p>
+            <a:r>
+              <a:rPr kumimoji="1" lang="ja-JP" altLang="en-US" sz="2400" dirty="0"/>
+              <a:t>ボーンは</a:t>
+            </a:r>
+            <a:r>
+              <a:rPr kumimoji="1" lang="ja-JP" altLang="en-US" sz="2400" b="1" dirty="0">
+                <a:solidFill>
+                  <a:srgbClr val="FF0000"/>
+                </a:solidFill>
+              </a:rPr>
+              <a:t>押し出し</a:t>
+            </a:r>
+            <a:r>
+              <a:rPr kumimoji="1" lang="ja-JP" altLang="en-US" sz="2400" dirty="0"/>
+              <a:t>を使うことで、</a:t>
+            </a:r>
+            <a:r>
+              <a:rPr kumimoji="1" lang="ja-JP" altLang="en-US" sz="2400" b="1" dirty="0">
+                <a:solidFill>
+                  <a:srgbClr val="FF0000"/>
+                </a:solidFill>
+              </a:rPr>
+              <a:t>連結した骨を追加</a:t>
+            </a:r>
+            <a:r>
+              <a:rPr kumimoji="1" lang="ja-JP" altLang="en-US" sz="2400" dirty="0"/>
+              <a:t>できます。</a:t>
+            </a:r>
+            <a:endParaRPr kumimoji="1" lang="en-US" altLang="ja-JP" sz="2400" dirty="0"/>
+          </a:p>
+          <a:p>
+            <a:r>
+              <a:rPr lang="ja-JP" altLang="en-US" sz="2400" dirty="0"/>
+              <a:t>ヘッドを選択して右側の押し出しボタンから押し出しましょう。</a:t>
+            </a:r>
+            <a:endParaRPr kumimoji="1" lang="en-US" altLang="ja-JP" sz="2400" dirty="0"/>
+          </a:p>
+        </p:txBody>
+      </p:sp>
+      <p:pic>
+        <p:nvPicPr>
+          <p:cNvPr id="5" name="図 4">
+            <a:extLst>
+              <a:ext uri="{FF2B5EF4-FFF2-40B4-BE49-F238E27FC236}">
+                <a16:creationId xmlns:a16="http://schemas.microsoft.com/office/drawing/2014/main" id="{3F04F86E-8F45-4AEF-93BC-E9944147EE3E}"/>
+              </a:ext>
+            </a:extLst>
+          </p:cNvPr>
+          <p:cNvPicPr>
+            <a:picLocks noChangeAspect="1"/>
+          </p:cNvPicPr>
+          <p:nvPr/>
+        </p:nvPicPr>
+        <p:blipFill>
+          <a:blip r:embed="rId2"/>
+          <a:stretch>
+            <a:fillRect/>
+          </a:stretch>
+        </p:blipFill>
+        <p:spPr>
+          <a:xfrm>
+            <a:off x="567542" y="2187125"/>
+            <a:ext cx="8650875" cy="4043345"/>
+          </a:xfrm>
+          <a:prstGeom prst="rect">
+            <a:avLst/>
+          </a:prstGeom>
+        </p:spPr>
+      </p:pic>
+      <p:sp>
+        <p:nvSpPr>
+          <p:cNvPr id="7" name="矢印: 右 6">
+            <a:extLst>
+              <a:ext uri="{FF2B5EF4-FFF2-40B4-BE49-F238E27FC236}">
+                <a16:creationId xmlns:a16="http://schemas.microsoft.com/office/drawing/2014/main" id="{04D7D5ED-0A65-4320-AA39-3B2BF0C2CE66}"/>
+              </a:ext>
+            </a:extLst>
+          </p:cNvPr>
+          <p:cNvSpPr/>
+          <p:nvPr/>
+        </p:nvSpPr>
+        <p:spPr>
+          <a:xfrm rot="13638340">
+            <a:off x="812447" y="5688098"/>
+            <a:ext cx="502023" cy="349624"/>
+          </a:xfrm>
+          <a:prstGeom prst="rightArrow">
+            <a:avLst/>
+          </a:prstGeom>
+          <a:solidFill>
+            <a:srgbClr val="FF0000"/>
+          </a:solidFill>
+          <a:ln>
+            <a:solidFill>
+              <a:schemeClr val="tx1"/>
+            </a:solidFill>
+          </a:ln>
+        </p:spPr>
+        <p:style>
+          <a:lnRef idx="2">
+            <a:schemeClr val="accent1">
+              <a:shade val="50000"/>
+            </a:schemeClr>
+          </a:lnRef>
+          <a:fillRef idx="1">
+            <a:schemeClr val="accent1"/>
+          </a:fillRef>
+          <a:effectRef idx="0">
+            <a:schemeClr val="accent1"/>
+          </a:effectRef>
+          <a:fontRef idx="minor">
+            <a:schemeClr val="lt1"/>
+          </a:fontRef>
+        </p:style>
+        <p:txBody>
+          <a:bodyPr rtlCol="0" anchor="ctr"/>
+          <a:lstStyle/>
+          <a:p>
+            <a:pPr algn="ctr"/>
+            <a:endParaRPr kumimoji="1" lang="ja-JP" altLang="en-US"/>
+          </a:p>
+        </p:txBody>
+      </p:sp>
+    </p:spTree>
+    <p:extLst>
+      <p:ext uri="{BB962C8B-B14F-4D97-AF65-F5344CB8AC3E}">
+        <p14:creationId xmlns:p14="http://schemas.microsoft.com/office/powerpoint/2010/main" val="1010854150"/>
+      </p:ext>
+    </p:extLst>
+  </p:cSld>
+  <p:clrMapOvr>
+    <a:masterClrMapping/>
+  </p:clrMapOvr>
+</p:sld>
+</file>
+
+<file path=ppt/slides/slide9.xml><?xml version="1.0" encoding="utf-8"?>
+<p:sld xmlns:a="http://schemas.openxmlformats.org/drawingml/2006/main" xmlns:r="http://schemas.openxmlformats.org/officeDocument/2006/relationships" xmlns:p="http://schemas.openxmlformats.org/presentationml/2006/main">
+  <p:cSld>
+    <p:spTree>
+      <p:nvGrpSpPr>
+        <p:cNvPr id="1" name=""/>
+        <p:cNvGrpSpPr/>
+        <p:nvPr/>
+      </p:nvGrpSpPr>
+      <p:grpSpPr>
+        <a:xfrm>
+          <a:off x="0" y="0"/>
+          <a:ext cx="0" cy="0"/>
+          <a:chOff x="0" y="0"/>
+          <a:chExt cx="0" cy="0"/>
+        </a:xfrm>
+      </p:grpSpPr>
+      <p:sp>
+        <p:nvSpPr>
+          <p:cNvPr id="4" name="テキスト ボックス 3">
+            <a:extLst>
+              <a:ext uri="{FF2B5EF4-FFF2-40B4-BE49-F238E27FC236}">
+                <a16:creationId xmlns:a16="http://schemas.microsoft.com/office/drawing/2014/main" id="{5A13BF46-B8C5-48AA-8308-C9ECFF431A18}"/>
+              </a:ext>
+            </a:extLst>
+          </p:cNvPr>
+          <p:cNvSpPr txBox="1"/>
+          <p:nvPr/>
+        </p:nvSpPr>
+        <p:spPr>
+          <a:xfrm>
+            <a:off x="567542" y="491954"/>
+            <a:ext cx="3057247" cy="584775"/>
+          </a:xfrm>
+          <a:prstGeom prst="rect">
+            <a:avLst/>
+          </a:prstGeom>
+          <a:noFill/>
+        </p:spPr>
+        <p:txBody>
+          <a:bodyPr wrap="none" rtlCol="0">
+            <a:spAutoFit/>
+          </a:bodyPr>
+          <a:lstStyle/>
+          <a:p>
+            <a:r>
+              <a:rPr kumimoji="1" lang="ja-JP" altLang="en-US" sz="3200" b="1" u="sng" dirty="0"/>
+              <a:t>アニメーション</a:t>
+            </a:r>
+            <a:endParaRPr kumimoji="1" lang="en-US" altLang="ja-JP" sz="3200" b="1" u="sng" dirty="0"/>
+          </a:p>
+        </p:txBody>
+      </p:sp>
+      <p:sp>
+        <p:nvSpPr>
+          <p:cNvPr id="6" name="テキスト ボックス 5">
+            <a:extLst>
+              <a:ext uri="{FF2B5EF4-FFF2-40B4-BE49-F238E27FC236}">
+                <a16:creationId xmlns:a16="http://schemas.microsoft.com/office/drawing/2014/main" id="{55830AD6-028B-4C4E-80BF-B70DFC1C3A46}"/>
+              </a:ext>
+            </a:extLst>
+          </p:cNvPr>
+          <p:cNvSpPr txBox="1"/>
+          <p:nvPr/>
+        </p:nvSpPr>
+        <p:spPr>
+          <a:xfrm>
+            <a:off x="567542" y="1216429"/>
+            <a:ext cx="4493538" cy="461665"/>
+          </a:xfrm>
+          <a:prstGeom prst="rect">
+            <a:avLst/>
+          </a:prstGeom>
+          <a:noFill/>
+        </p:spPr>
+        <p:txBody>
+          <a:bodyPr wrap="none" rtlCol="0">
+            <a:spAutoFit/>
+          </a:bodyPr>
+          <a:lstStyle/>
+          <a:p>
+            <a:r>
+              <a:rPr kumimoji="1" lang="ja-JP" altLang="en-US" sz="2400" dirty="0"/>
+              <a:t>こんな感じにしてみましょう。</a:t>
+            </a:r>
+            <a:endParaRPr kumimoji="1" lang="en-US" altLang="ja-JP" sz="2400" dirty="0"/>
+          </a:p>
+        </p:txBody>
+      </p:sp>
+      <p:pic>
+        <p:nvPicPr>
+          <p:cNvPr id="3" name="図 2">
+            <a:extLst>
+              <a:ext uri="{FF2B5EF4-FFF2-40B4-BE49-F238E27FC236}">
+                <a16:creationId xmlns:a16="http://schemas.microsoft.com/office/drawing/2014/main" id="{8C850D88-BC37-48CE-B354-B11452BC6C92}"/>
+              </a:ext>
+            </a:extLst>
+          </p:cNvPr>
+          <p:cNvPicPr>
+            <a:picLocks noChangeAspect="1"/>
+          </p:cNvPicPr>
+          <p:nvPr/>
+        </p:nvPicPr>
+        <p:blipFill>
+          <a:blip r:embed="rId2"/>
+          <a:stretch>
+            <a:fillRect/>
+          </a:stretch>
+        </p:blipFill>
+        <p:spPr>
+          <a:xfrm>
+            <a:off x="567542" y="1817795"/>
+            <a:ext cx="3551896" cy="4548252"/>
+          </a:xfrm>
+          <a:prstGeom prst="rect">
+            <a:avLst/>
+          </a:prstGeom>
+        </p:spPr>
+      </p:pic>
+    </p:spTree>
+    <p:extLst>
+      <p:ext uri="{BB962C8B-B14F-4D97-AF65-F5344CB8AC3E}">
+        <p14:creationId xmlns:p14="http://schemas.microsoft.com/office/powerpoint/2010/main" val="2481254200"/>
       </p:ext>
     </p:extLst>
   </p:cSld>
